--- a/RLHF_Mini_Project.pptx
+++ b/RLHF_Mini_Project.pptx
@@ -5,26 +5,24 @@
     <p:sldMasterId id="2147483648" r:id="rId1"/>
   </p:sldMasterIdLst>
   <p:notesMasterIdLst>
-    <p:notesMasterId r:id="rId19"/>
+    <p:notesMasterId r:id="rId17"/>
   </p:notesMasterIdLst>
   <p:sldIdLst>
-    <p:sldId id="256" r:id="rId2"/>
-    <p:sldId id="257" r:id="rId3"/>
-    <p:sldId id="258" r:id="rId4"/>
-    <p:sldId id="259" r:id="rId5"/>
-    <p:sldId id="260" r:id="rId6"/>
-    <p:sldId id="261" r:id="rId7"/>
-    <p:sldId id="262" r:id="rId8"/>
-    <p:sldId id="263" r:id="rId9"/>
-    <p:sldId id="264" r:id="rId10"/>
-    <p:sldId id="265" r:id="rId11"/>
-    <p:sldId id="266" r:id="rId12"/>
-    <p:sldId id="267" r:id="rId13"/>
-    <p:sldId id="268" r:id="rId14"/>
-    <p:sldId id="269" r:id="rId15"/>
-    <p:sldId id="270" r:id="rId16"/>
-    <p:sldId id="271" r:id="rId17"/>
-    <p:sldId id="272" r:id="rId18"/>
+    <p:sldId id="257" r:id="rId2"/>
+    <p:sldId id="258" r:id="rId3"/>
+    <p:sldId id="259" r:id="rId4"/>
+    <p:sldId id="260" r:id="rId5"/>
+    <p:sldId id="261" r:id="rId6"/>
+    <p:sldId id="262" r:id="rId7"/>
+    <p:sldId id="263" r:id="rId8"/>
+    <p:sldId id="264" r:id="rId9"/>
+    <p:sldId id="265" r:id="rId10"/>
+    <p:sldId id="266" r:id="rId11"/>
+    <p:sldId id="267" r:id="rId12"/>
+    <p:sldId id="268" r:id="rId13"/>
+    <p:sldId id="269" r:id="rId14"/>
+    <p:sldId id="270" r:id="rId15"/>
+    <p:sldId id="271" r:id="rId16"/>
   </p:sldIdLst>
   <p:sldSz cx="9144000" cy="5143500" type="screen16x9"/>
   <p:notesSz cx="5143500" cy="9144000"/>
@@ -1119,174 +1117,6 @@
             <a:fld id="{F7021451-1387-4CA6-816F-3879F97B5CBC}" type="slidenum">
               <a:rPr lang="en-US"/>
               <a:t>15</a:t>
-            </a:fld>
-            <a:endParaRPr lang="en-US"/>
-          </a:p>
-        </p:txBody>
-      </p:sp>
-    </p:spTree>
-    <p:extLst>
-      <p:ext uri="{BB962C8B-B14F-4D97-AF65-F5344CB8AC3E}">
-        <p14:creationId xmlns:p14="http://schemas.microsoft.com/office/powerpoint/2010/main" val="1024086991"/>
-      </p:ext>
-    </p:extLst>
-  </p:cSld>
-  <p:clrMapOvr>
-    <a:masterClrMapping/>
-  </p:clrMapOvr>
-</p:notes>
-</file>
-
-<file path=ppt/notesSlides/notesSlide16.xml><?xml version="1.0" encoding="utf-8"?>
-<p:notes xmlns:a="http://schemas.openxmlformats.org/drawingml/2006/main" xmlns:r="http://schemas.openxmlformats.org/officeDocument/2006/relationships" xmlns:p="http://schemas.openxmlformats.org/presentationml/2006/main">
-  <p:cSld>
-    <p:spTree>
-      <p:nvGrpSpPr>
-        <p:cNvPr id="1" name=""/>
-        <p:cNvGrpSpPr/>
-        <p:nvPr/>
-      </p:nvGrpSpPr>
-      <p:grpSpPr>
-        <a:xfrm>
-          <a:off x="0" y="0"/>
-          <a:ext cx="0" cy="0"/>
-          <a:chOff x="0" y="0"/>
-          <a:chExt cx="0" cy="0"/>
-        </a:xfrm>
-      </p:grpSpPr>
-      <p:sp>
-        <p:nvSpPr>
-          <p:cNvPr id="2" name="Slide Image Placeholder 1"/>
-          <p:cNvSpPr>
-            <a:spLocks noGrp="1" noRot="1" noChangeAspect="1"/>
-          </p:cNvSpPr>
-          <p:nvPr>
-            <p:ph type="sldImg"/>
-          </p:nvPr>
-        </p:nvSpPr>
-        <p:spPr/>
-      </p:sp>
-      <p:sp>
-        <p:nvSpPr>
-          <p:cNvPr id="3" name="Notes Placeholder 2"/>
-          <p:cNvSpPr>
-            <a:spLocks noGrp="1"/>
-          </p:cNvSpPr>
-          <p:nvPr>
-            <p:ph type="body" idx="1"/>
-          </p:nvPr>
-        </p:nvSpPr>
-        <p:spPr/>
-        <p:txBody>
-          <a:bodyPr/>
-          <a:lstStyle/>
-          <a:p>
-            <a:endParaRPr lang="en-US" dirty="0"/>
-          </a:p>
-        </p:txBody>
-      </p:sp>
-      <p:sp>
-        <p:nvSpPr>
-          <p:cNvPr id="4" name="Slide Number Placeholder 3"/>
-          <p:cNvSpPr>
-            <a:spLocks noGrp="1"/>
-          </p:cNvSpPr>
-          <p:nvPr>
-            <p:ph type="sldNum" sz="quarter" idx="10"/>
-          </p:nvPr>
-        </p:nvSpPr>
-        <p:spPr/>
-        <p:txBody>
-          <a:bodyPr/>
-          <a:lstStyle/>
-          <a:p>
-            <a:fld id="{F7021451-1387-4CA6-816F-3879F97B5CBC}" type="slidenum">
-              <a:rPr lang="en-US"/>
-              <a:t>16</a:t>
-            </a:fld>
-            <a:endParaRPr lang="en-US"/>
-          </a:p>
-        </p:txBody>
-      </p:sp>
-    </p:spTree>
-    <p:extLst>
-      <p:ext uri="{BB962C8B-B14F-4D97-AF65-F5344CB8AC3E}">
-        <p14:creationId xmlns:p14="http://schemas.microsoft.com/office/powerpoint/2010/main" val="1024086991"/>
-      </p:ext>
-    </p:extLst>
-  </p:cSld>
-  <p:clrMapOvr>
-    <a:masterClrMapping/>
-  </p:clrMapOvr>
-</p:notes>
-</file>
-
-<file path=ppt/notesSlides/notesSlide17.xml><?xml version="1.0" encoding="utf-8"?>
-<p:notes xmlns:a="http://schemas.openxmlformats.org/drawingml/2006/main" xmlns:r="http://schemas.openxmlformats.org/officeDocument/2006/relationships" xmlns:p="http://schemas.openxmlformats.org/presentationml/2006/main">
-  <p:cSld>
-    <p:spTree>
-      <p:nvGrpSpPr>
-        <p:cNvPr id="1" name=""/>
-        <p:cNvGrpSpPr/>
-        <p:nvPr/>
-      </p:nvGrpSpPr>
-      <p:grpSpPr>
-        <a:xfrm>
-          <a:off x="0" y="0"/>
-          <a:ext cx="0" cy="0"/>
-          <a:chOff x="0" y="0"/>
-          <a:chExt cx="0" cy="0"/>
-        </a:xfrm>
-      </p:grpSpPr>
-      <p:sp>
-        <p:nvSpPr>
-          <p:cNvPr id="2" name="Slide Image Placeholder 1"/>
-          <p:cNvSpPr>
-            <a:spLocks noGrp="1" noRot="1" noChangeAspect="1"/>
-          </p:cNvSpPr>
-          <p:nvPr>
-            <p:ph type="sldImg"/>
-          </p:nvPr>
-        </p:nvSpPr>
-        <p:spPr/>
-      </p:sp>
-      <p:sp>
-        <p:nvSpPr>
-          <p:cNvPr id="3" name="Notes Placeholder 2"/>
-          <p:cNvSpPr>
-            <a:spLocks noGrp="1"/>
-          </p:cNvSpPr>
-          <p:nvPr>
-            <p:ph type="body" idx="1"/>
-          </p:nvPr>
-        </p:nvSpPr>
-        <p:spPr/>
-        <p:txBody>
-          <a:bodyPr/>
-          <a:lstStyle/>
-          <a:p>
-            <a:endParaRPr lang="en-US" dirty="0"/>
-          </a:p>
-        </p:txBody>
-      </p:sp>
-      <p:sp>
-        <p:nvSpPr>
-          <p:cNvPr id="4" name="Slide Number Placeholder 3"/>
-          <p:cNvSpPr>
-            <a:spLocks noGrp="1"/>
-          </p:cNvSpPr>
-          <p:nvPr>
-            <p:ph type="sldNum" sz="quarter" idx="10"/>
-          </p:nvPr>
-        </p:nvSpPr>
-        <p:spPr/>
-        <p:txBody>
-          <a:bodyPr/>
-          <a:lstStyle/>
-          <a:p>
-            <a:fld id="{F7021451-1387-4CA6-816F-3879F97B5CBC}" type="slidenum">
-              <a:rPr lang="en-US"/>
-              <a:t>17</a:t>
             </a:fld>
             <a:endParaRPr lang="en-US"/>
           </a:p>
@@ -2291,7 +2121,7 @@
 
 <file path=ppt/slides/slide1.xml><?xml version="1.0" encoding="utf-8"?>
 <p:sld xmlns:a="http://schemas.openxmlformats.org/drawingml/2006/main" xmlns:r="http://schemas.openxmlformats.org/officeDocument/2006/relationships" xmlns:p="http://schemas.openxmlformats.org/presentationml/2006/main">
-  <p:cSld name="Slide 1">
+  <p:cSld name="Slide 2">
     <p:spTree>
       <p:nvGrpSpPr>
         <p:cNvPr id="1" name=""/>
@@ -2322,8 +2152,8 @@
         </p:blipFill>
         <p:spPr>
           <a:xfrm>
-            <a:off x="137160" y="91440"/>
-            <a:ext cx="8869680" cy="731520"/>
+            <a:off x="137160" y="45720"/>
+            <a:ext cx="8869680" cy="667512"/>
           </a:xfrm>
           <a:prstGeom prst="rect">
             <a:avLst/>
@@ -2332,137 +2162,22 @@
       </p:pic>
       <p:sp>
         <p:nvSpPr>
-          <p:cNvPr id="3" name="Text 0"/>
-          <p:cNvSpPr/>
-          <p:nvPr/>
-        </p:nvSpPr>
-        <p:spPr>
-          <a:xfrm>
-            <a:off x="457200" y="1051560"/>
-            <a:ext cx="8229600" cy="502920"/>
-          </a:xfrm>
-          <a:prstGeom prst="rect">
-            <a:avLst/>
-          </a:prstGeom>
-          <a:noFill/>
-          <a:ln/>
-        </p:spPr>
-        <p:txBody>
-          <a:bodyPr wrap="square" lIns="0" tIns="0" rIns="0" bIns="0" rtlCol="0" anchor="ctr"/>
-          <a:lstStyle/>
-          <a:p>
-            <a:pPr marL="0" indent="0" algn="ctr">
-              <a:buNone/>
-            </a:pPr>
-            <a:r>
-              <a:rPr lang="en-US" sz="2800" b="1" dirty="0">
-                <a:solidFill>
-                  <a:srgbClr val="1E293B"/>
-                </a:solidFill>
-                <a:latin typeface="Calibri" pitchFamily="34" charset="0"/>
-                <a:ea typeface="Calibri" pitchFamily="34" charset="-122"/>
-                <a:cs typeface="Calibri" pitchFamily="34" charset="-120"/>
-              </a:rPr>
-              <a:t>Reward Modeling + Direct Preference Optimization</a:t>
-            </a:r>
-            <a:endParaRPr lang="en-US" sz="2800" dirty="0"/>
-          </a:p>
-        </p:txBody>
-      </p:sp>
-      <p:sp>
-        <p:nvSpPr>
-          <p:cNvPr id="4" name="Text 1"/>
-          <p:cNvSpPr/>
-          <p:nvPr/>
-        </p:nvSpPr>
-        <p:spPr>
-          <a:xfrm>
-            <a:off x="457200" y="1554480"/>
-            <a:ext cx="8229600" cy="320040"/>
-          </a:xfrm>
-          <a:prstGeom prst="rect">
-            <a:avLst/>
-          </a:prstGeom>
-          <a:noFill/>
-          <a:ln/>
-        </p:spPr>
-        <p:txBody>
-          <a:bodyPr wrap="square" lIns="0" tIns="0" rIns="0" bIns="0" rtlCol="0" anchor="ctr"/>
-          <a:lstStyle/>
-          <a:p>
-            <a:pPr marL="0" indent="0" algn="ctr">
-              <a:buNone/>
-            </a:pPr>
-            <a:r>
-              <a:rPr lang="en-US" sz="1400" i="1" dirty="0">
-                <a:solidFill>
-                  <a:srgbClr val="3B82F6"/>
-                </a:solidFill>
-                <a:latin typeface="Calibri" pitchFamily="34" charset="0"/>
-                <a:ea typeface="Calibri" pitchFamily="34" charset="-122"/>
-                <a:cs typeface="Calibri" pitchFamily="34" charset="-120"/>
-              </a:rPr>
-              <a:t>Cross-Distribution RLHF on Combined HH-RLHF + LMSYS Arena Data</a:t>
-            </a:r>
-            <a:endParaRPr lang="en-US" sz="1400" dirty="0"/>
-          </a:p>
-        </p:txBody>
-      </p:sp>
-      <p:sp>
-        <p:nvSpPr>
-          <p:cNvPr id="5" name="Text 2"/>
-          <p:cNvSpPr/>
-          <p:nvPr/>
-        </p:nvSpPr>
-        <p:spPr>
-          <a:xfrm>
-            <a:off x="457200" y="1828800"/>
-            <a:ext cx="8229600" cy="274320"/>
-          </a:xfrm>
-          <a:prstGeom prst="rect">
-            <a:avLst/>
-          </a:prstGeom>
-          <a:noFill/>
-          <a:ln/>
-        </p:spPr>
-        <p:txBody>
-          <a:bodyPr wrap="square" lIns="0" tIns="0" rIns="0" bIns="0" rtlCol="0" anchor="ctr"/>
-          <a:lstStyle/>
-          <a:p>
-            <a:pPr marL="0" indent="0" algn="ctr">
-              <a:buNone/>
-            </a:pPr>
-            <a:r>
-              <a:rPr lang="en-US" sz="1200" i="1" dirty="0">
-                <a:solidFill>
-                  <a:srgbClr val="3B82F6"/>
-                </a:solidFill>
-                <a:latin typeface="Calibri" pitchFamily="34" charset="0"/>
-                <a:ea typeface="Calibri" pitchFamily="34" charset="-122"/>
-                <a:cs typeface="Calibri" pitchFamily="34" charset="-120"/>
-              </a:rPr>
-              <a:t>DeBERTa-v3  •  TinyLlama-1.1B  •  LoRA  •  DPO</a:t>
-            </a:r>
-            <a:endParaRPr lang="en-US" sz="1200" dirty="0"/>
-          </a:p>
-        </p:txBody>
-      </p:sp>
-      <p:sp>
-        <p:nvSpPr>
-          <p:cNvPr id="6" name="Shape 3"/>
-          <p:cNvSpPr/>
-          <p:nvPr/>
-        </p:nvSpPr>
-        <p:spPr>
-          <a:xfrm>
-            <a:off x="2286000" y="2240280"/>
-            <a:ext cx="4572000" cy="0"/>
-          </a:xfrm>
-          <a:prstGeom prst="line">
-            <a:avLst/>
-          </a:prstGeom>
-          <a:noFill/>
-          <a:ln w="25400">
+          <p:cNvPr id="3" name="Shape 0"/>
+          <p:cNvSpPr/>
+          <p:nvPr/>
+        </p:nvSpPr>
+        <p:spPr>
+          <a:xfrm>
+            <a:off x="0" y="713232"/>
+            <a:ext cx="73152" cy="4160520"/>
+          </a:xfrm>
+          <a:prstGeom prst="rect">
+            <a:avLst/>
+          </a:prstGeom>
+          <a:solidFill>
+            <a:srgbClr val="F5A623"/>
+          </a:solidFill>
+          <a:ln w="12700">
             <a:solidFill>
               <a:srgbClr val="F5A623"/>
             </a:solidFill>
@@ -2472,485 +2187,20 @@
       </p:sp>
       <p:sp>
         <p:nvSpPr>
-          <p:cNvPr id="7" name="Text 4"/>
-          <p:cNvSpPr/>
-          <p:nvPr/>
-        </p:nvSpPr>
-        <p:spPr>
-          <a:xfrm>
-            <a:off x="457200" y="2331720"/>
-            <a:ext cx="8229600" cy="274320"/>
-          </a:xfrm>
-          <a:prstGeom prst="rect">
-            <a:avLst/>
-          </a:prstGeom>
-          <a:noFill/>
-          <a:ln/>
-        </p:spPr>
-        <p:txBody>
-          <a:bodyPr wrap="square" lIns="0" tIns="0" rIns="0" bIns="0" rtlCol="0" anchor="ctr"/>
-          <a:lstStyle/>
-          <a:p>
-            <a:pPr marL="0" indent="0" algn="ctr">
-              <a:buNone/>
-            </a:pPr>
-            <a:r>
-              <a:rPr lang="en-US" sz="1200" b="1" dirty="0">
-                <a:solidFill>
-                  <a:srgbClr val="1E293B"/>
-                </a:solidFill>
-                <a:latin typeface="Calibri" pitchFamily="34" charset="0"/>
-                <a:ea typeface="Calibri" pitchFamily="34" charset="-122"/>
-                <a:cs typeface="Calibri" pitchFamily="34" charset="-120"/>
-              </a:rPr>
-              <a:t>Authors</a:t>
-            </a:r>
-            <a:endParaRPr lang="en-US" sz="1200" dirty="0"/>
-          </a:p>
-        </p:txBody>
-      </p:sp>
-      <p:sp>
-        <p:nvSpPr>
-          <p:cNvPr id="8" name="Shape 5"/>
-          <p:cNvSpPr/>
-          <p:nvPr/>
-        </p:nvSpPr>
-        <p:spPr>
-          <a:xfrm>
-            <a:off x="548640" y="2651760"/>
-            <a:ext cx="2560320" cy="777240"/>
-          </a:xfrm>
-          <a:prstGeom prst="rect">
-            <a:avLst/>
-          </a:prstGeom>
-          <a:solidFill>
-            <a:srgbClr val="F1F5F9"/>
-          </a:solidFill>
-          <a:ln w="6350">
-            <a:solidFill>
-              <a:srgbClr val="E2E8F0"/>
-            </a:solidFill>
-            <a:prstDash val="solid"/>
-          </a:ln>
-        </p:spPr>
-      </p:sp>
-      <p:sp>
-        <p:nvSpPr>
-          <p:cNvPr id="9" name="Text 6"/>
-          <p:cNvSpPr/>
-          <p:nvPr/>
-        </p:nvSpPr>
-        <p:spPr>
-          <a:xfrm>
-            <a:off x="548640" y="2697480"/>
-            <a:ext cx="2560320" cy="274320"/>
-          </a:xfrm>
-          <a:prstGeom prst="rect">
-            <a:avLst/>
-          </a:prstGeom>
-          <a:noFill/>
-          <a:ln/>
-        </p:spPr>
-        <p:txBody>
-          <a:bodyPr wrap="square" lIns="0" tIns="0" rIns="0" bIns="0" rtlCol="0" anchor="ctr"/>
-          <a:lstStyle/>
-          <a:p>
-            <a:pPr marL="0" indent="0" algn="ctr">
-              <a:buNone/>
-            </a:pPr>
-            <a:r>
-              <a:rPr lang="en-US" sz="1300" b="1" dirty="0">
-                <a:solidFill>
-                  <a:srgbClr val="1E293B"/>
-                </a:solidFill>
-                <a:latin typeface="Calibri" pitchFamily="34" charset="0"/>
-                <a:ea typeface="Calibri" pitchFamily="34" charset="-122"/>
-                <a:cs typeface="Calibri" pitchFamily="34" charset="-120"/>
-              </a:rPr>
-              <a:t>Pratik D. Avhad</a:t>
-            </a:r>
-            <a:endParaRPr lang="en-US" sz="1300" dirty="0"/>
-          </a:p>
-        </p:txBody>
-      </p:sp>
-      <p:sp>
-        <p:nvSpPr>
-          <p:cNvPr id="10" name="Text 7"/>
-          <p:cNvSpPr/>
-          <p:nvPr/>
-        </p:nvSpPr>
-        <p:spPr>
-          <a:xfrm>
-            <a:off x="548640" y="2944368"/>
-            <a:ext cx="2560320" cy="228600"/>
-          </a:xfrm>
-          <a:prstGeom prst="rect">
-            <a:avLst/>
-          </a:prstGeom>
-          <a:noFill/>
-          <a:ln/>
-        </p:spPr>
-        <p:txBody>
-          <a:bodyPr wrap="square" lIns="0" tIns="0" rIns="0" bIns="0" rtlCol="0" anchor="ctr"/>
-          <a:lstStyle/>
-          <a:p>
-            <a:pPr marL="0" indent="0" algn="ctr">
-              <a:buNone/>
-            </a:pPr>
-            <a:r>
-              <a:rPr lang="en-US" sz="1100" dirty="0">
-                <a:solidFill>
-                  <a:srgbClr val="3B82F6"/>
-                </a:solidFill>
-                <a:latin typeface="Calibri" pitchFamily="34" charset="0"/>
-                <a:ea typeface="Calibri" pitchFamily="34" charset="-122"/>
-                <a:cs typeface="Calibri" pitchFamily="34" charset="-120"/>
-              </a:rPr>
-              <a:t>UI23CS54</a:t>
-            </a:r>
-            <a:endParaRPr lang="en-US" sz="1100" dirty="0"/>
-          </a:p>
-        </p:txBody>
-      </p:sp>
-      <p:sp>
-        <p:nvSpPr>
-          <p:cNvPr id="11" name="Text 8"/>
-          <p:cNvSpPr/>
-          <p:nvPr/>
-        </p:nvSpPr>
-        <p:spPr>
-          <a:xfrm>
-            <a:off x="548640" y="3154680"/>
-            <a:ext cx="2560320" cy="228600"/>
-          </a:xfrm>
-          <a:prstGeom prst="rect">
-            <a:avLst/>
-          </a:prstGeom>
-          <a:noFill/>
-          <a:ln/>
-        </p:spPr>
-        <p:txBody>
-          <a:bodyPr wrap="square" lIns="0" tIns="0" rIns="0" bIns="0" rtlCol="0" anchor="ctr"/>
-          <a:lstStyle/>
-          <a:p>
-            <a:pPr marL="0" indent="0" algn="ctr">
-              <a:buNone/>
-            </a:pPr>
-            <a:r>
-              <a:rPr lang="en-US" sz="950" i="1" dirty="0">
-                <a:solidFill>
-                  <a:srgbClr val="475569"/>
-                </a:solidFill>
-                <a:latin typeface="Calibri" pitchFamily="34" charset="0"/>
-                <a:ea typeface="Calibri" pitchFamily="34" charset="-122"/>
-                <a:cs typeface="Calibri" pitchFamily="34" charset="-120"/>
-              </a:rPr>
-              <a:t>ui23cs54@iiitsurat.ac.in</a:t>
-            </a:r>
-            <a:endParaRPr lang="en-US" sz="950" dirty="0"/>
-          </a:p>
-        </p:txBody>
-      </p:sp>
-      <p:sp>
-        <p:nvSpPr>
-          <p:cNvPr id="12" name="Shape 9"/>
-          <p:cNvSpPr/>
-          <p:nvPr/>
-        </p:nvSpPr>
-        <p:spPr>
-          <a:xfrm>
-            <a:off x="3291840" y="2651760"/>
-            <a:ext cx="2560320" cy="777240"/>
-          </a:xfrm>
-          <a:prstGeom prst="rect">
-            <a:avLst/>
-          </a:prstGeom>
-          <a:solidFill>
-            <a:srgbClr val="F1F5F9"/>
-          </a:solidFill>
-          <a:ln w="6350">
-            <a:solidFill>
-              <a:srgbClr val="E2E8F0"/>
-            </a:solidFill>
-            <a:prstDash val="solid"/>
-          </a:ln>
-        </p:spPr>
-      </p:sp>
-      <p:sp>
-        <p:nvSpPr>
-          <p:cNvPr id="13" name="Text 10"/>
-          <p:cNvSpPr/>
-          <p:nvPr/>
-        </p:nvSpPr>
-        <p:spPr>
-          <a:xfrm>
-            <a:off x="3291840" y="2697480"/>
-            <a:ext cx="2560320" cy="274320"/>
-          </a:xfrm>
-          <a:prstGeom prst="rect">
-            <a:avLst/>
-          </a:prstGeom>
-          <a:noFill/>
-          <a:ln/>
-        </p:spPr>
-        <p:txBody>
-          <a:bodyPr wrap="square" lIns="0" tIns="0" rIns="0" bIns="0" rtlCol="0" anchor="ctr"/>
-          <a:lstStyle/>
-          <a:p>
-            <a:pPr marL="0" indent="0" algn="ctr">
-              <a:buNone/>
-            </a:pPr>
-            <a:r>
-              <a:rPr lang="en-US" sz="1300" b="1" dirty="0">
-                <a:solidFill>
-                  <a:srgbClr val="1E293B"/>
-                </a:solidFill>
-                <a:latin typeface="Calibri" pitchFamily="34" charset="0"/>
-                <a:ea typeface="Calibri" pitchFamily="34" charset="-122"/>
-                <a:cs typeface="Calibri" pitchFamily="34" charset="-120"/>
-              </a:rPr>
-              <a:t>Sahil Singh</a:t>
-            </a:r>
-            <a:endParaRPr lang="en-US" sz="1300" dirty="0"/>
-          </a:p>
-        </p:txBody>
-      </p:sp>
-      <p:sp>
-        <p:nvSpPr>
-          <p:cNvPr id="14" name="Text 11"/>
-          <p:cNvSpPr/>
-          <p:nvPr/>
-        </p:nvSpPr>
-        <p:spPr>
-          <a:xfrm>
-            <a:off x="3291840" y="2944368"/>
-            <a:ext cx="2560320" cy="228600"/>
-          </a:xfrm>
-          <a:prstGeom prst="rect">
-            <a:avLst/>
-          </a:prstGeom>
-          <a:noFill/>
-          <a:ln/>
-        </p:spPr>
-        <p:txBody>
-          <a:bodyPr wrap="square" lIns="0" tIns="0" rIns="0" bIns="0" rtlCol="0" anchor="ctr"/>
-          <a:lstStyle/>
-          <a:p>
-            <a:pPr marL="0" indent="0" algn="ctr">
-              <a:buNone/>
-            </a:pPr>
-            <a:r>
-              <a:rPr lang="en-US" sz="1100" dirty="0">
-                <a:solidFill>
-                  <a:srgbClr val="3B82F6"/>
-                </a:solidFill>
-                <a:latin typeface="Calibri" pitchFamily="34" charset="0"/>
-                <a:ea typeface="Calibri" pitchFamily="34" charset="-122"/>
-                <a:cs typeface="Calibri" pitchFamily="34" charset="-120"/>
-              </a:rPr>
-              <a:t>UI23CS59</a:t>
-            </a:r>
-            <a:endParaRPr lang="en-US" sz="1100" dirty="0"/>
-          </a:p>
-        </p:txBody>
-      </p:sp>
-      <p:sp>
-        <p:nvSpPr>
-          <p:cNvPr id="15" name="Text 12"/>
-          <p:cNvSpPr/>
-          <p:nvPr/>
-        </p:nvSpPr>
-        <p:spPr>
-          <a:xfrm>
-            <a:off x="3291840" y="3154680"/>
-            <a:ext cx="2560320" cy="228600"/>
-          </a:xfrm>
-          <a:prstGeom prst="rect">
-            <a:avLst/>
-          </a:prstGeom>
-          <a:noFill/>
-          <a:ln/>
-        </p:spPr>
-        <p:txBody>
-          <a:bodyPr wrap="square" lIns="0" tIns="0" rIns="0" bIns="0" rtlCol="0" anchor="ctr"/>
-          <a:lstStyle/>
-          <a:p>
-            <a:pPr marL="0" indent="0" algn="ctr">
-              <a:buNone/>
-            </a:pPr>
-            <a:r>
-              <a:rPr lang="en-US" sz="950" i="1" dirty="0">
-                <a:solidFill>
-                  <a:srgbClr val="475569"/>
-                </a:solidFill>
-                <a:latin typeface="Calibri" pitchFamily="34" charset="0"/>
-                <a:ea typeface="Calibri" pitchFamily="34" charset="-122"/>
-                <a:cs typeface="Calibri" pitchFamily="34" charset="-120"/>
-              </a:rPr>
-              <a:t>ui23cs59@iiitsurat.ac.in</a:t>
-            </a:r>
-            <a:endParaRPr lang="en-US" sz="950" dirty="0"/>
-          </a:p>
-        </p:txBody>
-      </p:sp>
-      <p:sp>
-        <p:nvSpPr>
-          <p:cNvPr id="16" name="Shape 13"/>
-          <p:cNvSpPr/>
-          <p:nvPr/>
-        </p:nvSpPr>
-        <p:spPr>
-          <a:xfrm>
-            <a:off x="6035040" y="2651760"/>
-            <a:ext cx="2560320" cy="777240"/>
-          </a:xfrm>
-          <a:prstGeom prst="rect">
-            <a:avLst/>
-          </a:prstGeom>
-          <a:solidFill>
-            <a:srgbClr val="F1F5F9"/>
-          </a:solidFill>
-          <a:ln w="6350">
-            <a:solidFill>
-              <a:srgbClr val="E2E8F0"/>
-            </a:solidFill>
-            <a:prstDash val="solid"/>
-          </a:ln>
-        </p:spPr>
-      </p:sp>
-      <p:sp>
-        <p:nvSpPr>
-          <p:cNvPr id="17" name="Text 14"/>
-          <p:cNvSpPr/>
-          <p:nvPr/>
-        </p:nvSpPr>
-        <p:spPr>
-          <a:xfrm>
-            <a:off x="6035040" y="2697480"/>
-            <a:ext cx="2560320" cy="274320"/>
-          </a:xfrm>
-          <a:prstGeom prst="rect">
-            <a:avLst/>
-          </a:prstGeom>
-          <a:noFill/>
-          <a:ln/>
-        </p:spPr>
-        <p:txBody>
-          <a:bodyPr wrap="square" lIns="0" tIns="0" rIns="0" bIns="0" rtlCol="0" anchor="ctr"/>
-          <a:lstStyle/>
-          <a:p>
-            <a:pPr marL="0" indent="0" algn="ctr">
-              <a:buNone/>
-            </a:pPr>
-            <a:r>
-              <a:rPr lang="en-US" sz="1300" b="1" dirty="0">
-                <a:solidFill>
-                  <a:srgbClr val="1E293B"/>
-                </a:solidFill>
-                <a:latin typeface="Calibri" pitchFamily="34" charset="0"/>
-                <a:ea typeface="Calibri" pitchFamily="34" charset="-122"/>
-                <a:cs typeface="Calibri" pitchFamily="34" charset="-120"/>
-              </a:rPr>
-              <a:t>Aviral Pandey</a:t>
-            </a:r>
-            <a:endParaRPr lang="en-US" sz="1300" dirty="0"/>
-          </a:p>
-        </p:txBody>
-      </p:sp>
-      <p:sp>
-        <p:nvSpPr>
-          <p:cNvPr id="18" name="Text 15"/>
-          <p:cNvSpPr/>
-          <p:nvPr/>
-        </p:nvSpPr>
-        <p:spPr>
-          <a:xfrm>
-            <a:off x="6035040" y="2944368"/>
-            <a:ext cx="2560320" cy="228600"/>
-          </a:xfrm>
-          <a:prstGeom prst="rect">
-            <a:avLst/>
-          </a:prstGeom>
-          <a:noFill/>
-          <a:ln/>
-        </p:spPr>
-        <p:txBody>
-          <a:bodyPr wrap="square" lIns="0" tIns="0" rIns="0" bIns="0" rtlCol="0" anchor="ctr"/>
-          <a:lstStyle/>
-          <a:p>
-            <a:pPr marL="0" indent="0" algn="ctr">
-              <a:buNone/>
-            </a:pPr>
-            <a:r>
-              <a:rPr lang="en-US" sz="1100" dirty="0">
-                <a:solidFill>
-                  <a:srgbClr val="3B82F6"/>
-                </a:solidFill>
-                <a:latin typeface="Calibri" pitchFamily="34" charset="0"/>
-                <a:ea typeface="Calibri" pitchFamily="34" charset="-122"/>
-                <a:cs typeface="Calibri" pitchFamily="34" charset="-120"/>
-              </a:rPr>
-              <a:t>UI23CS09</a:t>
-            </a:r>
-            <a:endParaRPr lang="en-US" sz="1100" dirty="0"/>
-          </a:p>
-        </p:txBody>
-      </p:sp>
-      <p:sp>
-        <p:nvSpPr>
-          <p:cNvPr id="19" name="Text 16"/>
-          <p:cNvSpPr/>
-          <p:nvPr/>
-        </p:nvSpPr>
-        <p:spPr>
-          <a:xfrm>
-            <a:off x="6035040" y="3154680"/>
-            <a:ext cx="2560320" cy="228600"/>
-          </a:xfrm>
-          <a:prstGeom prst="rect">
-            <a:avLst/>
-          </a:prstGeom>
-          <a:noFill/>
-          <a:ln/>
-        </p:spPr>
-        <p:txBody>
-          <a:bodyPr wrap="square" lIns="0" tIns="0" rIns="0" bIns="0" rtlCol="0" anchor="ctr"/>
-          <a:lstStyle/>
-          <a:p>
-            <a:pPr marL="0" indent="0" algn="ctr">
-              <a:buNone/>
-            </a:pPr>
-            <a:r>
-              <a:rPr lang="en-US" sz="950" i="1" dirty="0">
-                <a:solidFill>
-                  <a:srgbClr val="475569"/>
-                </a:solidFill>
-                <a:latin typeface="Calibri" pitchFamily="34" charset="0"/>
-                <a:ea typeface="Calibri" pitchFamily="34" charset="-122"/>
-                <a:cs typeface="Calibri" pitchFamily="34" charset="-120"/>
-              </a:rPr>
-              <a:t>ui23cs09@iiitsurat.ac.in</a:t>
-            </a:r>
-            <a:endParaRPr lang="en-US" sz="950" dirty="0"/>
-          </a:p>
-        </p:txBody>
-      </p:sp>
-      <p:sp>
-        <p:nvSpPr>
-          <p:cNvPr id="20" name="Shape 17"/>
-          <p:cNvSpPr/>
-          <p:nvPr/>
-        </p:nvSpPr>
-        <p:spPr>
-          <a:xfrm>
-            <a:off x="1828800" y="3657600"/>
-            <a:ext cx="5486400" cy="0"/>
+          <p:cNvPr id="4" name="Shape 1"/>
+          <p:cNvSpPr/>
+          <p:nvPr/>
+        </p:nvSpPr>
+        <p:spPr>
+          <a:xfrm>
+            <a:off x="274320" y="4892040"/>
+            <a:ext cx="8595360" cy="0"/>
           </a:xfrm>
           <a:prstGeom prst="line">
             <a:avLst/>
           </a:prstGeom>
           <a:noFill/>
-          <a:ln w="6350">
+          <a:ln w="9525">
             <a:solidFill>
               <a:srgbClr val="CBD5E1"/>
             </a:solidFill>
@@ -2960,14 +2210,167 @@
       </p:sp>
       <p:sp>
         <p:nvSpPr>
-          <p:cNvPr id="21" name="Text 18"/>
-          <p:cNvSpPr/>
-          <p:nvPr/>
-        </p:nvSpPr>
-        <p:spPr>
-          <a:xfrm>
-            <a:off x="457200" y="3730752"/>
-            <a:ext cx="8229600" cy="274320"/>
+          <p:cNvPr id="5" name="Text 2"/>
+          <p:cNvSpPr/>
+          <p:nvPr/>
+        </p:nvSpPr>
+        <p:spPr>
+          <a:xfrm>
+            <a:off x="274320" y="4937760"/>
+            <a:ext cx="5486400" cy="228600"/>
+          </a:xfrm>
+          <a:prstGeom prst="rect">
+            <a:avLst/>
+          </a:prstGeom>
+          <a:noFill/>
+          <a:ln/>
+        </p:spPr>
+        <p:txBody>
+          <a:bodyPr wrap="square" lIns="0" tIns="0" rIns="0" bIns="0" rtlCol="0" anchor="t"/>
+          <a:lstStyle/>
+          <a:p>
+            <a:pPr marL="0" indent="0">
+              <a:buNone/>
+            </a:pPr>
+            <a:r>
+              <a:rPr lang="en-US" sz="900" dirty="0">
+                <a:solidFill>
+                  <a:srgbClr val="1E293B"/>
+                </a:solidFill>
+                <a:latin typeface="Calibri" pitchFamily="34" charset="0"/>
+                <a:ea typeface="Calibri" pitchFamily="34" charset="-122"/>
+                <a:cs typeface="Calibri" pitchFamily="34" charset="-120"/>
+              </a:rPr>
+              <a:t>RLHF: Reward Modeling + DPO</a:t>
+            </a:r>
+            <a:r>
+              <a:rPr lang="en-US" sz="900" dirty="0">
+                <a:solidFill>
+                  <a:srgbClr val="94A3B8"/>
+                </a:solidFill>
+                <a:latin typeface="Calibri" pitchFamily="34" charset="0"/>
+                <a:ea typeface="Calibri" pitchFamily="34" charset="-122"/>
+                <a:cs typeface="Calibri" pitchFamily="34" charset="-120"/>
+              </a:rPr>
+              <a:t>   </a:t>
+            </a:r>
+            <a:endParaRPr lang="en-US" sz="900" dirty="0"/>
+          </a:p>
+        </p:txBody>
+      </p:sp>
+      <p:sp>
+        <p:nvSpPr>
+          <p:cNvPr id="6" name="Text 3"/>
+          <p:cNvSpPr/>
+          <p:nvPr/>
+        </p:nvSpPr>
+        <p:spPr>
+          <a:xfrm>
+            <a:off x="6858000" y="4937760"/>
+            <a:ext cx="2011680" cy="228600"/>
+          </a:xfrm>
+          <a:prstGeom prst="rect">
+            <a:avLst/>
+          </a:prstGeom>
+          <a:noFill/>
+          <a:ln/>
+        </p:spPr>
+        <p:txBody>
+          <a:bodyPr wrap="square" lIns="0" tIns="0" rIns="0" bIns="0" rtlCol="0" anchor="t"/>
+          <a:lstStyle/>
+          <a:p>
+            <a:pPr marL="0" indent="0" algn="r">
+              <a:buNone/>
+            </a:pPr>
+            <a:r>
+              <a:rPr lang="en-US" sz="900" dirty="0">
+                <a:solidFill>
+                  <a:srgbClr val="475569"/>
+                </a:solidFill>
+                <a:latin typeface="Calibri" pitchFamily="34" charset="0"/>
+                <a:ea typeface="Calibri" pitchFamily="34" charset="-122"/>
+                <a:cs typeface="Calibri" pitchFamily="34" charset="-120"/>
+              </a:rPr>
+              <a:t>Slide 1 / 16</a:t>
+            </a:r>
+            <a:endParaRPr lang="en-US" sz="900" dirty="0"/>
+          </a:p>
+        </p:txBody>
+      </p:sp>
+      <p:sp>
+        <p:nvSpPr>
+          <p:cNvPr id="7" name="Text 4"/>
+          <p:cNvSpPr/>
+          <p:nvPr/>
+        </p:nvSpPr>
+        <p:spPr>
+          <a:xfrm>
+            <a:off x="274320" y="777240"/>
+            <a:ext cx="8595360" cy="365760"/>
+          </a:xfrm>
+          <a:prstGeom prst="rect">
+            <a:avLst/>
+          </a:prstGeom>
+          <a:noFill/>
+          <a:ln/>
+        </p:spPr>
+        <p:txBody>
+          <a:bodyPr wrap="square" lIns="0" tIns="0" rIns="0" bIns="0" rtlCol="0" anchor="ctr"/>
+          <a:lstStyle/>
+          <a:p>
+            <a:pPr marL="0" indent="0">
+              <a:buNone/>
+            </a:pPr>
+            <a:r>
+              <a:rPr lang="en-US" sz="2000" b="1" dirty="0">
+                <a:solidFill>
+                  <a:srgbClr val="1E293B"/>
+                </a:solidFill>
+                <a:latin typeface="Calibri" pitchFamily="34" charset="0"/>
+                <a:ea typeface="Calibri" pitchFamily="34" charset="-122"/>
+                <a:cs typeface="Calibri" pitchFamily="34" charset="-120"/>
+              </a:rPr>
+              <a:t>Outline of Presentation</a:t>
+            </a:r>
+            <a:endParaRPr lang="en-US" sz="2000" dirty="0"/>
+          </a:p>
+        </p:txBody>
+      </p:sp>
+      <p:sp>
+        <p:nvSpPr>
+          <p:cNvPr id="8" name="Shape 5"/>
+          <p:cNvSpPr/>
+          <p:nvPr/>
+        </p:nvSpPr>
+        <p:spPr>
+          <a:xfrm>
+            <a:off x="457200" y="1344168"/>
+            <a:ext cx="292608" cy="292608"/>
+          </a:xfrm>
+          <a:prstGeom prst="ellipse">
+            <a:avLst/>
+          </a:prstGeom>
+          <a:solidFill>
+            <a:srgbClr val="F5A623"/>
+          </a:solidFill>
+          <a:ln w="12700">
+            <a:solidFill>
+              <a:srgbClr val="F5A623"/>
+            </a:solidFill>
+            <a:prstDash val="solid"/>
+          </a:ln>
+        </p:spPr>
+      </p:sp>
+      <p:sp>
+        <p:nvSpPr>
+          <p:cNvPr id="9" name="Text 6"/>
+          <p:cNvSpPr/>
+          <p:nvPr/>
+        </p:nvSpPr>
+        <p:spPr>
+          <a:xfrm>
+            <a:off x="457200" y="1344168"/>
+            <a:ext cx="292608" cy="292608"/>
           </a:xfrm>
           <a:prstGeom prst="rect">
             <a:avLst/>
@@ -2983,7 +2386,46 @@
               <a:buNone/>
             </a:pPr>
             <a:r>
-              <a:rPr lang="en-US" sz="1200" dirty="0">
+              <a:rPr lang="en-US" sz="1100" b="1" dirty="0">
+                <a:solidFill>
+                  <a:srgbClr val="FFFFFF"/>
+                </a:solidFill>
+                <a:latin typeface="Calibri" pitchFamily="34" charset="0"/>
+                <a:ea typeface="Calibri" pitchFamily="34" charset="-122"/>
+                <a:cs typeface="Calibri" pitchFamily="34" charset="-120"/>
+              </a:rPr>
+              <a:t>1</a:t>
+            </a:r>
+            <a:endParaRPr lang="en-US" sz="1100" dirty="0"/>
+          </a:p>
+        </p:txBody>
+      </p:sp>
+      <p:sp>
+        <p:nvSpPr>
+          <p:cNvPr id="10" name="Text 7"/>
+          <p:cNvSpPr/>
+          <p:nvPr/>
+        </p:nvSpPr>
+        <p:spPr>
+          <a:xfrm>
+            <a:off x="841248" y="1325880"/>
+            <a:ext cx="3657600" cy="256032"/>
+          </a:xfrm>
+          <a:prstGeom prst="rect">
+            <a:avLst/>
+          </a:prstGeom>
+          <a:noFill/>
+          <a:ln/>
+        </p:spPr>
+        <p:txBody>
+          <a:bodyPr wrap="square" lIns="0" tIns="0" rIns="0" bIns="0" rtlCol="0" anchor="ctr"/>
+          <a:lstStyle/>
+          <a:p>
+            <a:pPr marL="0" indent="0">
+              <a:buNone/>
+            </a:pPr>
+            <a:r>
+              <a:rPr lang="en-US" sz="1250" b="1" dirty="0">
                 <a:solidFill>
                   <a:srgbClr val="1E293B"/>
                 </a:solidFill>
@@ -2991,22 +2433,86 @@
                 <a:ea typeface="Calibri" pitchFamily="34" charset="-122"/>
                 <a:cs typeface="Calibri" pitchFamily="34" charset="-120"/>
               </a:rPr>
-              <a:t>Department of Computer Science &amp; Engineering   |   IIIT Surat</a:t>
-            </a:r>
-            <a:endParaRPr lang="en-US" sz="1200" dirty="0"/>
-          </a:p>
-        </p:txBody>
-      </p:sp>
-      <p:sp>
-        <p:nvSpPr>
-          <p:cNvPr id="22" name="Text 19"/>
-          <p:cNvSpPr/>
-          <p:nvPr/>
-        </p:nvSpPr>
-        <p:spPr>
-          <a:xfrm>
-            <a:off x="457200" y="4023360"/>
-            <a:ext cx="8229600" cy="274320"/>
+              <a:t>Introduction</a:t>
+            </a:r>
+            <a:endParaRPr lang="en-US" sz="1250" dirty="0"/>
+          </a:p>
+        </p:txBody>
+      </p:sp>
+      <p:sp>
+        <p:nvSpPr>
+          <p:cNvPr id="11" name="Text 8"/>
+          <p:cNvSpPr/>
+          <p:nvPr/>
+        </p:nvSpPr>
+        <p:spPr>
+          <a:xfrm>
+            <a:off x="841248" y="1563624"/>
+            <a:ext cx="3840480" cy="228600"/>
+          </a:xfrm>
+          <a:prstGeom prst="rect">
+            <a:avLst/>
+          </a:prstGeom>
+          <a:noFill/>
+          <a:ln/>
+        </p:spPr>
+        <p:txBody>
+          <a:bodyPr wrap="square" lIns="0" tIns="0" rIns="0" bIns="0" rtlCol="0" anchor="t"/>
+          <a:lstStyle/>
+          <a:p>
+            <a:pPr marL="0" indent="0">
+              <a:buNone/>
+            </a:pPr>
+            <a:r>
+              <a:rPr lang="en-US" sz="1000" i="1" dirty="0">
+                <a:solidFill>
+                  <a:srgbClr val="475569"/>
+                </a:solidFill>
+                <a:latin typeface="Calibri" pitchFamily="34" charset="0"/>
+                <a:ea typeface="Calibri" pitchFamily="34" charset="-122"/>
+                <a:cs typeface="Calibri" pitchFamily="34" charset="-120"/>
+              </a:rPr>
+              <a:t>—  Why alignment of language models matters</a:t>
+            </a:r>
+            <a:endParaRPr lang="en-US" sz="1000" dirty="0"/>
+          </a:p>
+        </p:txBody>
+      </p:sp>
+      <p:sp>
+        <p:nvSpPr>
+          <p:cNvPr id="12" name="Shape 9"/>
+          <p:cNvSpPr/>
+          <p:nvPr/>
+        </p:nvSpPr>
+        <p:spPr>
+          <a:xfrm>
+            <a:off x="457200" y="1837944"/>
+            <a:ext cx="292608" cy="292608"/>
+          </a:xfrm>
+          <a:prstGeom prst="ellipse">
+            <a:avLst/>
+          </a:prstGeom>
+          <a:solidFill>
+            <a:srgbClr val="F5A623"/>
+          </a:solidFill>
+          <a:ln w="12700">
+            <a:solidFill>
+              <a:srgbClr val="F5A623"/>
+            </a:solidFill>
+            <a:prstDash val="solid"/>
+          </a:ln>
+        </p:spPr>
+      </p:sp>
+      <p:sp>
+        <p:nvSpPr>
+          <p:cNvPr id="13" name="Text 10"/>
+          <p:cNvSpPr/>
+          <p:nvPr/>
+        </p:nvSpPr>
+        <p:spPr>
+          <a:xfrm>
+            <a:off x="457200" y="1837944"/>
+            <a:ext cx="292608" cy="292608"/>
           </a:xfrm>
           <a:prstGeom prst="rect">
             <a:avLst/>
@@ -3022,7 +2528,85 @@
               <a:buNone/>
             </a:pPr>
             <a:r>
-              <a:rPr lang="en-US" sz="1100" i="1" dirty="0">
+              <a:rPr lang="en-US" sz="1100" b="1" dirty="0">
+                <a:solidFill>
+                  <a:srgbClr val="FFFFFF"/>
+                </a:solidFill>
+                <a:latin typeface="Calibri" pitchFamily="34" charset="0"/>
+                <a:ea typeface="Calibri" pitchFamily="34" charset="-122"/>
+                <a:cs typeface="Calibri" pitchFamily="34" charset="-120"/>
+              </a:rPr>
+              <a:t>2</a:t>
+            </a:r>
+            <a:endParaRPr lang="en-US" sz="1100" dirty="0"/>
+          </a:p>
+        </p:txBody>
+      </p:sp>
+      <p:sp>
+        <p:nvSpPr>
+          <p:cNvPr id="14" name="Text 11"/>
+          <p:cNvSpPr/>
+          <p:nvPr/>
+        </p:nvSpPr>
+        <p:spPr>
+          <a:xfrm>
+            <a:off x="841248" y="1819656"/>
+            <a:ext cx="3657600" cy="256032"/>
+          </a:xfrm>
+          <a:prstGeom prst="rect">
+            <a:avLst/>
+          </a:prstGeom>
+          <a:noFill/>
+          <a:ln/>
+        </p:spPr>
+        <p:txBody>
+          <a:bodyPr wrap="square" lIns="0" tIns="0" rIns="0" bIns="0" rtlCol="0" anchor="ctr"/>
+          <a:lstStyle/>
+          <a:p>
+            <a:pPr marL="0" indent="0">
+              <a:buNone/>
+            </a:pPr>
+            <a:r>
+              <a:rPr lang="en-US" sz="1250" b="1" dirty="0">
+                <a:solidFill>
+                  <a:srgbClr val="1E293B"/>
+                </a:solidFill>
+                <a:latin typeface="Calibri" pitchFamily="34" charset="0"/>
+                <a:ea typeface="Calibri" pitchFamily="34" charset="-122"/>
+                <a:cs typeface="Calibri" pitchFamily="34" charset="-120"/>
+              </a:rPr>
+              <a:t>Literature Survey</a:t>
+            </a:r>
+            <a:endParaRPr lang="en-US" sz="1250" dirty="0"/>
+          </a:p>
+        </p:txBody>
+      </p:sp>
+      <p:sp>
+        <p:nvSpPr>
+          <p:cNvPr id="15" name="Text 12"/>
+          <p:cNvSpPr/>
+          <p:nvPr/>
+        </p:nvSpPr>
+        <p:spPr>
+          <a:xfrm>
+            <a:off x="841248" y="2057400"/>
+            <a:ext cx="3840480" cy="228600"/>
+          </a:xfrm>
+          <a:prstGeom prst="rect">
+            <a:avLst/>
+          </a:prstGeom>
+          <a:noFill/>
+          <a:ln/>
+        </p:spPr>
+        <p:txBody>
+          <a:bodyPr wrap="square" lIns="0" tIns="0" rIns="0" bIns="0" rtlCol="0" anchor="t"/>
+          <a:lstStyle/>
+          <a:p>
+            <a:pPr marL="0" indent="0">
+              <a:buNone/>
+            </a:pPr>
+            <a:r>
+              <a:rPr lang="en-US" sz="1000" i="1" dirty="0">
                 <a:solidFill>
                   <a:srgbClr val="475569"/>
                 </a:solidFill>
@@ -3030,7 +2614,71 @@
                 <a:ea typeface="Calibri" pitchFamily="34" charset="-122"/>
                 <a:cs typeface="Calibri" pitchFamily="34" charset="-120"/>
               </a:rPr>
-              <a:t>Under the guidance of  Prof. [Dr. Nidhi Desai]</a:t>
+              <a:t>—  InstructGPT, DPO, LoRA, preference datasets</a:t>
+            </a:r>
+            <a:endParaRPr lang="en-US" sz="1000" dirty="0"/>
+          </a:p>
+        </p:txBody>
+      </p:sp>
+      <p:sp>
+        <p:nvSpPr>
+          <p:cNvPr id="16" name="Shape 13"/>
+          <p:cNvSpPr/>
+          <p:nvPr/>
+        </p:nvSpPr>
+        <p:spPr>
+          <a:xfrm>
+            <a:off x="457200" y="2331720"/>
+            <a:ext cx="292608" cy="292608"/>
+          </a:xfrm>
+          <a:prstGeom prst="ellipse">
+            <a:avLst/>
+          </a:prstGeom>
+          <a:solidFill>
+            <a:srgbClr val="F5A623"/>
+          </a:solidFill>
+          <a:ln w="12700">
+            <a:solidFill>
+              <a:srgbClr val="F5A623"/>
+            </a:solidFill>
+            <a:prstDash val="solid"/>
+          </a:ln>
+        </p:spPr>
+      </p:sp>
+      <p:sp>
+        <p:nvSpPr>
+          <p:cNvPr id="17" name="Text 14"/>
+          <p:cNvSpPr/>
+          <p:nvPr/>
+        </p:nvSpPr>
+        <p:spPr>
+          <a:xfrm>
+            <a:off x="457200" y="2331720"/>
+            <a:ext cx="292608" cy="292608"/>
+          </a:xfrm>
+          <a:prstGeom prst="rect">
+            <a:avLst/>
+          </a:prstGeom>
+          <a:noFill/>
+          <a:ln/>
+        </p:spPr>
+        <p:txBody>
+          <a:bodyPr wrap="square" lIns="0" tIns="0" rIns="0" bIns="0" rtlCol="0" anchor="ctr"/>
+          <a:lstStyle/>
+          <a:p>
+            <a:pPr marL="0" indent="0" algn="ctr">
+              <a:buNone/>
+            </a:pPr>
+            <a:r>
+              <a:rPr lang="en-US" sz="1100" b="1" dirty="0">
+                <a:solidFill>
+                  <a:srgbClr val="FFFFFF"/>
+                </a:solidFill>
+                <a:latin typeface="Calibri" pitchFamily="34" charset="0"/>
+                <a:ea typeface="Calibri" pitchFamily="34" charset="-122"/>
+                <a:cs typeface="Calibri" pitchFamily="34" charset="-120"/>
+              </a:rPr>
+              <a:t>3</a:t>
             </a:r>
             <a:endParaRPr lang="en-US" sz="1100" dirty="0"/>
           </a:p>
@@ -3038,16 +2686,520 @@
       </p:sp>
       <p:sp>
         <p:nvSpPr>
-          <p:cNvPr id="23" name="Shape 20"/>
-          <p:cNvSpPr/>
-          <p:nvPr/>
-        </p:nvSpPr>
-        <p:spPr>
-          <a:xfrm>
-            <a:off x="0" y="4617720"/>
-            <a:ext cx="9144000" cy="525780"/>
-          </a:xfrm>
-          <a:prstGeom prst="rect">
+          <p:cNvPr id="18" name="Text 15"/>
+          <p:cNvSpPr/>
+          <p:nvPr/>
+        </p:nvSpPr>
+        <p:spPr>
+          <a:xfrm>
+            <a:off x="841248" y="2313432"/>
+            <a:ext cx="3657600" cy="256032"/>
+          </a:xfrm>
+          <a:prstGeom prst="rect">
+            <a:avLst/>
+          </a:prstGeom>
+          <a:noFill/>
+          <a:ln/>
+        </p:spPr>
+        <p:txBody>
+          <a:bodyPr wrap="square" lIns="0" tIns="0" rIns="0" bIns="0" rtlCol="0" anchor="ctr"/>
+          <a:lstStyle/>
+          <a:p>
+            <a:pPr marL="0" indent="0">
+              <a:buNone/>
+            </a:pPr>
+            <a:r>
+              <a:rPr lang="en-US" sz="1250" b="1" dirty="0">
+                <a:solidFill>
+                  <a:srgbClr val="1E293B"/>
+                </a:solidFill>
+                <a:latin typeface="Calibri" pitchFamily="34" charset="0"/>
+                <a:ea typeface="Calibri" pitchFamily="34" charset="-122"/>
+                <a:cs typeface="Calibri" pitchFamily="34" charset="-120"/>
+              </a:rPr>
+              <a:t>Problem Statement</a:t>
+            </a:r>
+            <a:endParaRPr lang="en-US" sz="1250" dirty="0"/>
+          </a:p>
+        </p:txBody>
+      </p:sp>
+      <p:sp>
+        <p:nvSpPr>
+          <p:cNvPr id="19" name="Text 16"/>
+          <p:cNvSpPr/>
+          <p:nvPr/>
+        </p:nvSpPr>
+        <p:spPr>
+          <a:xfrm>
+            <a:off x="841248" y="2551176"/>
+            <a:ext cx="3840480" cy="228600"/>
+          </a:xfrm>
+          <a:prstGeom prst="rect">
+            <a:avLst/>
+          </a:prstGeom>
+          <a:noFill/>
+          <a:ln/>
+        </p:spPr>
+        <p:txBody>
+          <a:bodyPr wrap="square" lIns="0" tIns="0" rIns="0" bIns="0" rtlCol="0" anchor="t"/>
+          <a:lstStyle/>
+          <a:p>
+            <a:pPr marL="0" indent="0">
+              <a:buNone/>
+            </a:pPr>
+            <a:r>
+              <a:rPr lang="en-US" sz="1000" i="1" dirty="0">
+                <a:solidFill>
+                  <a:srgbClr val="475569"/>
+                </a:solidFill>
+                <a:latin typeface="Calibri" pitchFamily="34" charset="0"/>
+                <a:ea typeface="Calibri" pitchFamily="34" charset="-122"/>
+                <a:cs typeface="Calibri" pitchFamily="34" charset="-120"/>
+              </a:rPr>
+              <a:t>—  Single-dataset RM overfit failure mode</a:t>
+            </a:r>
+            <a:endParaRPr lang="en-US" sz="1000" dirty="0"/>
+          </a:p>
+        </p:txBody>
+      </p:sp>
+      <p:sp>
+        <p:nvSpPr>
+          <p:cNvPr id="20" name="Shape 17"/>
+          <p:cNvSpPr/>
+          <p:nvPr/>
+        </p:nvSpPr>
+        <p:spPr>
+          <a:xfrm>
+            <a:off x="457200" y="2825496"/>
+            <a:ext cx="292608" cy="292608"/>
+          </a:xfrm>
+          <a:prstGeom prst="ellipse">
+            <a:avLst/>
+          </a:prstGeom>
+          <a:solidFill>
+            <a:srgbClr val="F5A623"/>
+          </a:solidFill>
+          <a:ln w="12700">
+            <a:solidFill>
+              <a:srgbClr val="F5A623"/>
+            </a:solidFill>
+            <a:prstDash val="solid"/>
+          </a:ln>
+        </p:spPr>
+      </p:sp>
+      <p:sp>
+        <p:nvSpPr>
+          <p:cNvPr id="21" name="Text 18"/>
+          <p:cNvSpPr/>
+          <p:nvPr/>
+        </p:nvSpPr>
+        <p:spPr>
+          <a:xfrm>
+            <a:off x="457200" y="2825496"/>
+            <a:ext cx="292608" cy="292608"/>
+          </a:xfrm>
+          <a:prstGeom prst="rect">
+            <a:avLst/>
+          </a:prstGeom>
+          <a:noFill/>
+          <a:ln/>
+        </p:spPr>
+        <p:txBody>
+          <a:bodyPr wrap="square" lIns="0" tIns="0" rIns="0" bIns="0" rtlCol="0" anchor="ctr"/>
+          <a:lstStyle/>
+          <a:p>
+            <a:pPr marL="0" indent="0" algn="ctr">
+              <a:buNone/>
+            </a:pPr>
+            <a:r>
+              <a:rPr lang="en-US" sz="1100" b="1" dirty="0">
+                <a:solidFill>
+                  <a:srgbClr val="FFFFFF"/>
+                </a:solidFill>
+                <a:latin typeface="Calibri" pitchFamily="34" charset="0"/>
+                <a:ea typeface="Calibri" pitchFamily="34" charset="-122"/>
+                <a:cs typeface="Calibri" pitchFamily="34" charset="-120"/>
+              </a:rPr>
+              <a:t>4</a:t>
+            </a:r>
+            <a:endParaRPr lang="en-US" sz="1100" dirty="0"/>
+          </a:p>
+        </p:txBody>
+      </p:sp>
+      <p:sp>
+        <p:nvSpPr>
+          <p:cNvPr id="22" name="Text 19"/>
+          <p:cNvSpPr/>
+          <p:nvPr/>
+        </p:nvSpPr>
+        <p:spPr>
+          <a:xfrm>
+            <a:off x="841248" y="2807208"/>
+            <a:ext cx="3657600" cy="256032"/>
+          </a:xfrm>
+          <a:prstGeom prst="rect">
+            <a:avLst/>
+          </a:prstGeom>
+          <a:noFill/>
+          <a:ln/>
+        </p:spPr>
+        <p:txBody>
+          <a:bodyPr wrap="square" lIns="0" tIns="0" rIns="0" bIns="0" rtlCol="0" anchor="ctr"/>
+          <a:lstStyle/>
+          <a:p>
+            <a:pPr marL="0" indent="0">
+              <a:buNone/>
+            </a:pPr>
+            <a:r>
+              <a:rPr lang="en-US" sz="1250" b="1" dirty="0">
+                <a:solidFill>
+                  <a:srgbClr val="1E293B"/>
+                </a:solidFill>
+                <a:latin typeface="Calibri" pitchFamily="34" charset="0"/>
+                <a:ea typeface="Calibri" pitchFamily="34" charset="-122"/>
+                <a:cs typeface="Calibri" pitchFamily="34" charset="-120"/>
+              </a:rPr>
+              <a:t>Proposed System</a:t>
+            </a:r>
+            <a:endParaRPr lang="en-US" sz="1250" dirty="0"/>
+          </a:p>
+        </p:txBody>
+      </p:sp>
+      <p:sp>
+        <p:nvSpPr>
+          <p:cNvPr id="23" name="Text 20"/>
+          <p:cNvSpPr/>
+          <p:nvPr/>
+        </p:nvSpPr>
+        <p:spPr>
+          <a:xfrm>
+            <a:off x="841248" y="3044952"/>
+            <a:ext cx="3840480" cy="228600"/>
+          </a:xfrm>
+          <a:prstGeom prst="rect">
+            <a:avLst/>
+          </a:prstGeom>
+          <a:noFill/>
+          <a:ln/>
+        </p:spPr>
+        <p:txBody>
+          <a:bodyPr wrap="square" lIns="0" tIns="0" rIns="0" bIns="0" rtlCol="0" anchor="t"/>
+          <a:lstStyle/>
+          <a:p>
+            <a:pPr marL="0" indent="0">
+              <a:buNone/>
+            </a:pPr>
+            <a:r>
+              <a:rPr lang="en-US" sz="1000" i="1" dirty="0">
+                <a:solidFill>
+                  <a:srgbClr val="475569"/>
+                </a:solidFill>
+                <a:latin typeface="Calibri" pitchFamily="34" charset="0"/>
+                <a:ea typeface="Calibri" pitchFamily="34" charset="-122"/>
+                <a:cs typeface="Calibri" pitchFamily="34" charset="-120"/>
+              </a:rPr>
+              <a:t>—  Pipeline architecture + project flowchart</a:t>
+            </a:r>
+            <a:endParaRPr lang="en-US" sz="1000" dirty="0"/>
+          </a:p>
+        </p:txBody>
+      </p:sp>
+      <p:sp>
+        <p:nvSpPr>
+          <p:cNvPr id="24" name="Shape 21"/>
+          <p:cNvSpPr/>
+          <p:nvPr/>
+        </p:nvSpPr>
+        <p:spPr>
+          <a:xfrm>
+            <a:off x="457200" y="3319272"/>
+            <a:ext cx="292608" cy="292608"/>
+          </a:xfrm>
+          <a:prstGeom prst="ellipse">
+            <a:avLst/>
+          </a:prstGeom>
+          <a:solidFill>
+            <a:srgbClr val="F5A623"/>
+          </a:solidFill>
+          <a:ln w="12700">
+            <a:solidFill>
+              <a:srgbClr val="F5A623"/>
+            </a:solidFill>
+            <a:prstDash val="solid"/>
+          </a:ln>
+        </p:spPr>
+      </p:sp>
+      <p:sp>
+        <p:nvSpPr>
+          <p:cNvPr id="25" name="Text 22"/>
+          <p:cNvSpPr/>
+          <p:nvPr/>
+        </p:nvSpPr>
+        <p:spPr>
+          <a:xfrm>
+            <a:off x="457200" y="3319272"/>
+            <a:ext cx="292608" cy="292608"/>
+          </a:xfrm>
+          <a:prstGeom prst="rect">
+            <a:avLst/>
+          </a:prstGeom>
+          <a:noFill/>
+          <a:ln/>
+        </p:spPr>
+        <p:txBody>
+          <a:bodyPr wrap="square" lIns="0" tIns="0" rIns="0" bIns="0" rtlCol="0" anchor="ctr"/>
+          <a:lstStyle/>
+          <a:p>
+            <a:pPr marL="0" indent="0" algn="ctr">
+              <a:buNone/>
+            </a:pPr>
+            <a:r>
+              <a:rPr lang="en-US" sz="1100" b="1" dirty="0">
+                <a:solidFill>
+                  <a:srgbClr val="FFFFFF"/>
+                </a:solidFill>
+                <a:latin typeface="Calibri" pitchFamily="34" charset="0"/>
+                <a:ea typeface="Calibri" pitchFamily="34" charset="-122"/>
+                <a:cs typeface="Calibri" pitchFamily="34" charset="-120"/>
+              </a:rPr>
+              <a:t>5</a:t>
+            </a:r>
+            <a:endParaRPr lang="en-US" sz="1100" dirty="0"/>
+          </a:p>
+        </p:txBody>
+      </p:sp>
+      <p:sp>
+        <p:nvSpPr>
+          <p:cNvPr id="26" name="Text 23"/>
+          <p:cNvSpPr/>
+          <p:nvPr/>
+        </p:nvSpPr>
+        <p:spPr>
+          <a:xfrm>
+            <a:off x="841248" y="3300984"/>
+            <a:ext cx="3657600" cy="256032"/>
+          </a:xfrm>
+          <a:prstGeom prst="rect">
+            <a:avLst/>
+          </a:prstGeom>
+          <a:noFill/>
+          <a:ln/>
+        </p:spPr>
+        <p:txBody>
+          <a:bodyPr wrap="square" lIns="0" tIns="0" rIns="0" bIns="0" rtlCol="0" anchor="ctr"/>
+          <a:lstStyle/>
+          <a:p>
+            <a:pPr marL="0" indent="0">
+              <a:buNone/>
+            </a:pPr>
+            <a:r>
+              <a:rPr lang="en-US" sz="1250" b="1" dirty="0">
+                <a:solidFill>
+                  <a:srgbClr val="1E293B"/>
+                </a:solidFill>
+                <a:latin typeface="Calibri" pitchFamily="34" charset="0"/>
+                <a:ea typeface="Calibri" pitchFamily="34" charset="-122"/>
+                <a:cs typeface="Calibri" pitchFamily="34" charset="-120"/>
+              </a:rPr>
+              <a:t>Hardware &amp; Software</a:t>
+            </a:r>
+            <a:endParaRPr lang="en-US" sz="1250" dirty="0"/>
+          </a:p>
+        </p:txBody>
+      </p:sp>
+      <p:sp>
+        <p:nvSpPr>
+          <p:cNvPr id="27" name="Text 24"/>
+          <p:cNvSpPr/>
+          <p:nvPr/>
+        </p:nvSpPr>
+        <p:spPr>
+          <a:xfrm>
+            <a:off x="841248" y="3538728"/>
+            <a:ext cx="3840480" cy="228600"/>
+          </a:xfrm>
+          <a:prstGeom prst="rect">
+            <a:avLst/>
+          </a:prstGeom>
+          <a:noFill/>
+          <a:ln/>
+        </p:spPr>
+        <p:txBody>
+          <a:bodyPr wrap="square" lIns="0" tIns="0" rIns="0" bIns="0" rtlCol="0" anchor="t"/>
+          <a:lstStyle/>
+          <a:p>
+            <a:pPr marL="0" indent="0">
+              <a:buNone/>
+            </a:pPr>
+            <a:r>
+              <a:rPr lang="en-US" sz="1000" i="1" dirty="0">
+                <a:solidFill>
+                  <a:srgbClr val="475569"/>
+                </a:solidFill>
+                <a:latin typeface="Calibri" pitchFamily="34" charset="0"/>
+                <a:ea typeface="Calibri" pitchFamily="34" charset="-122"/>
+                <a:cs typeface="Calibri" pitchFamily="34" charset="-120"/>
+              </a:rPr>
+              <a:t>—  Free Kaggle T4×2, HuggingFace, TRL, PEFT</a:t>
+            </a:r>
+            <a:endParaRPr lang="en-US" sz="1000" dirty="0"/>
+          </a:p>
+        </p:txBody>
+      </p:sp>
+      <p:sp>
+        <p:nvSpPr>
+          <p:cNvPr id="28" name="Shape 25"/>
+          <p:cNvSpPr/>
+          <p:nvPr/>
+        </p:nvSpPr>
+        <p:spPr>
+          <a:xfrm>
+            <a:off x="457200" y="3813048"/>
+            <a:ext cx="292608" cy="292608"/>
+          </a:xfrm>
+          <a:prstGeom prst="ellipse">
+            <a:avLst/>
+          </a:prstGeom>
+          <a:solidFill>
+            <a:srgbClr val="F5A623"/>
+          </a:solidFill>
+          <a:ln w="12700">
+            <a:solidFill>
+              <a:srgbClr val="F5A623"/>
+            </a:solidFill>
+            <a:prstDash val="solid"/>
+          </a:ln>
+        </p:spPr>
+      </p:sp>
+      <p:sp>
+        <p:nvSpPr>
+          <p:cNvPr id="29" name="Text 26"/>
+          <p:cNvSpPr/>
+          <p:nvPr/>
+        </p:nvSpPr>
+        <p:spPr>
+          <a:xfrm>
+            <a:off x="457200" y="3813048"/>
+            <a:ext cx="292608" cy="292608"/>
+          </a:xfrm>
+          <a:prstGeom prst="rect">
+            <a:avLst/>
+          </a:prstGeom>
+          <a:noFill/>
+          <a:ln/>
+        </p:spPr>
+        <p:txBody>
+          <a:bodyPr wrap="square" lIns="0" tIns="0" rIns="0" bIns="0" rtlCol="0" anchor="ctr"/>
+          <a:lstStyle/>
+          <a:p>
+            <a:pPr marL="0" indent="0" algn="ctr">
+              <a:buNone/>
+            </a:pPr>
+            <a:r>
+              <a:rPr lang="en-US" sz="1100" b="1" dirty="0">
+                <a:solidFill>
+                  <a:srgbClr val="FFFFFF"/>
+                </a:solidFill>
+                <a:latin typeface="Calibri" pitchFamily="34" charset="0"/>
+                <a:ea typeface="Calibri" pitchFamily="34" charset="-122"/>
+                <a:cs typeface="Calibri" pitchFamily="34" charset="-120"/>
+              </a:rPr>
+              <a:t>6</a:t>
+            </a:r>
+            <a:endParaRPr lang="en-US" sz="1100" dirty="0"/>
+          </a:p>
+        </p:txBody>
+      </p:sp>
+      <p:sp>
+        <p:nvSpPr>
+          <p:cNvPr id="30" name="Text 27"/>
+          <p:cNvSpPr/>
+          <p:nvPr/>
+        </p:nvSpPr>
+        <p:spPr>
+          <a:xfrm>
+            <a:off x="841248" y="3794760"/>
+            <a:ext cx="3657600" cy="256032"/>
+          </a:xfrm>
+          <a:prstGeom prst="rect">
+            <a:avLst/>
+          </a:prstGeom>
+          <a:noFill/>
+          <a:ln/>
+        </p:spPr>
+        <p:txBody>
+          <a:bodyPr wrap="square" lIns="0" tIns="0" rIns="0" bIns="0" rtlCol="0" anchor="ctr"/>
+          <a:lstStyle/>
+          <a:p>
+            <a:pPr marL="0" indent="0">
+              <a:buNone/>
+            </a:pPr>
+            <a:r>
+              <a:rPr lang="en-US" sz="1250" b="1" dirty="0">
+                <a:solidFill>
+                  <a:srgbClr val="1E293B"/>
+                </a:solidFill>
+                <a:latin typeface="Calibri" pitchFamily="34" charset="0"/>
+                <a:ea typeface="Calibri" pitchFamily="34" charset="-122"/>
+                <a:cs typeface="Calibri" pitchFamily="34" charset="-120"/>
+              </a:rPr>
+              <a:t>Dataset Construction</a:t>
+            </a:r>
+            <a:endParaRPr lang="en-US" sz="1250" dirty="0"/>
+          </a:p>
+        </p:txBody>
+      </p:sp>
+      <p:sp>
+        <p:nvSpPr>
+          <p:cNvPr id="31" name="Text 28"/>
+          <p:cNvSpPr/>
+          <p:nvPr/>
+        </p:nvSpPr>
+        <p:spPr>
+          <a:xfrm>
+            <a:off x="841248" y="4032504"/>
+            <a:ext cx="3840480" cy="228600"/>
+          </a:xfrm>
+          <a:prstGeom prst="rect">
+            <a:avLst/>
+          </a:prstGeom>
+          <a:noFill/>
+          <a:ln/>
+        </p:spPr>
+        <p:txBody>
+          <a:bodyPr wrap="square" lIns="0" tIns="0" rIns="0" bIns="0" rtlCol="0" anchor="t"/>
+          <a:lstStyle/>
+          <a:p>
+            <a:pPr marL="0" indent="0">
+              <a:buNone/>
+            </a:pPr>
+            <a:r>
+              <a:rPr lang="en-US" sz="1000" i="1" dirty="0">
+                <a:solidFill>
+                  <a:srgbClr val="475569"/>
+                </a:solidFill>
+                <a:latin typeface="Calibri" pitchFamily="34" charset="0"/>
+                <a:ea typeface="Calibri" pitchFamily="34" charset="-122"/>
+                <a:cs typeface="Calibri" pitchFamily="34" charset="-120"/>
+              </a:rPr>
+              <a:t>—  HH-RLHF + LMSYS → 4 000 balanced pairs</a:t>
+            </a:r>
+            <a:endParaRPr lang="en-US" sz="1000" dirty="0"/>
+          </a:p>
+        </p:txBody>
+      </p:sp>
+      <p:sp>
+        <p:nvSpPr>
+          <p:cNvPr id="32" name="Shape 29"/>
+          <p:cNvSpPr/>
+          <p:nvPr/>
+        </p:nvSpPr>
+        <p:spPr>
+          <a:xfrm>
+            <a:off x="4754880" y="1344168"/>
+            <a:ext cx="292608" cy="292608"/>
+          </a:xfrm>
+          <a:prstGeom prst="ellipse">
             <a:avLst/>
           </a:prstGeom>
           <a:solidFill>
@@ -3063,14 +3215,14 @@
       </p:sp>
       <p:sp>
         <p:nvSpPr>
-          <p:cNvPr id="24" name="Text 21"/>
-          <p:cNvSpPr/>
-          <p:nvPr/>
-        </p:nvSpPr>
-        <p:spPr>
-          <a:xfrm>
-            <a:off x="0" y="4617720"/>
-            <a:ext cx="9144000" cy="525780"/>
+          <p:cNvPr id="33" name="Text 30"/>
+          <p:cNvSpPr/>
+          <p:nvPr/>
+        </p:nvSpPr>
+        <p:spPr>
+          <a:xfrm>
+            <a:off x="4754880" y="1344168"/>
+            <a:ext cx="292608" cy="292608"/>
           </a:xfrm>
           <a:prstGeom prst="rect">
             <a:avLst/>
@@ -3086,7 +3238,7 @@
               <a:buNone/>
             </a:pPr>
             <a:r>
-              <a:rPr lang="en-US" sz="1300" b="1" dirty="0">
+              <a:rPr lang="en-US" sz="1100" b="1" dirty="0">
                 <a:solidFill>
                   <a:srgbClr val="FFFFFF"/>
                 </a:solidFill>
@@ -3094,9 +3246,797 @@
                 <a:ea typeface="Calibri" pitchFamily="34" charset="-122"/>
                 <a:cs typeface="Calibri" pitchFamily="34" charset="-120"/>
               </a:rPr>
-              <a:t>Indian Institute of Information Technology Surat</a:t>
-            </a:r>
-            <a:endParaRPr lang="en-US" sz="1300" dirty="0"/>
+              <a:t>7</a:t>
+            </a:r>
+            <a:endParaRPr lang="en-US" sz="1100" dirty="0"/>
+          </a:p>
+        </p:txBody>
+      </p:sp>
+      <p:sp>
+        <p:nvSpPr>
+          <p:cNvPr id="34" name="Text 31"/>
+          <p:cNvSpPr/>
+          <p:nvPr/>
+        </p:nvSpPr>
+        <p:spPr>
+          <a:xfrm>
+            <a:off x="5138928" y="1325880"/>
+            <a:ext cx="3657600" cy="256032"/>
+          </a:xfrm>
+          <a:prstGeom prst="rect">
+            <a:avLst/>
+          </a:prstGeom>
+          <a:noFill/>
+          <a:ln/>
+        </p:spPr>
+        <p:txBody>
+          <a:bodyPr wrap="square" lIns="0" tIns="0" rIns="0" bIns="0" rtlCol="0" anchor="ctr"/>
+          <a:lstStyle/>
+          <a:p>
+            <a:pPr marL="0" indent="0">
+              <a:buNone/>
+            </a:pPr>
+            <a:r>
+              <a:rPr lang="en-US" sz="1250" b="1" dirty="0">
+                <a:solidFill>
+                  <a:srgbClr val="1E293B"/>
+                </a:solidFill>
+                <a:latin typeface="Calibri" pitchFamily="34" charset="0"/>
+                <a:ea typeface="Calibri" pitchFamily="34" charset="-122"/>
+                <a:cs typeface="Calibri" pitchFamily="34" charset="-120"/>
+              </a:rPr>
+              <a:t>Reward Model</a:t>
+            </a:r>
+            <a:endParaRPr lang="en-US" sz="1250" dirty="0"/>
+          </a:p>
+        </p:txBody>
+      </p:sp>
+      <p:sp>
+        <p:nvSpPr>
+          <p:cNvPr id="35" name="Text 32"/>
+          <p:cNvSpPr/>
+          <p:nvPr/>
+        </p:nvSpPr>
+        <p:spPr>
+          <a:xfrm>
+            <a:off x="5138928" y="1563624"/>
+            <a:ext cx="3840480" cy="228600"/>
+          </a:xfrm>
+          <a:prstGeom prst="rect">
+            <a:avLst/>
+          </a:prstGeom>
+          <a:noFill/>
+          <a:ln/>
+        </p:spPr>
+        <p:txBody>
+          <a:bodyPr wrap="square" lIns="0" tIns="0" rIns="0" bIns="0" rtlCol="0" anchor="t"/>
+          <a:lstStyle/>
+          <a:p>
+            <a:pPr marL="0" indent="0">
+              <a:buNone/>
+            </a:pPr>
+            <a:r>
+              <a:rPr lang="en-US" sz="1000" i="1" dirty="0">
+                <a:solidFill>
+                  <a:srgbClr val="475569"/>
+                </a:solidFill>
+                <a:latin typeface="Calibri" pitchFamily="34" charset="0"/>
+                <a:ea typeface="Calibri" pitchFamily="34" charset="-122"/>
+                <a:cs typeface="Calibri" pitchFamily="34" charset="-120"/>
+              </a:rPr>
+              <a:t>—  DeBERTa-v3-base + LoRA, Bradley-Terry loss</a:t>
+            </a:r>
+            <a:endParaRPr lang="en-US" sz="1000" dirty="0"/>
+          </a:p>
+        </p:txBody>
+      </p:sp>
+      <p:sp>
+        <p:nvSpPr>
+          <p:cNvPr id="36" name="Shape 33"/>
+          <p:cNvSpPr/>
+          <p:nvPr/>
+        </p:nvSpPr>
+        <p:spPr>
+          <a:xfrm>
+            <a:off x="4754880" y="1837944"/>
+            <a:ext cx="292608" cy="292608"/>
+          </a:xfrm>
+          <a:prstGeom prst="ellipse">
+            <a:avLst/>
+          </a:prstGeom>
+          <a:solidFill>
+            <a:srgbClr val="0F1E45"/>
+          </a:solidFill>
+          <a:ln w="12700">
+            <a:solidFill>
+              <a:srgbClr val="0F1E45"/>
+            </a:solidFill>
+            <a:prstDash val="solid"/>
+          </a:ln>
+        </p:spPr>
+      </p:sp>
+      <p:sp>
+        <p:nvSpPr>
+          <p:cNvPr id="37" name="Text 34"/>
+          <p:cNvSpPr/>
+          <p:nvPr/>
+        </p:nvSpPr>
+        <p:spPr>
+          <a:xfrm>
+            <a:off x="4754880" y="1837944"/>
+            <a:ext cx="292608" cy="292608"/>
+          </a:xfrm>
+          <a:prstGeom prst="rect">
+            <a:avLst/>
+          </a:prstGeom>
+          <a:noFill/>
+          <a:ln/>
+        </p:spPr>
+        <p:txBody>
+          <a:bodyPr wrap="square" lIns="0" tIns="0" rIns="0" bIns="0" rtlCol="0" anchor="ctr"/>
+          <a:lstStyle/>
+          <a:p>
+            <a:pPr marL="0" indent="0" algn="ctr">
+              <a:buNone/>
+            </a:pPr>
+            <a:r>
+              <a:rPr lang="en-US" sz="1100" b="1" dirty="0">
+                <a:solidFill>
+                  <a:srgbClr val="FFFFFF"/>
+                </a:solidFill>
+                <a:latin typeface="Calibri" pitchFamily="34" charset="0"/>
+                <a:ea typeface="Calibri" pitchFamily="34" charset="-122"/>
+                <a:cs typeface="Calibri" pitchFamily="34" charset="-120"/>
+              </a:rPr>
+              <a:t>8</a:t>
+            </a:r>
+            <a:endParaRPr lang="en-US" sz="1100" dirty="0"/>
+          </a:p>
+        </p:txBody>
+      </p:sp>
+      <p:sp>
+        <p:nvSpPr>
+          <p:cNvPr id="38" name="Text 35"/>
+          <p:cNvSpPr/>
+          <p:nvPr/>
+        </p:nvSpPr>
+        <p:spPr>
+          <a:xfrm>
+            <a:off x="5138928" y="1819656"/>
+            <a:ext cx="3657600" cy="256032"/>
+          </a:xfrm>
+          <a:prstGeom prst="rect">
+            <a:avLst/>
+          </a:prstGeom>
+          <a:noFill/>
+          <a:ln/>
+        </p:spPr>
+        <p:txBody>
+          <a:bodyPr wrap="square" lIns="0" tIns="0" rIns="0" bIns="0" rtlCol="0" anchor="ctr"/>
+          <a:lstStyle/>
+          <a:p>
+            <a:pPr marL="0" indent="0">
+              <a:buNone/>
+            </a:pPr>
+            <a:r>
+              <a:rPr lang="en-US" sz="1250" b="1" dirty="0">
+                <a:solidFill>
+                  <a:srgbClr val="1E293B"/>
+                </a:solidFill>
+                <a:latin typeface="Calibri" pitchFamily="34" charset="0"/>
+                <a:ea typeface="Calibri" pitchFamily="34" charset="-122"/>
+                <a:cs typeface="Calibri" pitchFamily="34" charset="-120"/>
+              </a:rPr>
+              <a:t>DPO Fine-Tuning</a:t>
+            </a:r>
+            <a:endParaRPr lang="en-US" sz="1250" dirty="0"/>
+          </a:p>
+        </p:txBody>
+      </p:sp>
+      <p:sp>
+        <p:nvSpPr>
+          <p:cNvPr id="39" name="Text 36"/>
+          <p:cNvSpPr/>
+          <p:nvPr/>
+        </p:nvSpPr>
+        <p:spPr>
+          <a:xfrm>
+            <a:off x="5138928" y="2057400"/>
+            <a:ext cx="3840480" cy="228600"/>
+          </a:xfrm>
+          <a:prstGeom prst="rect">
+            <a:avLst/>
+          </a:prstGeom>
+          <a:noFill/>
+          <a:ln/>
+        </p:spPr>
+        <p:txBody>
+          <a:bodyPr wrap="square" lIns="0" tIns="0" rIns="0" bIns="0" rtlCol="0" anchor="t"/>
+          <a:lstStyle/>
+          <a:p>
+            <a:pPr marL="0" indent="0">
+              <a:buNone/>
+            </a:pPr>
+            <a:r>
+              <a:rPr lang="en-US" sz="1000" i="1" dirty="0">
+                <a:solidFill>
+                  <a:srgbClr val="475569"/>
+                </a:solidFill>
+                <a:latin typeface="Calibri" pitchFamily="34" charset="0"/>
+                <a:ea typeface="Calibri" pitchFamily="34" charset="-122"/>
+                <a:cs typeface="Calibri" pitchFamily="34" charset="-120"/>
+              </a:rPr>
+              <a:t>—  TinyLlama-1.1B + 4-bit NF4 + LoRA</a:t>
+            </a:r>
+            <a:endParaRPr lang="en-US" sz="1000" dirty="0"/>
+          </a:p>
+        </p:txBody>
+      </p:sp>
+      <p:sp>
+        <p:nvSpPr>
+          <p:cNvPr id="40" name="Shape 37"/>
+          <p:cNvSpPr/>
+          <p:nvPr/>
+        </p:nvSpPr>
+        <p:spPr>
+          <a:xfrm>
+            <a:off x="4754880" y="2331720"/>
+            <a:ext cx="292608" cy="292608"/>
+          </a:xfrm>
+          <a:prstGeom prst="ellipse">
+            <a:avLst/>
+          </a:prstGeom>
+          <a:solidFill>
+            <a:srgbClr val="0F1E45"/>
+          </a:solidFill>
+          <a:ln w="12700">
+            <a:solidFill>
+              <a:srgbClr val="0F1E45"/>
+            </a:solidFill>
+            <a:prstDash val="solid"/>
+          </a:ln>
+        </p:spPr>
+      </p:sp>
+      <p:sp>
+        <p:nvSpPr>
+          <p:cNvPr id="41" name="Text 38"/>
+          <p:cNvSpPr/>
+          <p:nvPr/>
+        </p:nvSpPr>
+        <p:spPr>
+          <a:xfrm>
+            <a:off x="4754880" y="2331720"/>
+            <a:ext cx="292608" cy="292608"/>
+          </a:xfrm>
+          <a:prstGeom prst="rect">
+            <a:avLst/>
+          </a:prstGeom>
+          <a:noFill/>
+          <a:ln/>
+        </p:spPr>
+        <p:txBody>
+          <a:bodyPr wrap="square" lIns="0" tIns="0" rIns="0" bIns="0" rtlCol="0" anchor="ctr"/>
+          <a:lstStyle/>
+          <a:p>
+            <a:pPr marL="0" indent="0" algn="ctr">
+              <a:buNone/>
+            </a:pPr>
+            <a:r>
+              <a:rPr lang="en-US" sz="1100" b="1" dirty="0">
+                <a:solidFill>
+                  <a:srgbClr val="FFFFFF"/>
+                </a:solidFill>
+                <a:latin typeface="Calibri" pitchFamily="34" charset="0"/>
+                <a:ea typeface="Calibri" pitchFamily="34" charset="-122"/>
+                <a:cs typeface="Calibri" pitchFamily="34" charset="-120"/>
+              </a:rPr>
+              <a:t>9</a:t>
+            </a:r>
+            <a:endParaRPr lang="en-US" sz="1100" dirty="0"/>
+          </a:p>
+        </p:txBody>
+      </p:sp>
+      <p:sp>
+        <p:nvSpPr>
+          <p:cNvPr id="42" name="Text 39"/>
+          <p:cNvSpPr/>
+          <p:nvPr/>
+        </p:nvSpPr>
+        <p:spPr>
+          <a:xfrm>
+            <a:off x="5138928" y="2313432"/>
+            <a:ext cx="3657600" cy="256032"/>
+          </a:xfrm>
+          <a:prstGeom prst="rect">
+            <a:avLst/>
+          </a:prstGeom>
+          <a:noFill/>
+          <a:ln/>
+        </p:spPr>
+        <p:txBody>
+          <a:bodyPr wrap="square" lIns="0" tIns="0" rIns="0" bIns="0" rtlCol="0" anchor="ctr"/>
+          <a:lstStyle/>
+          <a:p>
+            <a:pPr marL="0" indent="0">
+              <a:buNone/>
+            </a:pPr>
+            <a:r>
+              <a:rPr lang="en-US" sz="1250" b="1" dirty="0">
+                <a:solidFill>
+                  <a:srgbClr val="1E293B"/>
+                </a:solidFill>
+                <a:latin typeface="Calibri" pitchFamily="34" charset="0"/>
+                <a:ea typeface="Calibri" pitchFamily="34" charset="-122"/>
+                <a:cs typeface="Calibri" pitchFamily="34" charset="-120"/>
+              </a:rPr>
+              <a:t>Implementation Status</a:t>
+            </a:r>
+            <a:endParaRPr lang="en-US" sz="1250" dirty="0"/>
+          </a:p>
+        </p:txBody>
+      </p:sp>
+      <p:sp>
+        <p:nvSpPr>
+          <p:cNvPr id="43" name="Text 40"/>
+          <p:cNvSpPr/>
+          <p:nvPr/>
+        </p:nvSpPr>
+        <p:spPr>
+          <a:xfrm>
+            <a:off x="5138928" y="2551176"/>
+            <a:ext cx="3840480" cy="228600"/>
+          </a:xfrm>
+          <a:prstGeom prst="rect">
+            <a:avLst/>
+          </a:prstGeom>
+          <a:noFill/>
+          <a:ln/>
+        </p:spPr>
+        <p:txBody>
+          <a:bodyPr wrap="square" lIns="0" tIns="0" rIns="0" bIns="0" rtlCol="0" anchor="t"/>
+          <a:lstStyle/>
+          <a:p>
+            <a:pPr marL="0" indent="0">
+              <a:buNone/>
+            </a:pPr>
+            <a:r>
+              <a:rPr lang="en-US" sz="1000" i="1" dirty="0">
+                <a:solidFill>
+                  <a:srgbClr val="475569"/>
+                </a:solidFill>
+                <a:latin typeface="Calibri" pitchFamily="34" charset="0"/>
+                <a:ea typeface="Calibri" pitchFamily="34" charset="-122"/>
+                <a:cs typeface="Calibri" pitchFamily="34" charset="-120"/>
+              </a:rPr>
+              <a:t>—  End-to-end pipeline complete</a:t>
+            </a:r>
+            <a:endParaRPr lang="en-US" sz="1000" dirty="0"/>
+          </a:p>
+        </p:txBody>
+      </p:sp>
+      <p:sp>
+        <p:nvSpPr>
+          <p:cNvPr id="44" name="Shape 41"/>
+          <p:cNvSpPr/>
+          <p:nvPr/>
+        </p:nvSpPr>
+        <p:spPr>
+          <a:xfrm>
+            <a:off x="4754880" y="2825496"/>
+            <a:ext cx="292608" cy="292608"/>
+          </a:xfrm>
+          <a:prstGeom prst="ellipse">
+            <a:avLst/>
+          </a:prstGeom>
+          <a:solidFill>
+            <a:srgbClr val="0F1E45"/>
+          </a:solidFill>
+          <a:ln w="12700">
+            <a:solidFill>
+              <a:srgbClr val="0F1E45"/>
+            </a:solidFill>
+            <a:prstDash val="solid"/>
+          </a:ln>
+        </p:spPr>
+      </p:sp>
+      <p:sp>
+        <p:nvSpPr>
+          <p:cNvPr id="45" name="Text 42"/>
+          <p:cNvSpPr/>
+          <p:nvPr/>
+        </p:nvSpPr>
+        <p:spPr>
+          <a:xfrm>
+            <a:off x="4754880" y="2825496"/>
+            <a:ext cx="292608" cy="292608"/>
+          </a:xfrm>
+          <a:prstGeom prst="rect">
+            <a:avLst/>
+          </a:prstGeom>
+          <a:noFill/>
+          <a:ln/>
+        </p:spPr>
+        <p:txBody>
+          <a:bodyPr wrap="square" lIns="0" tIns="0" rIns="0" bIns="0" rtlCol="0" anchor="ctr"/>
+          <a:lstStyle/>
+          <a:p>
+            <a:pPr marL="0" indent="0" algn="ctr">
+              <a:buNone/>
+            </a:pPr>
+            <a:r>
+              <a:rPr lang="en-US" sz="1100" b="1" dirty="0">
+                <a:solidFill>
+                  <a:srgbClr val="FFFFFF"/>
+                </a:solidFill>
+                <a:latin typeface="Calibri" pitchFamily="34" charset="0"/>
+                <a:ea typeface="Calibri" pitchFamily="34" charset="-122"/>
+                <a:cs typeface="Calibri" pitchFamily="34" charset="-120"/>
+              </a:rPr>
+              <a:t>10</a:t>
+            </a:r>
+            <a:endParaRPr lang="en-US" sz="1100" dirty="0"/>
+          </a:p>
+        </p:txBody>
+      </p:sp>
+      <p:sp>
+        <p:nvSpPr>
+          <p:cNvPr id="46" name="Text 43"/>
+          <p:cNvSpPr/>
+          <p:nvPr/>
+        </p:nvSpPr>
+        <p:spPr>
+          <a:xfrm>
+            <a:off x="5138928" y="2807208"/>
+            <a:ext cx="3657600" cy="256032"/>
+          </a:xfrm>
+          <a:prstGeom prst="rect">
+            <a:avLst/>
+          </a:prstGeom>
+          <a:noFill/>
+          <a:ln/>
+        </p:spPr>
+        <p:txBody>
+          <a:bodyPr wrap="square" lIns="0" tIns="0" rIns="0" bIns="0" rtlCol="0" anchor="ctr"/>
+          <a:lstStyle/>
+          <a:p>
+            <a:pPr marL="0" indent="0">
+              <a:buNone/>
+            </a:pPr>
+            <a:r>
+              <a:rPr lang="en-US" sz="1250" b="1" dirty="0">
+                <a:solidFill>
+                  <a:srgbClr val="1E293B"/>
+                </a:solidFill>
+                <a:latin typeface="Calibri" pitchFamily="34" charset="0"/>
+                <a:ea typeface="Calibri" pitchFamily="34" charset="-122"/>
+                <a:cs typeface="Calibri" pitchFamily="34" charset="-120"/>
+              </a:rPr>
+              <a:t>Results</a:t>
+            </a:r>
+            <a:endParaRPr lang="en-US" sz="1250" dirty="0"/>
+          </a:p>
+        </p:txBody>
+      </p:sp>
+      <p:sp>
+        <p:nvSpPr>
+          <p:cNvPr id="47" name="Text 44"/>
+          <p:cNvSpPr/>
+          <p:nvPr/>
+        </p:nvSpPr>
+        <p:spPr>
+          <a:xfrm>
+            <a:off x="5138928" y="3044952"/>
+            <a:ext cx="3840480" cy="228600"/>
+          </a:xfrm>
+          <a:prstGeom prst="rect">
+            <a:avLst/>
+          </a:prstGeom>
+          <a:noFill/>
+          <a:ln/>
+        </p:spPr>
+        <p:txBody>
+          <a:bodyPr wrap="square" lIns="0" tIns="0" rIns="0" bIns="0" rtlCol="0" anchor="t"/>
+          <a:lstStyle/>
+          <a:p>
+            <a:pPr marL="0" indent="0">
+              <a:buNone/>
+            </a:pPr>
+            <a:r>
+              <a:rPr lang="en-US" sz="1000" i="1" dirty="0">
+                <a:solidFill>
+                  <a:srgbClr val="475569"/>
+                </a:solidFill>
+                <a:latin typeface="Calibri" pitchFamily="34" charset="0"/>
+                <a:ea typeface="Calibri" pitchFamily="34" charset="-122"/>
+                <a:cs typeface="Calibri" pitchFamily="34" charset="-120"/>
+              </a:rPr>
+              <a:t>—  RM 68.2% % acc.  •  DPO 60.1 % win-rate</a:t>
+            </a:r>
+            <a:endParaRPr lang="en-US" sz="1000" dirty="0"/>
+          </a:p>
+        </p:txBody>
+      </p:sp>
+      <p:sp>
+        <p:nvSpPr>
+          <p:cNvPr id="48" name="Shape 45"/>
+          <p:cNvSpPr/>
+          <p:nvPr/>
+        </p:nvSpPr>
+        <p:spPr>
+          <a:xfrm>
+            <a:off x="4754880" y="3319272"/>
+            <a:ext cx="292608" cy="292608"/>
+          </a:xfrm>
+          <a:prstGeom prst="ellipse">
+            <a:avLst/>
+          </a:prstGeom>
+          <a:solidFill>
+            <a:srgbClr val="0F1E45"/>
+          </a:solidFill>
+          <a:ln w="12700">
+            <a:solidFill>
+              <a:srgbClr val="0F1E45"/>
+            </a:solidFill>
+            <a:prstDash val="solid"/>
+          </a:ln>
+        </p:spPr>
+      </p:sp>
+      <p:sp>
+        <p:nvSpPr>
+          <p:cNvPr id="49" name="Text 46"/>
+          <p:cNvSpPr/>
+          <p:nvPr/>
+        </p:nvSpPr>
+        <p:spPr>
+          <a:xfrm>
+            <a:off x="4754880" y="3319272"/>
+            <a:ext cx="292608" cy="292608"/>
+          </a:xfrm>
+          <a:prstGeom prst="rect">
+            <a:avLst/>
+          </a:prstGeom>
+          <a:noFill/>
+          <a:ln/>
+        </p:spPr>
+        <p:txBody>
+          <a:bodyPr wrap="square" lIns="0" tIns="0" rIns="0" bIns="0" rtlCol="0" anchor="ctr"/>
+          <a:lstStyle/>
+          <a:p>
+            <a:pPr marL="0" indent="0" algn="ctr">
+              <a:buNone/>
+            </a:pPr>
+            <a:r>
+              <a:rPr lang="en-US" sz="1100" b="1" dirty="0">
+                <a:solidFill>
+                  <a:srgbClr val="FFFFFF"/>
+                </a:solidFill>
+                <a:latin typeface="Calibri" pitchFamily="34" charset="0"/>
+                <a:ea typeface="Calibri" pitchFamily="34" charset="-122"/>
+                <a:cs typeface="Calibri" pitchFamily="34" charset="-120"/>
+              </a:rPr>
+              <a:t>11</a:t>
+            </a:r>
+            <a:endParaRPr lang="en-US" sz="1100" dirty="0"/>
+          </a:p>
+        </p:txBody>
+      </p:sp>
+      <p:sp>
+        <p:nvSpPr>
+          <p:cNvPr id="50" name="Text 47"/>
+          <p:cNvSpPr/>
+          <p:nvPr/>
+        </p:nvSpPr>
+        <p:spPr>
+          <a:xfrm>
+            <a:off x="5138928" y="3300984"/>
+            <a:ext cx="3657600" cy="256032"/>
+          </a:xfrm>
+          <a:prstGeom prst="rect">
+            <a:avLst/>
+          </a:prstGeom>
+          <a:noFill/>
+          <a:ln/>
+        </p:spPr>
+        <p:txBody>
+          <a:bodyPr wrap="square" lIns="0" tIns="0" rIns="0" bIns="0" rtlCol="0" anchor="ctr"/>
+          <a:lstStyle/>
+          <a:p>
+            <a:pPr marL="0" indent="0">
+              <a:buNone/>
+            </a:pPr>
+            <a:r>
+              <a:rPr lang="en-US" sz="1250" b="1" dirty="0">
+                <a:solidFill>
+                  <a:srgbClr val="1E293B"/>
+                </a:solidFill>
+                <a:latin typeface="Calibri" pitchFamily="34" charset="0"/>
+                <a:ea typeface="Calibri" pitchFamily="34" charset="-122"/>
+                <a:cs typeface="Calibri" pitchFamily="34" charset="-120"/>
+              </a:rPr>
+              <a:t>Advantages &amp; Applications</a:t>
+            </a:r>
+            <a:endParaRPr lang="en-US" sz="1250" dirty="0"/>
+          </a:p>
+        </p:txBody>
+      </p:sp>
+      <p:sp>
+        <p:nvSpPr>
+          <p:cNvPr id="51" name="Text 48"/>
+          <p:cNvSpPr/>
+          <p:nvPr/>
+        </p:nvSpPr>
+        <p:spPr>
+          <a:xfrm>
+            <a:off x="5138928" y="3538728"/>
+            <a:ext cx="3840480" cy="228600"/>
+          </a:xfrm>
+          <a:prstGeom prst="rect">
+            <a:avLst/>
+          </a:prstGeom>
+          <a:noFill/>
+          <a:ln/>
+        </p:spPr>
+        <p:txBody>
+          <a:bodyPr wrap="square" lIns="0" tIns="0" rIns="0" bIns="0" rtlCol="0" anchor="t"/>
+          <a:lstStyle/>
+          <a:p>
+            <a:pPr marL="0" indent="0">
+              <a:buNone/>
+            </a:pPr>
+            <a:r>
+              <a:rPr lang="en-US" sz="1000" i="1" dirty="0">
+                <a:solidFill>
+                  <a:srgbClr val="475569"/>
+                </a:solidFill>
+                <a:latin typeface="Calibri" pitchFamily="34" charset="0"/>
+                <a:ea typeface="Calibri" pitchFamily="34" charset="-122"/>
+                <a:cs typeface="Calibri" pitchFamily="34" charset="-120"/>
+              </a:rPr>
+              <a:t>—  Why this approach is useful</a:t>
+            </a:r>
+            <a:endParaRPr lang="en-US" sz="1000" dirty="0"/>
+          </a:p>
+        </p:txBody>
+      </p:sp>
+      <p:sp>
+        <p:nvSpPr>
+          <p:cNvPr id="52" name="Shape 49"/>
+          <p:cNvSpPr/>
+          <p:nvPr/>
+        </p:nvSpPr>
+        <p:spPr>
+          <a:xfrm>
+            <a:off x="4754880" y="3813048"/>
+            <a:ext cx="292608" cy="292608"/>
+          </a:xfrm>
+          <a:prstGeom prst="ellipse">
+            <a:avLst/>
+          </a:prstGeom>
+          <a:solidFill>
+            <a:srgbClr val="0F1E45"/>
+          </a:solidFill>
+          <a:ln w="12700">
+            <a:solidFill>
+              <a:srgbClr val="0F1E45"/>
+            </a:solidFill>
+            <a:prstDash val="solid"/>
+          </a:ln>
+        </p:spPr>
+      </p:sp>
+      <p:sp>
+        <p:nvSpPr>
+          <p:cNvPr id="53" name="Text 50"/>
+          <p:cNvSpPr/>
+          <p:nvPr/>
+        </p:nvSpPr>
+        <p:spPr>
+          <a:xfrm>
+            <a:off x="4754880" y="3813048"/>
+            <a:ext cx="292608" cy="292608"/>
+          </a:xfrm>
+          <a:prstGeom prst="rect">
+            <a:avLst/>
+          </a:prstGeom>
+          <a:noFill/>
+          <a:ln/>
+        </p:spPr>
+        <p:txBody>
+          <a:bodyPr wrap="square" lIns="0" tIns="0" rIns="0" bIns="0" rtlCol="0" anchor="ctr"/>
+          <a:lstStyle/>
+          <a:p>
+            <a:pPr marL="0" indent="0" algn="ctr">
+              <a:buNone/>
+            </a:pPr>
+            <a:r>
+              <a:rPr lang="en-US" sz="1100" b="1" dirty="0">
+                <a:solidFill>
+                  <a:srgbClr val="FFFFFF"/>
+                </a:solidFill>
+                <a:latin typeface="Calibri" pitchFamily="34" charset="0"/>
+                <a:ea typeface="Calibri" pitchFamily="34" charset="-122"/>
+                <a:cs typeface="Calibri" pitchFamily="34" charset="-120"/>
+              </a:rPr>
+              <a:t>12</a:t>
+            </a:r>
+            <a:endParaRPr lang="en-US" sz="1100" dirty="0"/>
+          </a:p>
+        </p:txBody>
+      </p:sp>
+      <p:sp>
+        <p:nvSpPr>
+          <p:cNvPr id="54" name="Text 51"/>
+          <p:cNvSpPr/>
+          <p:nvPr/>
+        </p:nvSpPr>
+        <p:spPr>
+          <a:xfrm>
+            <a:off x="5138928" y="3794760"/>
+            <a:ext cx="3657600" cy="256032"/>
+          </a:xfrm>
+          <a:prstGeom prst="rect">
+            <a:avLst/>
+          </a:prstGeom>
+          <a:noFill/>
+          <a:ln/>
+        </p:spPr>
+        <p:txBody>
+          <a:bodyPr wrap="square" lIns="0" tIns="0" rIns="0" bIns="0" rtlCol="0" anchor="ctr"/>
+          <a:lstStyle/>
+          <a:p>
+            <a:pPr marL="0" indent="0">
+              <a:buNone/>
+            </a:pPr>
+            <a:r>
+              <a:rPr lang="en-US" sz="1250" b="1" dirty="0">
+                <a:solidFill>
+                  <a:srgbClr val="1E293B"/>
+                </a:solidFill>
+                <a:latin typeface="Calibri" pitchFamily="34" charset="0"/>
+                <a:ea typeface="Calibri" pitchFamily="34" charset="-122"/>
+                <a:cs typeface="Calibri" pitchFamily="34" charset="-120"/>
+              </a:rPr>
+              <a:t>Future Scope</a:t>
+            </a:r>
+            <a:endParaRPr lang="en-US" sz="1250" dirty="0"/>
+          </a:p>
+        </p:txBody>
+      </p:sp>
+      <p:sp>
+        <p:nvSpPr>
+          <p:cNvPr id="55" name="Text 52"/>
+          <p:cNvSpPr/>
+          <p:nvPr/>
+        </p:nvSpPr>
+        <p:spPr>
+          <a:xfrm>
+            <a:off x="5138928" y="4032504"/>
+            <a:ext cx="3840480" cy="228600"/>
+          </a:xfrm>
+          <a:prstGeom prst="rect">
+            <a:avLst/>
+          </a:prstGeom>
+          <a:noFill/>
+          <a:ln/>
+        </p:spPr>
+        <p:txBody>
+          <a:bodyPr wrap="square" lIns="0" tIns="0" rIns="0" bIns="0" rtlCol="0" anchor="t"/>
+          <a:lstStyle/>
+          <a:p>
+            <a:pPr marL="0" indent="0">
+              <a:buNone/>
+            </a:pPr>
+            <a:r>
+              <a:rPr lang="en-US" sz="1000" i="1" dirty="0">
+                <a:solidFill>
+                  <a:srgbClr val="475569"/>
+                </a:solidFill>
+                <a:latin typeface="Calibri" pitchFamily="34" charset="0"/>
+                <a:ea typeface="Calibri" pitchFamily="34" charset="-122"/>
+                <a:cs typeface="Calibri" pitchFamily="34" charset="-120"/>
+              </a:rPr>
+              <a:t>—  SFT stage, scale-up, ensemble RMs</a:t>
+            </a:r>
+            <a:endParaRPr lang="en-US" sz="1000" dirty="0"/>
           </a:p>
         </p:txBody>
       </p:sp>
@@ -3109,2432 +4049,6 @@
 </file>
 
 <file path=ppt/slides/slide10.xml><?xml version="1.0" encoding="utf-8"?>
-<p:sld xmlns:a="http://schemas.openxmlformats.org/drawingml/2006/main" xmlns:r="http://schemas.openxmlformats.org/officeDocument/2006/relationships" xmlns:p="http://schemas.openxmlformats.org/presentationml/2006/main">
-  <p:cSld name="Slide 10">
-    <p:spTree>
-      <p:nvGrpSpPr>
-        <p:cNvPr id="1" name=""/>
-        <p:cNvGrpSpPr/>
-        <p:nvPr/>
-      </p:nvGrpSpPr>
-      <p:grpSpPr>
-        <a:xfrm>
-          <a:off x="0" y="0"/>
-          <a:ext cx="0" cy="0"/>
-          <a:chOff x="0" y="0"/>
-          <a:chExt cx="0" cy="0"/>
-        </a:xfrm>
-      </p:grpSpPr>
-      <p:pic>
-        <p:nvPicPr>
-          <p:cNvPr id="2" name="Image 0" descr="/home/claude/iiit_header.png"/>
-          <p:cNvPicPr>
-            <a:picLocks noChangeAspect="1"/>
-          </p:cNvPicPr>
-          <p:nvPr/>
-        </p:nvPicPr>
-        <p:blipFill>
-          <a:blip r:embed="rId3"/>
-          <a:stretch>
-            <a:fillRect/>
-          </a:stretch>
-        </p:blipFill>
-        <p:spPr>
-          <a:xfrm>
-            <a:off x="137160" y="45719"/>
-            <a:ext cx="8869680" cy="685799"/>
-          </a:xfrm>
-          <a:prstGeom prst="rect">
-            <a:avLst/>
-          </a:prstGeom>
-        </p:spPr>
-      </p:pic>
-      <p:sp>
-        <p:nvSpPr>
-          <p:cNvPr id="3" name="Shape 0"/>
-          <p:cNvSpPr/>
-          <p:nvPr/>
-        </p:nvSpPr>
-        <p:spPr>
-          <a:xfrm>
-            <a:off x="0" y="713232"/>
-            <a:ext cx="73152" cy="4160520"/>
-          </a:xfrm>
-          <a:prstGeom prst="rect">
-            <a:avLst/>
-          </a:prstGeom>
-          <a:solidFill>
-            <a:srgbClr val="F5A623"/>
-          </a:solidFill>
-          <a:ln w="12700">
-            <a:solidFill>
-              <a:srgbClr val="F5A623"/>
-            </a:solidFill>
-            <a:prstDash val="solid"/>
-          </a:ln>
-        </p:spPr>
-      </p:sp>
-      <p:sp>
-        <p:nvSpPr>
-          <p:cNvPr id="4" name="Shape 1"/>
-          <p:cNvSpPr/>
-          <p:nvPr/>
-        </p:nvSpPr>
-        <p:spPr>
-          <a:xfrm>
-            <a:off x="274320" y="4892040"/>
-            <a:ext cx="8595360" cy="0"/>
-          </a:xfrm>
-          <a:prstGeom prst="line">
-            <a:avLst/>
-          </a:prstGeom>
-          <a:noFill/>
-          <a:ln w="9525">
-            <a:solidFill>
-              <a:srgbClr val="CBD5E1"/>
-            </a:solidFill>
-            <a:prstDash val="solid"/>
-          </a:ln>
-        </p:spPr>
-      </p:sp>
-      <p:sp>
-        <p:nvSpPr>
-          <p:cNvPr id="5" name="Text 2"/>
-          <p:cNvSpPr/>
-          <p:nvPr/>
-        </p:nvSpPr>
-        <p:spPr>
-          <a:xfrm>
-            <a:off x="274320" y="4937760"/>
-            <a:ext cx="5486400" cy="228600"/>
-          </a:xfrm>
-          <a:prstGeom prst="rect">
-            <a:avLst/>
-          </a:prstGeom>
-          <a:noFill/>
-          <a:ln/>
-        </p:spPr>
-        <p:txBody>
-          <a:bodyPr wrap="square" lIns="0" tIns="0" rIns="0" bIns="0" rtlCol="0" anchor="t"/>
-          <a:lstStyle/>
-          <a:p>
-            <a:pPr marL="0" indent="0">
-              <a:buNone/>
-            </a:pPr>
-            <a:r>
-              <a:rPr lang="en-US" sz="1200" dirty="0">
-                <a:solidFill>
-                  <a:srgbClr val="1E293B"/>
-                </a:solidFill>
-                <a:latin typeface="Calibri" pitchFamily="34" charset="0"/>
-                <a:ea typeface="Calibri" pitchFamily="34" charset="-122"/>
-                <a:cs typeface="Calibri" pitchFamily="34" charset="-120"/>
-              </a:rPr>
-              <a:t>RLHF: Reward Modeling + DPO</a:t>
-            </a:r>
-            <a:r>
-              <a:rPr lang="en-US" sz="1200" dirty="0">
-                <a:solidFill>
-                  <a:srgbClr val="94A3B8"/>
-                </a:solidFill>
-                <a:latin typeface="Calibri" pitchFamily="34" charset="0"/>
-                <a:ea typeface="Calibri" pitchFamily="34" charset="-122"/>
-                <a:cs typeface="Calibri" pitchFamily="34" charset="-120"/>
-              </a:rPr>
-              <a:t>   </a:t>
-            </a:r>
-            <a:endParaRPr lang="en-US" sz="1200" dirty="0"/>
-          </a:p>
-        </p:txBody>
-      </p:sp>
-      <p:sp>
-        <p:nvSpPr>
-          <p:cNvPr id="6" name="Text 3"/>
-          <p:cNvSpPr/>
-          <p:nvPr/>
-        </p:nvSpPr>
-        <p:spPr>
-          <a:xfrm>
-            <a:off x="6858000" y="4937760"/>
-            <a:ext cx="2011680" cy="228600"/>
-          </a:xfrm>
-          <a:prstGeom prst="rect">
-            <a:avLst/>
-          </a:prstGeom>
-          <a:noFill/>
-          <a:ln/>
-        </p:spPr>
-        <p:txBody>
-          <a:bodyPr wrap="square" lIns="0" tIns="0" rIns="0" bIns="0" rtlCol="0" anchor="t"/>
-          <a:lstStyle/>
-          <a:p>
-            <a:pPr marL="0" indent="0" algn="r">
-              <a:buNone/>
-            </a:pPr>
-            <a:r>
-              <a:rPr lang="en-US" sz="1200" dirty="0">
-                <a:solidFill>
-                  <a:srgbClr val="475569"/>
-                </a:solidFill>
-                <a:latin typeface="Calibri" pitchFamily="34" charset="0"/>
-                <a:ea typeface="Calibri" pitchFamily="34" charset="-122"/>
-                <a:cs typeface="Calibri" pitchFamily="34" charset="-120"/>
-              </a:rPr>
-              <a:t>Slide 9 / 16</a:t>
-            </a:r>
-            <a:endParaRPr lang="en-US" sz="1200" dirty="0"/>
-          </a:p>
-        </p:txBody>
-      </p:sp>
-      <p:sp>
-        <p:nvSpPr>
-          <p:cNvPr id="7" name="Text 4"/>
-          <p:cNvSpPr/>
-          <p:nvPr/>
-        </p:nvSpPr>
-        <p:spPr>
-          <a:xfrm>
-            <a:off x="274320" y="777240"/>
-            <a:ext cx="8595360" cy="365760"/>
-          </a:xfrm>
-          <a:prstGeom prst="rect">
-            <a:avLst/>
-          </a:prstGeom>
-          <a:noFill/>
-          <a:ln/>
-        </p:spPr>
-        <p:txBody>
-          <a:bodyPr wrap="square" lIns="0" tIns="0" rIns="0" bIns="0" rtlCol="0" anchor="ctr"/>
-          <a:lstStyle/>
-          <a:p>
-            <a:pPr marL="0" indent="0">
-              <a:buNone/>
-            </a:pPr>
-            <a:r>
-              <a:rPr lang="en-US" sz="1400" b="1" dirty="0">
-                <a:solidFill>
-                  <a:srgbClr val="1E293B"/>
-                </a:solidFill>
-                <a:latin typeface="Calibri" pitchFamily="34" charset="0"/>
-                <a:ea typeface="Calibri" pitchFamily="34" charset="-122"/>
-                <a:cs typeface="Calibri" pitchFamily="34" charset="-120"/>
-              </a:rPr>
-              <a:t>Reward Model Architecture</a:t>
-            </a:r>
-            <a:endParaRPr lang="en-US" sz="1400" dirty="0"/>
-          </a:p>
-        </p:txBody>
-      </p:sp>
-      <p:sp>
-        <p:nvSpPr>
-          <p:cNvPr id="8" name="Text 5"/>
-          <p:cNvSpPr/>
-          <p:nvPr/>
-        </p:nvSpPr>
-        <p:spPr>
-          <a:xfrm>
-            <a:off x="274320" y="1143000"/>
-            <a:ext cx="8595360" cy="274320"/>
-          </a:xfrm>
-          <a:prstGeom prst="rect">
-            <a:avLst/>
-          </a:prstGeom>
-          <a:noFill/>
-          <a:ln/>
-        </p:spPr>
-        <p:txBody>
-          <a:bodyPr wrap="square" lIns="0" tIns="0" rIns="0" bIns="0" rtlCol="0" anchor="ctr"/>
-          <a:lstStyle/>
-          <a:p>
-            <a:pPr marL="0" indent="0">
-              <a:buNone/>
-            </a:pPr>
-            <a:r>
-              <a:rPr lang="en-US" sz="1400" i="1" dirty="0">
-                <a:solidFill>
-                  <a:srgbClr val="475569"/>
-                </a:solidFill>
-                <a:latin typeface="Calibri" pitchFamily="34" charset="0"/>
-                <a:ea typeface="Calibri" pitchFamily="34" charset="-122"/>
-                <a:cs typeface="Calibri" pitchFamily="34" charset="-120"/>
-              </a:rPr>
-              <a:t>DeBERTa-v3-base + LoRA, Bradley-Terry pairwise loss</a:t>
-            </a:r>
-            <a:endParaRPr lang="en-US" sz="1400" dirty="0"/>
-          </a:p>
-        </p:txBody>
-      </p:sp>
-      <p:sp>
-        <p:nvSpPr>
-          <p:cNvPr id="9" name="Shape 6"/>
-          <p:cNvSpPr/>
-          <p:nvPr/>
-        </p:nvSpPr>
-        <p:spPr>
-          <a:xfrm>
-            <a:off x="388620" y="1554480"/>
-            <a:ext cx="1600200" cy="640080"/>
-          </a:xfrm>
-          <a:prstGeom prst="rect">
-            <a:avLst/>
-          </a:prstGeom>
-          <a:solidFill>
-            <a:srgbClr val="1E40AF"/>
-          </a:solidFill>
-          <a:ln w="12700">
-            <a:solidFill>
-              <a:srgbClr val="1E40AF"/>
-            </a:solidFill>
-            <a:prstDash val="solid"/>
-          </a:ln>
-        </p:spPr>
-      </p:sp>
-      <p:sp>
-        <p:nvSpPr>
-          <p:cNvPr id="10" name="Text 7"/>
-          <p:cNvSpPr/>
-          <p:nvPr/>
-        </p:nvSpPr>
-        <p:spPr>
-          <a:xfrm>
-            <a:off x="388620" y="1600200"/>
-            <a:ext cx="1600200" cy="274320"/>
-          </a:xfrm>
-          <a:prstGeom prst="rect">
-            <a:avLst/>
-          </a:prstGeom>
-          <a:noFill/>
-          <a:ln/>
-        </p:spPr>
-        <p:txBody>
-          <a:bodyPr wrap="square" lIns="0" tIns="0" rIns="0" bIns="0" rtlCol="0" anchor="ctr"/>
-          <a:lstStyle/>
-          <a:p>
-            <a:pPr marL="0" indent="0" algn="ctr">
-              <a:buNone/>
-            </a:pPr>
-            <a:r>
-              <a:rPr lang="en-US" sz="1200" b="1" dirty="0">
-                <a:solidFill>
-                  <a:srgbClr val="FFFFFF"/>
-                </a:solidFill>
-                <a:latin typeface="Calibri" pitchFamily="34" charset="0"/>
-                <a:ea typeface="Calibri" pitchFamily="34" charset="-122"/>
-                <a:cs typeface="Calibri" pitchFamily="34" charset="-120"/>
-              </a:rPr>
-              <a:t>Input Pair</a:t>
-            </a:r>
-            <a:endParaRPr lang="en-US" sz="1200" dirty="0"/>
-          </a:p>
-        </p:txBody>
-      </p:sp>
-      <p:sp>
-        <p:nvSpPr>
-          <p:cNvPr id="11" name="Text 8"/>
-          <p:cNvSpPr/>
-          <p:nvPr/>
-        </p:nvSpPr>
-        <p:spPr>
-          <a:xfrm>
-            <a:off x="388620" y="1856232"/>
-            <a:ext cx="1600200" cy="292608"/>
-          </a:xfrm>
-          <a:prstGeom prst="rect">
-            <a:avLst/>
-          </a:prstGeom>
-          <a:noFill/>
-          <a:ln/>
-        </p:spPr>
-        <p:txBody>
-          <a:bodyPr wrap="square" lIns="0" tIns="0" rIns="0" bIns="0" rtlCol="0" anchor="t"/>
-          <a:lstStyle/>
-          <a:p>
-            <a:pPr marL="0" indent="0" algn="ctr">
-              <a:buNone/>
-            </a:pPr>
-            <a:r>
-              <a:rPr lang="en-US" sz="1200" dirty="0">
-                <a:solidFill>
-                  <a:srgbClr val="FFFFFF"/>
-                </a:solidFill>
-                <a:latin typeface="Calibri" pitchFamily="34" charset="0"/>
-                <a:ea typeface="Calibri" pitchFamily="34" charset="-122"/>
-                <a:cs typeface="Calibri" pitchFamily="34" charset="-120"/>
-              </a:rPr>
-              <a:t>(prompt, response)</a:t>
-            </a:r>
-            <a:endParaRPr lang="en-US" sz="1200" dirty="0"/>
-          </a:p>
-        </p:txBody>
-      </p:sp>
-      <p:sp>
-        <p:nvSpPr>
-          <p:cNvPr id="12" name="Shape 9"/>
-          <p:cNvSpPr/>
-          <p:nvPr/>
-        </p:nvSpPr>
-        <p:spPr>
-          <a:xfrm>
-            <a:off x="2080260" y="1554480"/>
-            <a:ext cx="1600200" cy="640080"/>
-          </a:xfrm>
-          <a:prstGeom prst="rect">
-            <a:avLst/>
-          </a:prstGeom>
-          <a:solidFill>
-            <a:srgbClr val="0D9488"/>
-          </a:solidFill>
-          <a:ln w="12700">
-            <a:solidFill>
-              <a:srgbClr val="0D9488"/>
-            </a:solidFill>
-            <a:prstDash val="solid"/>
-          </a:ln>
-        </p:spPr>
-      </p:sp>
-      <p:sp>
-        <p:nvSpPr>
-          <p:cNvPr id="13" name="Text 10"/>
-          <p:cNvSpPr/>
-          <p:nvPr/>
-        </p:nvSpPr>
-        <p:spPr>
-          <a:xfrm>
-            <a:off x="2080260" y="1600200"/>
-            <a:ext cx="1600200" cy="274320"/>
-          </a:xfrm>
-          <a:prstGeom prst="rect">
-            <a:avLst/>
-          </a:prstGeom>
-          <a:noFill/>
-          <a:ln/>
-        </p:spPr>
-        <p:txBody>
-          <a:bodyPr wrap="square" lIns="0" tIns="0" rIns="0" bIns="0" rtlCol="0" anchor="ctr"/>
-          <a:lstStyle/>
-          <a:p>
-            <a:pPr marL="0" indent="0" algn="ctr">
-              <a:buNone/>
-            </a:pPr>
-            <a:r>
-              <a:rPr lang="en-US" sz="1200" b="1" dirty="0">
-                <a:solidFill>
-                  <a:srgbClr val="FFFFFF"/>
-                </a:solidFill>
-                <a:latin typeface="Calibri" pitchFamily="34" charset="0"/>
-                <a:ea typeface="Calibri" pitchFamily="34" charset="-122"/>
-                <a:cs typeface="Calibri" pitchFamily="34" charset="-120"/>
-              </a:rPr>
-              <a:t>DeBERTa-v3</a:t>
-            </a:r>
-            <a:endParaRPr lang="en-US" sz="1200" dirty="0"/>
-          </a:p>
-        </p:txBody>
-      </p:sp>
-      <p:sp>
-        <p:nvSpPr>
-          <p:cNvPr id="14" name="Text 11"/>
-          <p:cNvSpPr/>
-          <p:nvPr/>
-        </p:nvSpPr>
-        <p:spPr>
-          <a:xfrm>
-            <a:off x="2080260" y="1856232"/>
-            <a:ext cx="1600200" cy="292608"/>
-          </a:xfrm>
-          <a:prstGeom prst="rect">
-            <a:avLst/>
-          </a:prstGeom>
-          <a:noFill/>
-          <a:ln/>
-        </p:spPr>
-        <p:txBody>
-          <a:bodyPr wrap="square" lIns="0" tIns="0" rIns="0" bIns="0" rtlCol="0" anchor="t"/>
-          <a:lstStyle/>
-          <a:p>
-            <a:pPr marL="0" indent="0" algn="ctr">
-              <a:buNone/>
-            </a:pPr>
-            <a:r>
-              <a:rPr lang="en-US" sz="1200" dirty="0">
-                <a:solidFill>
-                  <a:srgbClr val="FFFFFF"/>
-                </a:solidFill>
-                <a:latin typeface="Calibri" pitchFamily="34" charset="0"/>
-                <a:ea typeface="Calibri" pitchFamily="34" charset="-122"/>
-                <a:cs typeface="Calibri" pitchFamily="34" charset="-120"/>
-              </a:rPr>
-              <a:t>184 M (fp32)</a:t>
-            </a:r>
-            <a:endParaRPr lang="en-US" sz="1200" dirty="0"/>
-          </a:p>
-        </p:txBody>
-      </p:sp>
-      <p:sp>
-        <p:nvSpPr>
-          <p:cNvPr id="15" name="Shape 12"/>
-          <p:cNvSpPr/>
-          <p:nvPr/>
-        </p:nvSpPr>
-        <p:spPr>
-          <a:xfrm>
-            <a:off x="3771900" y="1554480"/>
-            <a:ext cx="1600200" cy="640080"/>
-          </a:xfrm>
-          <a:prstGeom prst="rect">
-            <a:avLst/>
-          </a:prstGeom>
-          <a:solidFill>
-            <a:srgbClr val="10B981"/>
-          </a:solidFill>
-          <a:ln w="12700">
-            <a:solidFill>
-              <a:srgbClr val="10B981"/>
-            </a:solidFill>
-            <a:prstDash val="solid"/>
-          </a:ln>
-        </p:spPr>
-      </p:sp>
-      <p:sp>
-        <p:nvSpPr>
-          <p:cNvPr id="16" name="Text 13"/>
-          <p:cNvSpPr/>
-          <p:nvPr/>
-        </p:nvSpPr>
-        <p:spPr>
-          <a:xfrm>
-            <a:off x="3771900" y="1600200"/>
-            <a:ext cx="1600200" cy="274320"/>
-          </a:xfrm>
-          <a:prstGeom prst="rect">
-            <a:avLst/>
-          </a:prstGeom>
-          <a:noFill/>
-          <a:ln/>
-        </p:spPr>
-        <p:txBody>
-          <a:bodyPr wrap="square" lIns="0" tIns="0" rIns="0" bIns="0" rtlCol="0" anchor="ctr"/>
-          <a:lstStyle/>
-          <a:p>
-            <a:pPr marL="0" indent="0" algn="ctr">
-              <a:buNone/>
-            </a:pPr>
-            <a:r>
-              <a:rPr lang="en-US" sz="1200" b="1" dirty="0">
-                <a:solidFill>
-                  <a:srgbClr val="FFFFFF"/>
-                </a:solidFill>
-                <a:latin typeface="Calibri" pitchFamily="34" charset="0"/>
-                <a:ea typeface="Calibri" pitchFamily="34" charset="-122"/>
-                <a:cs typeface="Calibri" pitchFamily="34" charset="-120"/>
-              </a:rPr>
-              <a:t>LoRA q,k,v_proj</a:t>
-            </a:r>
-            <a:endParaRPr lang="en-US" sz="1200" dirty="0"/>
-          </a:p>
-        </p:txBody>
-      </p:sp>
-      <p:sp>
-        <p:nvSpPr>
-          <p:cNvPr id="17" name="Text 14"/>
-          <p:cNvSpPr/>
-          <p:nvPr/>
-        </p:nvSpPr>
-        <p:spPr>
-          <a:xfrm>
-            <a:off x="3771900" y="1856232"/>
-            <a:ext cx="1600200" cy="292608"/>
-          </a:xfrm>
-          <a:prstGeom prst="rect">
-            <a:avLst/>
-          </a:prstGeom>
-          <a:noFill/>
-          <a:ln/>
-        </p:spPr>
-        <p:txBody>
-          <a:bodyPr wrap="square" lIns="0" tIns="0" rIns="0" bIns="0" rtlCol="0" anchor="t"/>
-          <a:lstStyle/>
-          <a:p>
-            <a:pPr marL="0" indent="0" algn="ctr">
-              <a:buNone/>
-            </a:pPr>
-            <a:r>
-              <a:rPr lang="en-US" sz="1200" dirty="0">
-                <a:solidFill>
-                  <a:srgbClr val="FFFFFF"/>
-                </a:solidFill>
-                <a:latin typeface="Calibri" pitchFamily="34" charset="0"/>
-                <a:ea typeface="Calibri" pitchFamily="34" charset="-122"/>
-                <a:cs typeface="Calibri" pitchFamily="34" charset="-120"/>
-              </a:rPr>
-              <a:t>r = 32, α = 64</a:t>
-            </a:r>
-            <a:endParaRPr lang="en-US" sz="1200" dirty="0"/>
-          </a:p>
-        </p:txBody>
-      </p:sp>
-      <p:sp>
-        <p:nvSpPr>
-          <p:cNvPr id="18" name="Shape 15"/>
-          <p:cNvSpPr/>
-          <p:nvPr/>
-        </p:nvSpPr>
-        <p:spPr>
-          <a:xfrm>
-            <a:off x="5463540" y="1554480"/>
-            <a:ext cx="1600200" cy="640080"/>
-          </a:xfrm>
-          <a:prstGeom prst="rect">
-            <a:avLst/>
-          </a:prstGeom>
-          <a:solidFill>
-            <a:srgbClr val="0891B2"/>
-          </a:solidFill>
-          <a:ln w="12700">
-            <a:solidFill>
-              <a:srgbClr val="0891B2"/>
-            </a:solidFill>
-            <a:prstDash val="solid"/>
-          </a:ln>
-        </p:spPr>
-      </p:sp>
-      <p:sp>
-        <p:nvSpPr>
-          <p:cNvPr id="19" name="Text 16"/>
-          <p:cNvSpPr/>
-          <p:nvPr/>
-        </p:nvSpPr>
-        <p:spPr>
-          <a:xfrm>
-            <a:off x="5463540" y="1600200"/>
-            <a:ext cx="1600200" cy="274320"/>
-          </a:xfrm>
-          <a:prstGeom prst="rect">
-            <a:avLst/>
-          </a:prstGeom>
-          <a:noFill/>
-          <a:ln/>
-        </p:spPr>
-        <p:txBody>
-          <a:bodyPr wrap="square" lIns="0" tIns="0" rIns="0" bIns="0" rtlCol="0" anchor="ctr"/>
-          <a:lstStyle/>
-          <a:p>
-            <a:pPr marL="0" indent="0" algn="ctr">
-              <a:buNone/>
-            </a:pPr>
-            <a:r>
-              <a:rPr lang="en-US" sz="1200" b="1" dirty="0">
-                <a:solidFill>
-                  <a:srgbClr val="FFFFFF"/>
-                </a:solidFill>
-                <a:latin typeface="Calibri" pitchFamily="34" charset="0"/>
-                <a:ea typeface="Calibri" pitchFamily="34" charset="-122"/>
-                <a:cs typeface="Calibri" pitchFamily="34" charset="-120"/>
-              </a:rPr>
-              <a:t>Pooler</a:t>
-            </a:r>
-            <a:endParaRPr lang="en-US" sz="1200" dirty="0"/>
-          </a:p>
-        </p:txBody>
-      </p:sp>
-      <p:sp>
-        <p:nvSpPr>
-          <p:cNvPr id="20" name="Text 17"/>
-          <p:cNvSpPr/>
-          <p:nvPr/>
-        </p:nvSpPr>
-        <p:spPr>
-          <a:xfrm>
-            <a:off x="5463540" y="1856232"/>
-            <a:ext cx="1600200" cy="292608"/>
-          </a:xfrm>
-          <a:prstGeom prst="rect">
-            <a:avLst/>
-          </a:prstGeom>
-          <a:noFill/>
-          <a:ln/>
-        </p:spPr>
-        <p:txBody>
-          <a:bodyPr wrap="square" lIns="0" tIns="0" rIns="0" bIns="0" rtlCol="0" anchor="t"/>
-          <a:lstStyle/>
-          <a:p>
-            <a:pPr marL="0" indent="0" algn="ctr">
-              <a:buNone/>
-            </a:pPr>
-            <a:r>
-              <a:rPr lang="en-US" sz="1200" dirty="0">
-                <a:solidFill>
-                  <a:srgbClr val="FFFFFF"/>
-                </a:solidFill>
-                <a:latin typeface="Calibri" pitchFamily="34" charset="0"/>
-                <a:ea typeface="Calibri" pitchFamily="34" charset="-122"/>
-                <a:cs typeface="Calibri" pitchFamily="34" charset="-120"/>
-              </a:rPr>
-              <a:t>+ classifier head</a:t>
-            </a:r>
-            <a:endParaRPr lang="en-US" sz="1200" dirty="0"/>
-          </a:p>
-        </p:txBody>
-      </p:sp>
-      <p:sp>
-        <p:nvSpPr>
-          <p:cNvPr id="21" name="Shape 18"/>
-          <p:cNvSpPr/>
-          <p:nvPr/>
-        </p:nvSpPr>
-        <p:spPr>
-          <a:xfrm>
-            <a:off x="7155180" y="1554480"/>
-            <a:ext cx="1600200" cy="640080"/>
-          </a:xfrm>
-          <a:prstGeom prst="rect">
-            <a:avLst/>
-          </a:prstGeom>
-          <a:solidFill>
-            <a:srgbClr val="0F1E45"/>
-          </a:solidFill>
-          <a:ln w="12700">
-            <a:solidFill>
-              <a:srgbClr val="0F1E45"/>
-            </a:solidFill>
-            <a:prstDash val="solid"/>
-          </a:ln>
-        </p:spPr>
-      </p:sp>
-      <p:sp>
-        <p:nvSpPr>
-          <p:cNvPr id="22" name="Text 19"/>
-          <p:cNvSpPr/>
-          <p:nvPr/>
-        </p:nvSpPr>
-        <p:spPr>
-          <a:xfrm>
-            <a:off x="7155180" y="1600200"/>
-            <a:ext cx="1600200" cy="274320"/>
-          </a:xfrm>
-          <a:prstGeom prst="rect">
-            <a:avLst/>
-          </a:prstGeom>
-          <a:noFill/>
-          <a:ln/>
-        </p:spPr>
-        <p:txBody>
-          <a:bodyPr wrap="square" lIns="0" tIns="0" rIns="0" bIns="0" rtlCol="0" anchor="ctr"/>
-          <a:lstStyle/>
-          <a:p>
-            <a:pPr marL="0" indent="0" algn="ctr">
-              <a:buNone/>
-            </a:pPr>
-            <a:r>
-              <a:rPr lang="en-US" sz="1200" b="1" dirty="0">
-                <a:solidFill>
-                  <a:srgbClr val="FFFFFF"/>
-                </a:solidFill>
-                <a:latin typeface="Calibri" pitchFamily="34" charset="0"/>
-                <a:ea typeface="Calibri" pitchFamily="34" charset="-122"/>
-                <a:cs typeface="Calibri" pitchFamily="34" charset="-120"/>
-              </a:rPr>
-              <a:t>Reward</a:t>
-            </a:r>
-            <a:endParaRPr lang="en-US" sz="1200" dirty="0"/>
-          </a:p>
-        </p:txBody>
-      </p:sp>
-      <p:sp>
-        <p:nvSpPr>
-          <p:cNvPr id="23" name="Text 20"/>
-          <p:cNvSpPr/>
-          <p:nvPr/>
-        </p:nvSpPr>
-        <p:spPr>
-          <a:xfrm>
-            <a:off x="7155180" y="1856232"/>
-            <a:ext cx="1600200" cy="292608"/>
-          </a:xfrm>
-          <a:prstGeom prst="rect">
-            <a:avLst/>
-          </a:prstGeom>
-          <a:noFill/>
-          <a:ln/>
-        </p:spPr>
-        <p:txBody>
-          <a:bodyPr wrap="square" lIns="0" tIns="0" rIns="0" bIns="0" rtlCol="0" anchor="t"/>
-          <a:lstStyle/>
-          <a:p>
-            <a:pPr marL="0" indent="0" algn="ctr">
-              <a:buNone/>
-            </a:pPr>
-            <a:r>
-              <a:rPr lang="en-US" sz="1200" dirty="0">
-                <a:solidFill>
-                  <a:srgbClr val="FFFFFF"/>
-                </a:solidFill>
-                <a:latin typeface="Calibri" pitchFamily="34" charset="0"/>
-                <a:ea typeface="Calibri" pitchFamily="34" charset="-122"/>
-                <a:cs typeface="Calibri" pitchFamily="34" charset="-120"/>
-              </a:rPr>
-              <a:t>scalar score r(x,y)</a:t>
-            </a:r>
-            <a:endParaRPr lang="en-US" sz="1200" dirty="0"/>
-          </a:p>
-        </p:txBody>
-      </p:sp>
-      <p:graphicFrame>
-        <p:nvGraphicFramePr>
-          <p:cNvPr id="24" name="Table 0"/>
-          <p:cNvGraphicFramePr>
-            <a:graphicFrameLocks noGrp="1"/>
-          </p:cNvGraphicFramePr>
-          <p:nvPr>
-            <p:extLst>
-              <p:ext uri="{D42A27DB-BD31-4B8C-83A1-F6EECF244321}">
-                <p14:modId xmlns:p14="http://schemas.microsoft.com/office/powerpoint/2010/main" val="2866451839"/>
-              </p:ext>
-            </p:extLst>
-          </p:nvPr>
-        </p:nvGraphicFramePr>
-        <p:xfrm>
-          <a:off x="274320" y="2331720"/>
-          <a:ext cx="4206240" cy="2340864"/>
-        </p:xfrm>
-        <a:graphic>
-          <a:graphicData uri="http://schemas.openxmlformats.org/drawingml/2006/table">
-            <a:tbl>
-              <a:tblPr/>
-              <a:tblGrid>
-                <a:gridCol w="1371600">
-                  <a:extLst>
-                    <a:ext uri="{9D8B030D-6E8A-4147-A177-3AD203B41FA5}">
-                      <a16:colId xmlns:a16="http://schemas.microsoft.com/office/drawing/2014/main" val="20000"/>
-                    </a:ext>
-                  </a:extLst>
-                </a:gridCol>
-                <a:gridCol w="2834640">
-                  <a:extLst>
-                    <a:ext uri="{9D8B030D-6E8A-4147-A177-3AD203B41FA5}">
-                      <a16:colId xmlns:a16="http://schemas.microsoft.com/office/drawing/2014/main" val="20001"/>
-                    </a:ext>
-                  </a:extLst>
-                </a:gridCol>
-              </a:tblGrid>
-              <a:tr h="292608">
-                <a:tc gridSpan="2">
-                  <a:txBody>
-                    <a:bodyPr/>
-                    <a:lstStyle/>
-                    <a:p>
-                      <a:pPr marL="0" indent="0" algn="ctr">
-                        <a:buNone/>
-                      </a:pPr>
-                      <a:r>
-                        <a:rPr lang="en-US" sz="1200" b="1" dirty="0">
-                          <a:solidFill>
-                            <a:srgbClr val="FFFFFF"/>
-                          </a:solidFill>
-                          <a:latin typeface="Calibri" pitchFamily="34" charset="0"/>
-                          <a:ea typeface="Calibri" pitchFamily="34" charset="-122"/>
-                          <a:cs typeface="Calibri" pitchFamily="34" charset="-120"/>
-                        </a:rPr>
-                        <a:t>Training Configuration</a:t>
-                      </a:r>
-                      <a:endParaRPr lang="en-US" sz="1200" dirty="0">
-                        <a:latin typeface="Calibri" charset="0"/>
-                        <a:ea typeface="Calibri" charset="0"/>
-                        <a:cs typeface="Calibri" charset="0"/>
-                      </a:endParaRPr>
-                    </a:p>
-                  </a:txBody>
-                  <a:tcPr anchor="ctr">
-                    <a:lnL w="6350" cap="flat" cmpd="sng" algn="ctr">
-                      <a:solidFill>
-                        <a:srgbClr val="CBD5E1"/>
-                      </a:solidFill>
-                      <a:prstDash val="solid"/>
-                      <a:round/>
-                      <a:headEnd type="none" w="med" len="med"/>
-                      <a:tailEnd type="none" w="med" len="med"/>
-                    </a:lnL>
-                    <a:lnR w="6350" cap="flat" cmpd="sng" algn="ctr">
-                      <a:solidFill>
-                        <a:srgbClr val="CBD5E1"/>
-                      </a:solidFill>
-                      <a:prstDash val="solid"/>
-                      <a:round/>
-                      <a:headEnd type="none" w="med" len="med"/>
-                      <a:tailEnd type="none" w="med" len="med"/>
-                    </a:lnR>
-                    <a:lnT w="6350" cap="flat" cmpd="sng" algn="ctr">
-                      <a:solidFill>
-                        <a:srgbClr val="CBD5E1"/>
-                      </a:solidFill>
-                      <a:prstDash val="solid"/>
-                      <a:round/>
-                      <a:headEnd type="none" w="med" len="med"/>
-                      <a:tailEnd type="none" w="med" len="med"/>
-                    </a:lnT>
-                    <a:lnB w="6350" cap="flat" cmpd="sng" algn="ctr">
-                      <a:solidFill>
-                        <a:srgbClr val="CBD5E1"/>
-                      </a:solidFill>
-                      <a:prstDash val="solid"/>
-                      <a:round/>
-                      <a:headEnd type="none" w="med" len="med"/>
-                      <a:tailEnd type="none" w="med" len="med"/>
-                    </a:lnB>
-                    <a:solidFill>
-                      <a:srgbClr val="0F1E45"/>
-                    </a:solidFill>
-                  </a:tcPr>
-                </a:tc>
-                <a:tc hMerge="1">
-                  <a:txBody>
-                    <a:bodyPr/>
-                    <a:lstStyle/>
-                    <a:p>
-                      <a:endParaRPr lang="en-US"/>
-                    </a:p>
-                  </a:txBody>
-                  <a:tcPr/>
-                </a:tc>
-                <a:extLst>
-                  <a:ext uri="{0D108BD9-81ED-4DB2-BD59-A6C34878D82A}">
-                    <a16:rowId xmlns:a16="http://schemas.microsoft.com/office/drawing/2014/main" val="10000"/>
-                  </a:ext>
-                </a:extLst>
-              </a:tr>
-              <a:tr h="292608">
-                <a:tc>
-                  <a:txBody>
-                    <a:bodyPr/>
-                    <a:lstStyle/>
-                    <a:p>
-                      <a:pPr marL="0" indent="0">
-                        <a:buNone/>
-                      </a:pPr>
-                      <a:r>
-                        <a:rPr lang="en-US" sz="1200" b="1" dirty="0">
-                          <a:solidFill>
-                            <a:srgbClr val="1E293B"/>
-                          </a:solidFill>
-                          <a:latin typeface="Calibri" pitchFamily="34" charset="0"/>
-                          <a:ea typeface="Calibri" pitchFamily="34" charset="-122"/>
-                          <a:cs typeface="Calibri" pitchFamily="34" charset="-120"/>
-                        </a:rPr>
-                        <a:t>Base model</a:t>
-                      </a:r>
-                      <a:endParaRPr lang="en-US" sz="1200" dirty="0">
-                        <a:latin typeface="Calibri" charset="0"/>
-                        <a:ea typeface="Calibri" charset="0"/>
-                        <a:cs typeface="Calibri" charset="0"/>
-                      </a:endParaRPr>
-                    </a:p>
-                  </a:txBody>
-                  <a:tcPr anchor="ctr">
-                    <a:lnL w="6350" cap="flat" cmpd="sng" algn="ctr">
-                      <a:solidFill>
-                        <a:srgbClr val="CBD5E1"/>
-                      </a:solidFill>
-                      <a:prstDash val="solid"/>
-                      <a:round/>
-                      <a:headEnd type="none" w="med" len="med"/>
-                      <a:tailEnd type="none" w="med" len="med"/>
-                    </a:lnL>
-                    <a:lnR w="6350" cap="flat" cmpd="sng" algn="ctr">
-                      <a:solidFill>
-                        <a:srgbClr val="CBD5E1"/>
-                      </a:solidFill>
-                      <a:prstDash val="solid"/>
-                      <a:round/>
-                      <a:headEnd type="none" w="med" len="med"/>
-                      <a:tailEnd type="none" w="med" len="med"/>
-                    </a:lnR>
-                    <a:lnT w="6350" cap="flat" cmpd="sng" algn="ctr">
-                      <a:solidFill>
-                        <a:srgbClr val="CBD5E1"/>
-                      </a:solidFill>
-                      <a:prstDash val="solid"/>
-                      <a:round/>
-                      <a:headEnd type="none" w="med" len="med"/>
-                      <a:tailEnd type="none" w="med" len="med"/>
-                    </a:lnT>
-                    <a:lnB w="6350" cap="flat" cmpd="sng" algn="ctr">
-                      <a:solidFill>
-                        <a:srgbClr val="CBD5E1"/>
-                      </a:solidFill>
-                      <a:prstDash val="solid"/>
-                      <a:round/>
-                      <a:headEnd type="none" w="med" len="med"/>
-                      <a:tailEnd type="none" w="med" len="med"/>
-                    </a:lnB>
-                  </a:tcPr>
-                </a:tc>
-                <a:tc>
-                  <a:txBody>
-                    <a:bodyPr/>
-                    <a:lstStyle/>
-                    <a:p>
-                      <a:pPr marL="0" indent="0">
-                        <a:buNone/>
-                      </a:pPr>
-                      <a:r>
-                        <a:rPr lang="en-US" sz="1200" dirty="0">
-                          <a:solidFill>
-                            <a:srgbClr val="1E293B"/>
-                          </a:solidFill>
-                          <a:latin typeface="Calibri" pitchFamily="34" charset="0"/>
-                          <a:ea typeface="Calibri" pitchFamily="34" charset="-122"/>
-                          <a:cs typeface="Calibri" pitchFamily="34" charset="-120"/>
-                        </a:rPr>
-                        <a:t>microsoft/deberta-v3-base (184 M)</a:t>
-                      </a:r>
-                      <a:endParaRPr lang="en-US" sz="1200" dirty="0">
-                        <a:latin typeface="Calibri" charset="0"/>
-                        <a:ea typeface="Calibri" charset="0"/>
-                        <a:cs typeface="Calibri" charset="0"/>
-                      </a:endParaRPr>
-                    </a:p>
-                  </a:txBody>
-                  <a:tcPr anchor="ctr">
-                    <a:lnL w="6350" cap="flat" cmpd="sng" algn="ctr">
-                      <a:solidFill>
-                        <a:srgbClr val="CBD5E1"/>
-                      </a:solidFill>
-                      <a:prstDash val="solid"/>
-                      <a:round/>
-                      <a:headEnd type="none" w="med" len="med"/>
-                      <a:tailEnd type="none" w="med" len="med"/>
-                    </a:lnL>
-                    <a:lnR w="6350" cap="flat" cmpd="sng" algn="ctr">
-                      <a:solidFill>
-                        <a:srgbClr val="CBD5E1"/>
-                      </a:solidFill>
-                      <a:prstDash val="solid"/>
-                      <a:round/>
-                      <a:headEnd type="none" w="med" len="med"/>
-                      <a:tailEnd type="none" w="med" len="med"/>
-                    </a:lnR>
-                    <a:lnT w="6350" cap="flat" cmpd="sng" algn="ctr">
-                      <a:solidFill>
-                        <a:srgbClr val="CBD5E1"/>
-                      </a:solidFill>
-                      <a:prstDash val="solid"/>
-                      <a:round/>
-                      <a:headEnd type="none" w="med" len="med"/>
-                      <a:tailEnd type="none" w="med" len="med"/>
-                    </a:lnT>
-                    <a:lnB w="6350" cap="flat" cmpd="sng" algn="ctr">
-                      <a:solidFill>
-                        <a:srgbClr val="CBD5E1"/>
-                      </a:solidFill>
-                      <a:prstDash val="solid"/>
-                      <a:round/>
-                      <a:headEnd type="none" w="med" len="med"/>
-                      <a:tailEnd type="none" w="med" len="med"/>
-                    </a:lnB>
-                  </a:tcPr>
-                </a:tc>
-                <a:extLst>
-                  <a:ext uri="{0D108BD9-81ED-4DB2-BD59-A6C34878D82A}">
-                    <a16:rowId xmlns:a16="http://schemas.microsoft.com/office/drawing/2014/main" val="10001"/>
-                  </a:ext>
-                </a:extLst>
-              </a:tr>
-              <a:tr h="292608">
-                <a:tc>
-                  <a:txBody>
-                    <a:bodyPr/>
-                    <a:lstStyle/>
-                    <a:p>
-                      <a:pPr marL="0" indent="0">
-                        <a:buNone/>
-                      </a:pPr>
-                      <a:r>
-                        <a:rPr lang="en-US" sz="1200" b="1" dirty="0">
-                          <a:solidFill>
-                            <a:srgbClr val="1E293B"/>
-                          </a:solidFill>
-                          <a:latin typeface="Calibri" pitchFamily="34" charset="0"/>
-                          <a:ea typeface="Calibri" pitchFamily="34" charset="-122"/>
-                          <a:cs typeface="Calibri" pitchFamily="34" charset="-120"/>
-                        </a:rPr>
-                        <a:t>LoRA rank / α</a:t>
-                      </a:r>
-                      <a:endParaRPr lang="en-US" sz="1200" dirty="0">
-                        <a:latin typeface="Calibri" charset="0"/>
-                        <a:ea typeface="Calibri" charset="0"/>
-                        <a:cs typeface="Calibri" charset="0"/>
-                      </a:endParaRPr>
-                    </a:p>
-                  </a:txBody>
-                  <a:tcPr anchor="ctr">
-                    <a:lnL w="6350" cap="flat" cmpd="sng" algn="ctr">
-                      <a:solidFill>
-                        <a:srgbClr val="CBD5E1"/>
-                      </a:solidFill>
-                      <a:prstDash val="solid"/>
-                      <a:round/>
-                      <a:headEnd type="none" w="med" len="med"/>
-                      <a:tailEnd type="none" w="med" len="med"/>
-                    </a:lnL>
-                    <a:lnR w="6350" cap="flat" cmpd="sng" algn="ctr">
-                      <a:solidFill>
-                        <a:srgbClr val="CBD5E1"/>
-                      </a:solidFill>
-                      <a:prstDash val="solid"/>
-                      <a:round/>
-                      <a:headEnd type="none" w="med" len="med"/>
-                      <a:tailEnd type="none" w="med" len="med"/>
-                    </a:lnR>
-                    <a:lnT w="6350" cap="flat" cmpd="sng" algn="ctr">
-                      <a:solidFill>
-                        <a:srgbClr val="CBD5E1"/>
-                      </a:solidFill>
-                      <a:prstDash val="solid"/>
-                      <a:round/>
-                      <a:headEnd type="none" w="med" len="med"/>
-                      <a:tailEnd type="none" w="med" len="med"/>
-                    </a:lnT>
-                    <a:lnB w="6350" cap="flat" cmpd="sng" algn="ctr">
-                      <a:solidFill>
-                        <a:srgbClr val="CBD5E1"/>
-                      </a:solidFill>
-                      <a:prstDash val="solid"/>
-                      <a:round/>
-                      <a:headEnd type="none" w="med" len="med"/>
-                      <a:tailEnd type="none" w="med" len="med"/>
-                    </a:lnB>
-                  </a:tcPr>
-                </a:tc>
-                <a:tc>
-                  <a:txBody>
-                    <a:bodyPr/>
-                    <a:lstStyle/>
-                    <a:p>
-                      <a:pPr marL="0" indent="0">
-                        <a:buNone/>
-                      </a:pPr>
-                      <a:r>
-                        <a:rPr lang="en-US" sz="1200" dirty="0">
-                          <a:solidFill>
-                            <a:srgbClr val="1E293B"/>
-                          </a:solidFill>
-                          <a:latin typeface="Calibri" pitchFamily="34" charset="0"/>
-                          <a:ea typeface="Calibri" pitchFamily="34" charset="-122"/>
-                          <a:cs typeface="Calibri" pitchFamily="34" charset="-120"/>
-                        </a:rPr>
-                        <a:t>r = 32, α = 64 (q/k/v_proj)</a:t>
-                      </a:r>
-                      <a:endParaRPr lang="en-US" sz="1200" dirty="0">
-                        <a:latin typeface="Calibri" charset="0"/>
-                        <a:ea typeface="Calibri" charset="0"/>
-                        <a:cs typeface="Calibri" charset="0"/>
-                      </a:endParaRPr>
-                    </a:p>
-                  </a:txBody>
-                  <a:tcPr anchor="ctr">
-                    <a:lnL w="6350" cap="flat" cmpd="sng" algn="ctr">
-                      <a:solidFill>
-                        <a:srgbClr val="CBD5E1"/>
-                      </a:solidFill>
-                      <a:prstDash val="solid"/>
-                      <a:round/>
-                      <a:headEnd type="none" w="med" len="med"/>
-                      <a:tailEnd type="none" w="med" len="med"/>
-                    </a:lnL>
-                    <a:lnR w="6350" cap="flat" cmpd="sng" algn="ctr">
-                      <a:solidFill>
-                        <a:srgbClr val="CBD5E1"/>
-                      </a:solidFill>
-                      <a:prstDash val="solid"/>
-                      <a:round/>
-                      <a:headEnd type="none" w="med" len="med"/>
-                      <a:tailEnd type="none" w="med" len="med"/>
-                    </a:lnR>
-                    <a:lnT w="6350" cap="flat" cmpd="sng" algn="ctr">
-                      <a:solidFill>
-                        <a:srgbClr val="CBD5E1"/>
-                      </a:solidFill>
-                      <a:prstDash val="solid"/>
-                      <a:round/>
-                      <a:headEnd type="none" w="med" len="med"/>
-                      <a:tailEnd type="none" w="med" len="med"/>
-                    </a:lnT>
-                    <a:lnB w="6350" cap="flat" cmpd="sng" algn="ctr">
-                      <a:solidFill>
-                        <a:srgbClr val="CBD5E1"/>
-                      </a:solidFill>
-                      <a:prstDash val="solid"/>
-                      <a:round/>
-                      <a:headEnd type="none" w="med" len="med"/>
-                      <a:tailEnd type="none" w="med" len="med"/>
-                    </a:lnB>
-                  </a:tcPr>
-                </a:tc>
-                <a:extLst>
-                  <a:ext uri="{0D108BD9-81ED-4DB2-BD59-A6C34878D82A}">
-                    <a16:rowId xmlns:a16="http://schemas.microsoft.com/office/drawing/2014/main" val="10002"/>
-                  </a:ext>
-                </a:extLst>
-              </a:tr>
-              <a:tr h="292608">
-                <a:tc>
-                  <a:txBody>
-                    <a:bodyPr/>
-                    <a:lstStyle/>
-                    <a:p>
-                      <a:pPr marL="0" indent="0">
-                        <a:buNone/>
-                      </a:pPr>
-                      <a:r>
-                        <a:rPr lang="en-US" sz="1200" b="1" dirty="0">
-                          <a:solidFill>
-                            <a:srgbClr val="1E293B"/>
-                          </a:solidFill>
-                          <a:latin typeface="Calibri" pitchFamily="34" charset="0"/>
-                          <a:ea typeface="Calibri" pitchFamily="34" charset="-122"/>
-                          <a:cs typeface="Calibri" pitchFamily="34" charset="-120"/>
-                        </a:rPr>
-                        <a:t>Precision</a:t>
-                      </a:r>
-                      <a:endParaRPr lang="en-US" sz="1200" dirty="0">
-                        <a:latin typeface="Calibri" charset="0"/>
-                        <a:ea typeface="Calibri" charset="0"/>
-                        <a:cs typeface="Calibri" charset="0"/>
-                      </a:endParaRPr>
-                    </a:p>
-                  </a:txBody>
-                  <a:tcPr anchor="ctr">
-                    <a:lnL w="6350" cap="flat" cmpd="sng" algn="ctr">
-                      <a:solidFill>
-                        <a:srgbClr val="CBD5E1"/>
-                      </a:solidFill>
-                      <a:prstDash val="solid"/>
-                      <a:round/>
-                      <a:headEnd type="none" w="med" len="med"/>
-                      <a:tailEnd type="none" w="med" len="med"/>
-                    </a:lnL>
-                    <a:lnR w="6350" cap="flat" cmpd="sng" algn="ctr">
-                      <a:solidFill>
-                        <a:srgbClr val="CBD5E1"/>
-                      </a:solidFill>
-                      <a:prstDash val="solid"/>
-                      <a:round/>
-                      <a:headEnd type="none" w="med" len="med"/>
-                      <a:tailEnd type="none" w="med" len="med"/>
-                    </a:lnR>
-                    <a:lnT w="6350" cap="flat" cmpd="sng" algn="ctr">
-                      <a:solidFill>
-                        <a:srgbClr val="CBD5E1"/>
-                      </a:solidFill>
-                      <a:prstDash val="solid"/>
-                      <a:round/>
-                      <a:headEnd type="none" w="med" len="med"/>
-                      <a:tailEnd type="none" w="med" len="med"/>
-                    </a:lnT>
-                    <a:lnB w="6350" cap="flat" cmpd="sng" algn="ctr">
-                      <a:solidFill>
-                        <a:srgbClr val="CBD5E1"/>
-                      </a:solidFill>
-                      <a:prstDash val="solid"/>
-                      <a:round/>
-                      <a:headEnd type="none" w="med" len="med"/>
-                      <a:tailEnd type="none" w="med" len="med"/>
-                    </a:lnB>
-                  </a:tcPr>
-                </a:tc>
-                <a:tc>
-                  <a:txBody>
-                    <a:bodyPr/>
-                    <a:lstStyle/>
-                    <a:p>
-                      <a:pPr marL="0" indent="0">
-                        <a:buNone/>
-                      </a:pPr>
-                      <a:r>
-                        <a:rPr lang="en-US" sz="1200" dirty="0">
-                          <a:solidFill>
-                            <a:srgbClr val="1E293B"/>
-                          </a:solidFill>
-                          <a:latin typeface="Calibri" pitchFamily="34" charset="0"/>
-                          <a:ea typeface="Calibri" pitchFamily="34" charset="-122"/>
-                          <a:cs typeface="Calibri" pitchFamily="34" charset="-120"/>
-                        </a:rPr>
-                        <a:t>fp32  (DeBERTa fp16 → NaN)</a:t>
-                      </a:r>
-                      <a:endParaRPr lang="en-US" sz="1200" dirty="0">
-                        <a:latin typeface="Calibri" charset="0"/>
-                        <a:ea typeface="Calibri" charset="0"/>
-                        <a:cs typeface="Calibri" charset="0"/>
-                      </a:endParaRPr>
-                    </a:p>
-                  </a:txBody>
-                  <a:tcPr anchor="ctr">
-                    <a:lnL w="6350" cap="flat" cmpd="sng" algn="ctr">
-                      <a:solidFill>
-                        <a:srgbClr val="CBD5E1"/>
-                      </a:solidFill>
-                      <a:prstDash val="solid"/>
-                      <a:round/>
-                      <a:headEnd type="none" w="med" len="med"/>
-                      <a:tailEnd type="none" w="med" len="med"/>
-                    </a:lnL>
-                    <a:lnR w="6350" cap="flat" cmpd="sng" algn="ctr">
-                      <a:solidFill>
-                        <a:srgbClr val="CBD5E1"/>
-                      </a:solidFill>
-                      <a:prstDash val="solid"/>
-                      <a:round/>
-                      <a:headEnd type="none" w="med" len="med"/>
-                      <a:tailEnd type="none" w="med" len="med"/>
-                    </a:lnR>
-                    <a:lnT w="6350" cap="flat" cmpd="sng" algn="ctr">
-                      <a:solidFill>
-                        <a:srgbClr val="CBD5E1"/>
-                      </a:solidFill>
-                      <a:prstDash val="solid"/>
-                      <a:round/>
-                      <a:headEnd type="none" w="med" len="med"/>
-                      <a:tailEnd type="none" w="med" len="med"/>
-                    </a:lnT>
-                    <a:lnB w="6350" cap="flat" cmpd="sng" algn="ctr">
-                      <a:solidFill>
-                        <a:srgbClr val="CBD5E1"/>
-                      </a:solidFill>
-                      <a:prstDash val="solid"/>
-                      <a:round/>
-                      <a:headEnd type="none" w="med" len="med"/>
-                      <a:tailEnd type="none" w="med" len="med"/>
-                    </a:lnB>
-                  </a:tcPr>
-                </a:tc>
-                <a:extLst>
-                  <a:ext uri="{0D108BD9-81ED-4DB2-BD59-A6C34878D82A}">
-                    <a16:rowId xmlns:a16="http://schemas.microsoft.com/office/drawing/2014/main" val="10003"/>
-                  </a:ext>
-                </a:extLst>
-              </a:tr>
-              <a:tr h="292608">
-                <a:tc>
-                  <a:txBody>
-                    <a:bodyPr/>
-                    <a:lstStyle/>
-                    <a:p>
-                      <a:pPr marL="0" indent="0">
-                        <a:buNone/>
-                      </a:pPr>
-                      <a:r>
-                        <a:rPr lang="en-US" sz="1200" b="1" dirty="0">
-                          <a:solidFill>
-                            <a:srgbClr val="1E293B"/>
-                          </a:solidFill>
-                          <a:latin typeface="Calibri" pitchFamily="34" charset="0"/>
-                          <a:ea typeface="Calibri" pitchFamily="34" charset="-122"/>
-                          <a:cs typeface="Calibri" pitchFamily="34" charset="-120"/>
-                        </a:rPr>
-                        <a:t>Loss</a:t>
-                      </a:r>
-                      <a:endParaRPr lang="en-US" sz="1200" dirty="0">
-                        <a:latin typeface="Calibri" charset="0"/>
-                        <a:ea typeface="Calibri" charset="0"/>
-                        <a:cs typeface="Calibri" charset="0"/>
-                      </a:endParaRPr>
-                    </a:p>
-                  </a:txBody>
-                  <a:tcPr anchor="ctr">
-                    <a:lnL w="6350" cap="flat" cmpd="sng" algn="ctr">
-                      <a:solidFill>
-                        <a:srgbClr val="CBD5E1"/>
-                      </a:solidFill>
-                      <a:prstDash val="solid"/>
-                      <a:round/>
-                      <a:headEnd type="none" w="med" len="med"/>
-                      <a:tailEnd type="none" w="med" len="med"/>
-                    </a:lnL>
-                    <a:lnR w="6350" cap="flat" cmpd="sng" algn="ctr">
-                      <a:solidFill>
-                        <a:srgbClr val="CBD5E1"/>
-                      </a:solidFill>
-                      <a:prstDash val="solid"/>
-                      <a:round/>
-                      <a:headEnd type="none" w="med" len="med"/>
-                      <a:tailEnd type="none" w="med" len="med"/>
-                    </a:lnR>
-                    <a:lnT w="6350" cap="flat" cmpd="sng" algn="ctr">
-                      <a:solidFill>
-                        <a:srgbClr val="CBD5E1"/>
-                      </a:solidFill>
-                      <a:prstDash val="solid"/>
-                      <a:round/>
-                      <a:headEnd type="none" w="med" len="med"/>
-                      <a:tailEnd type="none" w="med" len="med"/>
-                    </a:lnT>
-                    <a:lnB w="6350" cap="flat" cmpd="sng" algn="ctr">
-                      <a:solidFill>
-                        <a:srgbClr val="CBD5E1"/>
-                      </a:solidFill>
-                      <a:prstDash val="solid"/>
-                      <a:round/>
-                      <a:headEnd type="none" w="med" len="med"/>
-                      <a:tailEnd type="none" w="med" len="med"/>
-                    </a:lnB>
-                  </a:tcPr>
-                </a:tc>
-                <a:tc>
-                  <a:txBody>
-                    <a:bodyPr/>
-                    <a:lstStyle/>
-                    <a:p>
-                      <a:pPr marL="0" indent="0">
-                        <a:buNone/>
-                      </a:pPr>
-                      <a:r>
-                        <a:rPr lang="en-US" sz="1200" dirty="0">
-                          <a:solidFill>
-                            <a:srgbClr val="1E293B"/>
-                          </a:solidFill>
-                          <a:latin typeface="Calibri" pitchFamily="34" charset="0"/>
-                          <a:ea typeface="Calibri" pitchFamily="34" charset="-122"/>
-                          <a:cs typeface="Calibri" pitchFamily="34" charset="-120"/>
-                        </a:rPr>
-                        <a:t>Bradley-Terry pairwise</a:t>
-                      </a:r>
-                      <a:endParaRPr lang="en-US" sz="1200" dirty="0">
-                        <a:latin typeface="Calibri" charset="0"/>
-                        <a:ea typeface="Calibri" charset="0"/>
-                        <a:cs typeface="Calibri" charset="0"/>
-                      </a:endParaRPr>
-                    </a:p>
-                  </a:txBody>
-                  <a:tcPr anchor="ctr">
-                    <a:lnL w="6350" cap="flat" cmpd="sng" algn="ctr">
-                      <a:solidFill>
-                        <a:srgbClr val="CBD5E1"/>
-                      </a:solidFill>
-                      <a:prstDash val="solid"/>
-                      <a:round/>
-                      <a:headEnd type="none" w="med" len="med"/>
-                      <a:tailEnd type="none" w="med" len="med"/>
-                    </a:lnL>
-                    <a:lnR w="6350" cap="flat" cmpd="sng" algn="ctr">
-                      <a:solidFill>
-                        <a:srgbClr val="CBD5E1"/>
-                      </a:solidFill>
-                      <a:prstDash val="solid"/>
-                      <a:round/>
-                      <a:headEnd type="none" w="med" len="med"/>
-                      <a:tailEnd type="none" w="med" len="med"/>
-                    </a:lnR>
-                    <a:lnT w="6350" cap="flat" cmpd="sng" algn="ctr">
-                      <a:solidFill>
-                        <a:srgbClr val="CBD5E1"/>
-                      </a:solidFill>
-                      <a:prstDash val="solid"/>
-                      <a:round/>
-                      <a:headEnd type="none" w="med" len="med"/>
-                      <a:tailEnd type="none" w="med" len="med"/>
-                    </a:lnT>
-                    <a:lnB w="6350" cap="flat" cmpd="sng" algn="ctr">
-                      <a:solidFill>
-                        <a:srgbClr val="CBD5E1"/>
-                      </a:solidFill>
-                      <a:prstDash val="solid"/>
-                      <a:round/>
-                      <a:headEnd type="none" w="med" len="med"/>
-                      <a:tailEnd type="none" w="med" len="med"/>
-                    </a:lnB>
-                  </a:tcPr>
-                </a:tc>
-                <a:extLst>
-                  <a:ext uri="{0D108BD9-81ED-4DB2-BD59-A6C34878D82A}">
-                    <a16:rowId xmlns:a16="http://schemas.microsoft.com/office/drawing/2014/main" val="10004"/>
-                  </a:ext>
-                </a:extLst>
-              </a:tr>
-              <a:tr h="292608">
-                <a:tc>
-                  <a:txBody>
-                    <a:bodyPr/>
-                    <a:lstStyle/>
-                    <a:p>
-                      <a:pPr marL="0" indent="0">
-                        <a:buNone/>
-                      </a:pPr>
-                      <a:r>
-                        <a:rPr lang="en-US" sz="1200" b="1" dirty="0">
-                          <a:solidFill>
-                            <a:srgbClr val="1E293B"/>
-                          </a:solidFill>
-                          <a:latin typeface="Calibri" pitchFamily="34" charset="0"/>
-                          <a:ea typeface="Calibri" pitchFamily="34" charset="-122"/>
-                          <a:cs typeface="Calibri" pitchFamily="34" charset="-120"/>
-                        </a:rPr>
-                        <a:t>Learning rate</a:t>
-                      </a:r>
-                      <a:endParaRPr lang="en-US" sz="1200" dirty="0">
-                        <a:latin typeface="Calibri" charset="0"/>
-                        <a:ea typeface="Calibri" charset="0"/>
-                        <a:cs typeface="Calibri" charset="0"/>
-                      </a:endParaRPr>
-                    </a:p>
-                  </a:txBody>
-                  <a:tcPr anchor="ctr">
-                    <a:lnL w="6350" cap="flat" cmpd="sng" algn="ctr">
-                      <a:solidFill>
-                        <a:srgbClr val="CBD5E1"/>
-                      </a:solidFill>
-                      <a:prstDash val="solid"/>
-                      <a:round/>
-                      <a:headEnd type="none" w="med" len="med"/>
-                      <a:tailEnd type="none" w="med" len="med"/>
-                    </a:lnL>
-                    <a:lnR w="6350" cap="flat" cmpd="sng" algn="ctr">
-                      <a:solidFill>
-                        <a:srgbClr val="CBD5E1"/>
-                      </a:solidFill>
-                      <a:prstDash val="solid"/>
-                      <a:round/>
-                      <a:headEnd type="none" w="med" len="med"/>
-                      <a:tailEnd type="none" w="med" len="med"/>
-                    </a:lnR>
-                    <a:lnT w="6350" cap="flat" cmpd="sng" algn="ctr">
-                      <a:solidFill>
-                        <a:srgbClr val="CBD5E1"/>
-                      </a:solidFill>
-                      <a:prstDash val="solid"/>
-                      <a:round/>
-                      <a:headEnd type="none" w="med" len="med"/>
-                      <a:tailEnd type="none" w="med" len="med"/>
-                    </a:lnT>
-                    <a:lnB w="6350" cap="flat" cmpd="sng" algn="ctr">
-                      <a:solidFill>
-                        <a:srgbClr val="CBD5E1"/>
-                      </a:solidFill>
-                      <a:prstDash val="solid"/>
-                      <a:round/>
-                      <a:headEnd type="none" w="med" len="med"/>
-                      <a:tailEnd type="none" w="med" len="med"/>
-                    </a:lnB>
-                  </a:tcPr>
-                </a:tc>
-                <a:tc>
-                  <a:txBody>
-                    <a:bodyPr/>
-                    <a:lstStyle/>
-                    <a:p>
-                      <a:pPr marL="0" indent="0">
-                        <a:buNone/>
-                      </a:pPr>
-                      <a:r>
-                        <a:rPr lang="en-US" sz="1200" dirty="0">
-                          <a:solidFill>
-                            <a:srgbClr val="1E293B"/>
-                          </a:solidFill>
-                          <a:latin typeface="Calibri" pitchFamily="34" charset="0"/>
-                          <a:ea typeface="Calibri" pitchFamily="34" charset="-122"/>
-                          <a:cs typeface="Calibri" pitchFamily="34" charset="-120"/>
-                        </a:rPr>
-                        <a:t>2 × 10⁻⁵  (cosine warmup)</a:t>
-                      </a:r>
-                      <a:endParaRPr lang="en-US" sz="1200" dirty="0">
-                        <a:latin typeface="Calibri" charset="0"/>
-                        <a:ea typeface="Calibri" charset="0"/>
-                        <a:cs typeface="Calibri" charset="0"/>
-                      </a:endParaRPr>
-                    </a:p>
-                  </a:txBody>
-                  <a:tcPr anchor="ctr">
-                    <a:lnL w="6350" cap="flat" cmpd="sng" algn="ctr">
-                      <a:solidFill>
-                        <a:srgbClr val="CBD5E1"/>
-                      </a:solidFill>
-                      <a:prstDash val="solid"/>
-                      <a:round/>
-                      <a:headEnd type="none" w="med" len="med"/>
-                      <a:tailEnd type="none" w="med" len="med"/>
-                    </a:lnL>
-                    <a:lnR w="6350" cap="flat" cmpd="sng" algn="ctr">
-                      <a:solidFill>
-                        <a:srgbClr val="CBD5E1"/>
-                      </a:solidFill>
-                      <a:prstDash val="solid"/>
-                      <a:round/>
-                      <a:headEnd type="none" w="med" len="med"/>
-                      <a:tailEnd type="none" w="med" len="med"/>
-                    </a:lnR>
-                    <a:lnT w="6350" cap="flat" cmpd="sng" algn="ctr">
-                      <a:solidFill>
-                        <a:srgbClr val="CBD5E1"/>
-                      </a:solidFill>
-                      <a:prstDash val="solid"/>
-                      <a:round/>
-                      <a:headEnd type="none" w="med" len="med"/>
-                      <a:tailEnd type="none" w="med" len="med"/>
-                    </a:lnT>
-                    <a:lnB w="6350" cap="flat" cmpd="sng" algn="ctr">
-                      <a:solidFill>
-                        <a:srgbClr val="CBD5E1"/>
-                      </a:solidFill>
-                      <a:prstDash val="solid"/>
-                      <a:round/>
-                      <a:headEnd type="none" w="med" len="med"/>
-                      <a:tailEnd type="none" w="med" len="med"/>
-                    </a:lnB>
-                  </a:tcPr>
-                </a:tc>
-                <a:extLst>
-                  <a:ext uri="{0D108BD9-81ED-4DB2-BD59-A6C34878D82A}">
-                    <a16:rowId xmlns:a16="http://schemas.microsoft.com/office/drawing/2014/main" val="10005"/>
-                  </a:ext>
-                </a:extLst>
-              </a:tr>
-              <a:tr h="292608">
-                <a:tc>
-                  <a:txBody>
-                    <a:bodyPr/>
-                    <a:lstStyle/>
-                    <a:p>
-                      <a:pPr marL="0" indent="0">
-                        <a:buNone/>
-                      </a:pPr>
-                      <a:r>
-                        <a:rPr lang="en-US" sz="1200" b="1" dirty="0">
-                          <a:solidFill>
-                            <a:srgbClr val="1E293B"/>
-                          </a:solidFill>
-                          <a:latin typeface="Calibri" pitchFamily="34" charset="0"/>
-                          <a:ea typeface="Calibri" pitchFamily="34" charset="-122"/>
-                          <a:cs typeface="Calibri" pitchFamily="34" charset="-120"/>
-                        </a:rPr>
-                        <a:t>Batch / Epochs</a:t>
-                      </a:r>
-                      <a:endParaRPr lang="en-US" sz="1200" dirty="0">
-                        <a:latin typeface="Calibri" charset="0"/>
-                        <a:ea typeface="Calibri" charset="0"/>
-                        <a:cs typeface="Calibri" charset="0"/>
-                      </a:endParaRPr>
-                    </a:p>
-                  </a:txBody>
-                  <a:tcPr anchor="ctr">
-                    <a:lnL w="6350" cap="flat" cmpd="sng" algn="ctr">
-                      <a:solidFill>
-                        <a:srgbClr val="CBD5E1"/>
-                      </a:solidFill>
-                      <a:prstDash val="solid"/>
-                      <a:round/>
-                      <a:headEnd type="none" w="med" len="med"/>
-                      <a:tailEnd type="none" w="med" len="med"/>
-                    </a:lnL>
-                    <a:lnR w="6350" cap="flat" cmpd="sng" algn="ctr">
-                      <a:solidFill>
-                        <a:srgbClr val="CBD5E1"/>
-                      </a:solidFill>
-                      <a:prstDash val="solid"/>
-                      <a:round/>
-                      <a:headEnd type="none" w="med" len="med"/>
-                      <a:tailEnd type="none" w="med" len="med"/>
-                    </a:lnR>
-                    <a:lnT w="6350" cap="flat" cmpd="sng" algn="ctr">
-                      <a:solidFill>
-                        <a:srgbClr val="CBD5E1"/>
-                      </a:solidFill>
-                      <a:prstDash val="solid"/>
-                      <a:round/>
-                      <a:headEnd type="none" w="med" len="med"/>
-                      <a:tailEnd type="none" w="med" len="med"/>
-                    </a:lnT>
-                    <a:lnB w="6350" cap="flat" cmpd="sng" algn="ctr">
-                      <a:solidFill>
-                        <a:srgbClr val="CBD5E1"/>
-                      </a:solidFill>
-                      <a:prstDash val="solid"/>
-                      <a:round/>
-                      <a:headEnd type="none" w="med" len="med"/>
-                      <a:tailEnd type="none" w="med" len="med"/>
-                    </a:lnB>
-                  </a:tcPr>
-                </a:tc>
-                <a:tc>
-                  <a:txBody>
-                    <a:bodyPr/>
-                    <a:lstStyle/>
-                    <a:p>
-                      <a:pPr marL="0" indent="0">
-                        <a:buNone/>
-                      </a:pPr>
-                      <a:r>
-                        <a:rPr lang="en-US" sz="1200" dirty="0">
-                          <a:solidFill>
-                            <a:srgbClr val="1E293B"/>
-                          </a:solidFill>
-                          <a:latin typeface="Calibri" pitchFamily="34" charset="0"/>
-                          <a:ea typeface="Calibri" pitchFamily="34" charset="-122"/>
-                          <a:cs typeface="Calibri" pitchFamily="34" charset="-120"/>
-                        </a:rPr>
-                        <a:t>8  ×  2 epochs</a:t>
-                      </a:r>
-                      <a:endParaRPr lang="en-US" sz="1200" dirty="0">
-                        <a:latin typeface="Calibri" charset="0"/>
-                        <a:ea typeface="Calibri" charset="0"/>
-                        <a:cs typeface="Calibri" charset="0"/>
-                      </a:endParaRPr>
-                    </a:p>
-                  </a:txBody>
-                  <a:tcPr anchor="ctr">
-                    <a:lnL w="6350" cap="flat" cmpd="sng" algn="ctr">
-                      <a:solidFill>
-                        <a:srgbClr val="CBD5E1"/>
-                      </a:solidFill>
-                      <a:prstDash val="solid"/>
-                      <a:round/>
-                      <a:headEnd type="none" w="med" len="med"/>
-                      <a:tailEnd type="none" w="med" len="med"/>
-                    </a:lnL>
-                    <a:lnR w="6350" cap="flat" cmpd="sng" algn="ctr">
-                      <a:solidFill>
-                        <a:srgbClr val="CBD5E1"/>
-                      </a:solidFill>
-                      <a:prstDash val="solid"/>
-                      <a:round/>
-                      <a:headEnd type="none" w="med" len="med"/>
-                      <a:tailEnd type="none" w="med" len="med"/>
-                    </a:lnR>
-                    <a:lnT w="6350" cap="flat" cmpd="sng" algn="ctr">
-                      <a:solidFill>
-                        <a:srgbClr val="CBD5E1"/>
-                      </a:solidFill>
-                      <a:prstDash val="solid"/>
-                      <a:round/>
-                      <a:headEnd type="none" w="med" len="med"/>
-                      <a:tailEnd type="none" w="med" len="med"/>
-                    </a:lnT>
-                    <a:lnB w="6350" cap="flat" cmpd="sng" algn="ctr">
-                      <a:solidFill>
-                        <a:srgbClr val="CBD5E1"/>
-                      </a:solidFill>
-                      <a:prstDash val="solid"/>
-                      <a:round/>
-                      <a:headEnd type="none" w="med" len="med"/>
-                      <a:tailEnd type="none" w="med" len="med"/>
-                    </a:lnB>
-                  </a:tcPr>
-                </a:tc>
-                <a:extLst>
-                  <a:ext uri="{0D108BD9-81ED-4DB2-BD59-A6C34878D82A}">
-                    <a16:rowId xmlns:a16="http://schemas.microsoft.com/office/drawing/2014/main" val="10006"/>
-                  </a:ext>
-                </a:extLst>
-              </a:tr>
-              <a:tr h="292608">
-                <a:tc>
-                  <a:txBody>
-                    <a:bodyPr/>
-                    <a:lstStyle/>
-                    <a:p>
-                      <a:pPr marL="0" indent="0">
-                        <a:buNone/>
-                      </a:pPr>
-                      <a:r>
-                        <a:rPr lang="en-US" sz="1200" b="1" dirty="0">
-                          <a:solidFill>
-                            <a:srgbClr val="1E293B"/>
-                          </a:solidFill>
-                          <a:latin typeface="Calibri" pitchFamily="34" charset="0"/>
-                          <a:ea typeface="Calibri" pitchFamily="34" charset="-122"/>
-                          <a:cs typeface="Calibri" pitchFamily="34" charset="-120"/>
-                        </a:rPr>
-                        <a:t>Trainable</a:t>
-                      </a:r>
-                      <a:endParaRPr lang="en-US" sz="1200" dirty="0">
-                        <a:latin typeface="Calibri" charset="0"/>
-                        <a:ea typeface="Calibri" charset="0"/>
-                        <a:cs typeface="Calibri" charset="0"/>
-                      </a:endParaRPr>
-                    </a:p>
-                  </a:txBody>
-                  <a:tcPr anchor="ctr">
-                    <a:lnL w="6350" cap="flat" cmpd="sng" algn="ctr">
-                      <a:solidFill>
-                        <a:srgbClr val="CBD5E1"/>
-                      </a:solidFill>
-                      <a:prstDash val="solid"/>
-                      <a:round/>
-                      <a:headEnd type="none" w="med" len="med"/>
-                      <a:tailEnd type="none" w="med" len="med"/>
-                    </a:lnL>
-                    <a:lnR w="6350" cap="flat" cmpd="sng" algn="ctr">
-                      <a:solidFill>
-                        <a:srgbClr val="CBD5E1"/>
-                      </a:solidFill>
-                      <a:prstDash val="solid"/>
-                      <a:round/>
-                      <a:headEnd type="none" w="med" len="med"/>
-                      <a:tailEnd type="none" w="med" len="med"/>
-                    </a:lnR>
-                    <a:lnT w="6350" cap="flat" cmpd="sng" algn="ctr">
-                      <a:solidFill>
-                        <a:srgbClr val="CBD5E1"/>
-                      </a:solidFill>
-                      <a:prstDash val="solid"/>
-                      <a:round/>
-                      <a:headEnd type="none" w="med" len="med"/>
-                      <a:tailEnd type="none" w="med" len="med"/>
-                    </a:lnT>
-                    <a:lnB w="6350" cap="flat" cmpd="sng" algn="ctr">
-                      <a:solidFill>
-                        <a:srgbClr val="CBD5E1"/>
-                      </a:solidFill>
-                      <a:prstDash val="solid"/>
-                      <a:round/>
-                      <a:headEnd type="none" w="med" len="med"/>
-                      <a:tailEnd type="none" w="med" len="med"/>
-                    </a:lnB>
-                  </a:tcPr>
-                </a:tc>
-                <a:tc>
-                  <a:txBody>
-                    <a:bodyPr/>
-                    <a:lstStyle/>
-                    <a:p>
-                      <a:pPr marL="0" indent="0">
-                        <a:buNone/>
-                      </a:pPr>
-                      <a:r>
-                        <a:rPr lang="en-US" sz="1200" dirty="0">
-                          <a:solidFill>
-                            <a:srgbClr val="1E293B"/>
-                          </a:solidFill>
-                          <a:latin typeface="Calibri" pitchFamily="34" charset="0"/>
-                          <a:ea typeface="Calibri" pitchFamily="34" charset="-122"/>
-                          <a:cs typeface="Calibri" pitchFamily="34" charset="-120"/>
-                        </a:rPr>
-                        <a:t>~1.8 M / 184 M (≈ 1 %)</a:t>
-                      </a:r>
-                      <a:endParaRPr lang="en-US" sz="1200" dirty="0">
-                        <a:latin typeface="Calibri" charset="0"/>
-                        <a:ea typeface="Calibri" charset="0"/>
-                        <a:cs typeface="Calibri" charset="0"/>
-                      </a:endParaRPr>
-                    </a:p>
-                  </a:txBody>
-                  <a:tcPr anchor="ctr">
-                    <a:lnL w="6350" cap="flat" cmpd="sng" algn="ctr">
-                      <a:solidFill>
-                        <a:srgbClr val="CBD5E1"/>
-                      </a:solidFill>
-                      <a:prstDash val="solid"/>
-                      <a:round/>
-                      <a:headEnd type="none" w="med" len="med"/>
-                      <a:tailEnd type="none" w="med" len="med"/>
-                    </a:lnL>
-                    <a:lnR w="6350" cap="flat" cmpd="sng" algn="ctr">
-                      <a:solidFill>
-                        <a:srgbClr val="CBD5E1"/>
-                      </a:solidFill>
-                      <a:prstDash val="solid"/>
-                      <a:round/>
-                      <a:headEnd type="none" w="med" len="med"/>
-                      <a:tailEnd type="none" w="med" len="med"/>
-                    </a:lnR>
-                    <a:lnT w="6350" cap="flat" cmpd="sng" algn="ctr">
-                      <a:solidFill>
-                        <a:srgbClr val="CBD5E1"/>
-                      </a:solidFill>
-                      <a:prstDash val="solid"/>
-                      <a:round/>
-                      <a:headEnd type="none" w="med" len="med"/>
-                      <a:tailEnd type="none" w="med" len="med"/>
-                    </a:lnT>
-                    <a:lnB w="6350" cap="flat" cmpd="sng" algn="ctr">
-                      <a:solidFill>
-                        <a:srgbClr val="CBD5E1"/>
-                      </a:solidFill>
-                      <a:prstDash val="solid"/>
-                      <a:round/>
-                      <a:headEnd type="none" w="med" len="med"/>
-                      <a:tailEnd type="none" w="med" len="med"/>
-                    </a:lnB>
-                  </a:tcPr>
-                </a:tc>
-                <a:extLst>
-                  <a:ext uri="{0D108BD9-81ED-4DB2-BD59-A6C34878D82A}">
-                    <a16:rowId xmlns:a16="http://schemas.microsoft.com/office/drawing/2014/main" val="10007"/>
-                  </a:ext>
-                </a:extLst>
-              </a:tr>
-            </a:tbl>
-          </a:graphicData>
-        </a:graphic>
-      </p:graphicFrame>
-      <p:sp>
-        <p:nvSpPr>
-          <p:cNvPr id="25" name="Text 21"/>
-          <p:cNvSpPr/>
-          <p:nvPr/>
-        </p:nvSpPr>
-        <p:spPr>
-          <a:xfrm>
-            <a:off x="4663440" y="2331720"/>
-            <a:ext cx="4206240" cy="274320"/>
-          </a:xfrm>
-          <a:prstGeom prst="rect">
-            <a:avLst/>
-          </a:prstGeom>
-          <a:noFill/>
-          <a:ln/>
-        </p:spPr>
-        <p:txBody>
-          <a:bodyPr wrap="square" lIns="0" tIns="0" rIns="0" bIns="0" rtlCol="0" anchor="ctr"/>
-          <a:lstStyle/>
-          <a:p>
-            <a:pPr marL="0" indent="0">
-              <a:buNone/>
-            </a:pPr>
-            <a:r>
-              <a:rPr lang="en-US" sz="1200" b="1" dirty="0">
-                <a:solidFill>
-                  <a:srgbClr val="1E293B"/>
-                </a:solidFill>
-                <a:latin typeface="Calibri" pitchFamily="34" charset="0"/>
-                <a:ea typeface="Calibri" pitchFamily="34" charset="-122"/>
-                <a:cs typeface="Calibri" pitchFamily="34" charset="-120"/>
-              </a:rPr>
-              <a:t>Bradley-Terry Loss</a:t>
-            </a:r>
-            <a:endParaRPr lang="en-US" sz="1200" dirty="0"/>
-          </a:p>
-        </p:txBody>
-      </p:sp>
-      <p:sp>
-        <p:nvSpPr>
-          <p:cNvPr id="26" name="Shape 22"/>
-          <p:cNvSpPr/>
-          <p:nvPr/>
-        </p:nvSpPr>
-        <p:spPr>
-          <a:xfrm>
-            <a:off x="4663440" y="2633472"/>
-            <a:ext cx="4206240" cy="548640"/>
-          </a:xfrm>
-          <a:prstGeom prst="rect">
-            <a:avLst/>
-          </a:prstGeom>
-          <a:solidFill>
-            <a:srgbClr val="F1F5F9"/>
-          </a:solidFill>
-          <a:ln w="9525">
-            <a:solidFill>
-              <a:srgbClr val="E2E8F0"/>
-            </a:solidFill>
-            <a:prstDash val="solid"/>
-          </a:ln>
-        </p:spPr>
-      </p:sp>
-      <p:sp>
-        <p:nvSpPr>
-          <p:cNvPr id="27" name="Text 23"/>
-          <p:cNvSpPr/>
-          <p:nvPr/>
-        </p:nvSpPr>
-        <p:spPr>
-          <a:xfrm>
-            <a:off x="4709160" y="2624328"/>
-            <a:ext cx="4069080" cy="548640"/>
-          </a:xfrm>
-          <a:prstGeom prst="rect">
-            <a:avLst/>
-          </a:prstGeom>
-          <a:noFill/>
-          <a:ln/>
-        </p:spPr>
-        <p:txBody>
-          <a:bodyPr wrap="square" lIns="0" tIns="0" rIns="0" bIns="0" rtlCol="0" anchor="ctr"/>
-          <a:lstStyle/>
-          <a:p>
-            <a:pPr marL="0" indent="0" algn="ctr">
-              <a:buNone/>
-            </a:pPr>
-            <a:r>
-              <a:rPr lang="en-US" sz="1200" b="1" i="1" dirty="0">
-                <a:solidFill>
-                  <a:srgbClr val="1E293B"/>
-                </a:solidFill>
-                <a:latin typeface="Cambria" pitchFamily="34" charset="0"/>
-                <a:ea typeface="Cambria" pitchFamily="34" charset="-122"/>
-                <a:cs typeface="Cambria" pitchFamily="34" charset="-120"/>
-              </a:rPr>
-              <a:t>L</a:t>
-            </a:r>
-            <a:r>
-              <a:rPr lang="en-US" sz="1200" b="1" baseline="-40000" dirty="0">
-                <a:solidFill>
-                  <a:srgbClr val="1E293B"/>
-                </a:solidFill>
-                <a:latin typeface="Cambria" pitchFamily="34" charset="0"/>
-                <a:ea typeface="Cambria" pitchFamily="34" charset="-122"/>
-                <a:cs typeface="Cambria" pitchFamily="34" charset="-120"/>
-              </a:rPr>
-              <a:t>RM</a:t>
-            </a:r>
-            <a:r>
-              <a:rPr lang="en-US" sz="1200" dirty="0">
-                <a:solidFill>
-                  <a:srgbClr val="1E293B"/>
-                </a:solidFill>
-                <a:latin typeface="Cambria" pitchFamily="34" charset="0"/>
-                <a:ea typeface="Cambria" pitchFamily="34" charset="-122"/>
-                <a:cs typeface="Cambria" pitchFamily="34" charset="-120"/>
-              </a:rPr>
-              <a:t>  =  −E [ log σ ( r</a:t>
-            </a:r>
-            <a:r>
-              <a:rPr lang="en-US" sz="1200" i="1" baseline="-40000" dirty="0">
-                <a:solidFill>
-                  <a:srgbClr val="1E293B"/>
-                </a:solidFill>
-                <a:latin typeface="Cambria" pitchFamily="34" charset="0"/>
-                <a:ea typeface="Cambria" pitchFamily="34" charset="-122"/>
-                <a:cs typeface="Cambria" pitchFamily="34" charset="-120"/>
-              </a:rPr>
-              <a:t>θ</a:t>
-            </a:r>
-            <a:r>
-              <a:rPr lang="en-US" sz="1200" dirty="0">
-                <a:solidFill>
-                  <a:srgbClr val="1E293B"/>
-                </a:solidFill>
-                <a:latin typeface="Cambria" pitchFamily="34" charset="0"/>
-                <a:ea typeface="Cambria" pitchFamily="34" charset="-122"/>
-                <a:cs typeface="Cambria" pitchFamily="34" charset="-120"/>
-              </a:rPr>
-              <a:t>(x, y</a:t>
-            </a:r>
-            <a:r>
-              <a:rPr lang="en-US" sz="1200" i="1" baseline="-40000" dirty="0">
-                <a:solidFill>
-                  <a:srgbClr val="1E293B"/>
-                </a:solidFill>
-                <a:latin typeface="Cambria" pitchFamily="34" charset="0"/>
-                <a:ea typeface="Cambria" pitchFamily="34" charset="-122"/>
-                <a:cs typeface="Cambria" pitchFamily="34" charset="-120"/>
-              </a:rPr>
-              <a:t>c</a:t>
-            </a:r>
-            <a:r>
-              <a:rPr lang="en-US" sz="1200" dirty="0">
-                <a:solidFill>
-                  <a:srgbClr val="1E293B"/>
-                </a:solidFill>
-                <a:latin typeface="Cambria" pitchFamily="34" charset="0"/>
-                <a:ea typeface="Cambria" pitchFamily="34" charset="-122"/>
-                <a:cs typeface="Cambria" pitchFamily="34" charset="-120"/>
-              </a:rPr>
-              <a:t>) − r</a:t>
-            </a:r>
-            <a:r>
-              <a:rPr lang="en-US" sz="1200" i="1" baseline="-40000" dirty="0">
-                <a:solidFill>
-                  <a:srgbClr val="1E293B"/>
-                </a:solidFill>
-                <a:latin typeface="Cambria" pitchFamily="34" charset="0"/>
-                <a:ea typeface="Cambria" pitchFamily="34" charset="-122"/>
-                <a:cs typeface="Cambria" pitchFamily="34" charset="-120"/>
-              </a:rPr>
-              <a:t>θ</a:t>
-            </a:r>
-            <a:r>
-              <a:rPr lang="en-US" sz="1200" dirty="0">
-                <a:solidFill>
-                  <a:srgbClr val="1E293B"/>
-                </a:solidFill>
-                <a:latin typeface="Cambria" pitchFamily="34" charset="0"/>
-                <a:ea typeface="Cambria" pitchFamily="34" charset="-122"/>
-                <a:cs typeface="Cambria" pitchFamily="34" charset="-120"/>
-              </a:rPr>
-              <a:t>(x, y</a:t>
-            </a:r>
-            <a:r>
-              <a:rPr lang="en-US" sz="1200" i="1" baseline="-40000" dirty="0">
-                <a:solidFill>
-                  <a:srgbClr val="1E293B"/>
-                </a:solidFill>
-                <a:latin typeface="Cambria" pitchFamily="34" charset="0"/>
-                <a:ea typeface="Cambria" pitchFamily="34" charset="-122"/>
-                <a:cs typeface="Cambria" pitchFamily="34" charset="-120"/>
-              </a:rPr>
-              <a:t>r</a:t>
-            </a:r>
-            <a:r>
-              <a:rPr lang="en-US" sz="1200" dirty="0">
-                <a:solidFill>
-                  <a:srgbClr val="1E293B"/>
-                </a:solidFill>
-                <a:latin typeface="Cambria" pitchFamily="34" charset="0"/>
-                <a:ea typeface="Cambria" pitchFamily="34" charset="-122"/>
-                <a:cs typeface="Cambria" pitchFamily="34" charset="-120"/>
-              </a:rPr>
-              <a:t>) ) ]</a:t>
-            </a:r>
-            <a:endParaRPr lang="en-US" sz="1200" dirty="0"/>
-          </a:p>
-        </p:txBody>
-      </p:sp>
-      <p:sp>
-        <p:nvSpPr>
-          <p:cNvPr id="28" name="Text 24"/>
-          <p:cNvSpPr/>
-          <p:nvPr/>
-        </p:nvSpPr>
-        <p:spPr>
-          <a:xfrm>
-            <a:off x="4663440" y="3218688"/>
-            <a:ext cx="4206240" cy="283464"/>
-          </a:xfrm>
-          <a:prstGeom prst="rect">
-            <a:avLst/>
-          </a:prstGeom>
-          <a:noFill/>
-          <a:ln/>
-        </p:spPr>
-        <p:txBody>
-          <a:bodyPr wrap="square" lIns="0" tIns="0" rIns="0" bIns="0" rtlCol="0" anchor="ctr"/>
-          <a:lstStyle/>
-          <a:p>
-            <a:pPr marL="0" indent="0">
-              <a:buNone/>
-            </a:pPr>
-            <a:r>
-              <a:rPr lang="en-US" sz="1200" b="1" dirty="0">
-                <a:solidFill>
-                  <a:srgbClr val="1E293B"/>
-                </a:solidFill>
-                <a:latin typeface="Calibri" pitchFamily="34" charset="0"/>
-                <a:ea typeface="Calibri" pitchFamily="34" charset="-122"/>
-                <a:cs typeface="Calibri" pitchFamily="34" charset="-120"/>
-              </a:rPr>
-              <a:t>Design Rationale</a:t>
-            </a:r>
-            <a:endParaRPr lang="en-US" sz="1200" dirty="0"/>
-          </a:p>
-        </p:txBody>
-      </p:sp>
-      <p:sp>
-        <p:nvSpPr>
-          <p:cNvPr id="29" name="Shape 25"/>
-          <p:cNvSpPr/>
-          <p:nvPr/>
-        </p:nvSpPr>
-        <p:spPr>
-          <a:xfrm>
-            <a:off x="4709160" y="3776472"/>
-            <a:ext cx="164592" cy="164592"/>
-          </a:xfrm>
-          <a:prstGeom prst="ellipse">
-            <a:avLst/>
-          </a:prstGeom>
-          <a:solidFill>
-            <a:srgbClr val="F5A623"/>
-          </a:solidFill>
-          <a:ln w="12700">
-            <a:solidFill>
-              <a:srgbClr val="F5A623"/>
-            </a:solidFill>
-            <a:prstDash val="solid"/>
-          </a:ln>
-        </p:spPr>
-      </p:sp>
-      <p:sp>
-        <p:nvSpPr>
-          <p:cNvPr id="30" name="Text 26"/>
-          <p:cNvSpPr/>
-          <p:nvPr/>
-        </p:nvSpPr>
-        <p:spPr>
-          <a:xfrm>
-            <a:off x="4892040" y="3520440"/>
-            <a:ext cx="3931920" cy="201168"/>
-          </a:xfrm>
-          <a:prstGeom prst="rect">
-            <a:avLst/>
-          </a:prstGeom>
-          <a:noFill/>
-          <a:ln/>
-        </p:spPr>
-        <p:txBody>
-          <a:bodyPr wrap="square" lIns="0" tIns="0" rIns="0" bIns="0" rtlCol="0" anchor="ctr"/>
-          <a:lstStyle/>
-          <a:p>
-            <a:pPr marL="0" indent="0">
-              <a:buNone/>
-            </a:pPr>
-            <a:r>
-              <a:rPr lang="en-US" sz="1200" b="1" dirty="0">
-                <a:solidFill>
-                  <a:srgbClr val="1E293B"/>
-                </a:solidFill>
-                <a:latin typeface="Calibri" pitchFamily="34" charset="0"/>
-                <a:ea typeface="Calibri" pitchFamily="34" charset="-122"/>
-                <a:cs typeface="Calibri" pitchFamily="34" charset="-120"/>
-              </a:rPr>
-              <a:t>Why DeBERTa?</a:t>
-            </a:r>
-            <a:endParaRPr lang="en-US" sz="1200" dirty="0"/>
-          </a:p>
-        </p:txBody>
-      </p:sp>
-      <p:sp>
-        <p:nvSpPr>
-          <p:cNvPr id="31" name="Text 27"/>
-          <p:cNvSpPr/>
-          <p:nvPr/>
-        </p:nvSpPr>
-        <p:spPr>
-          <a:xfrm>
-            <a:off x="4937760" y="3730752"/>
-            <a:ext cx="4069080" cy="164592"/>
-          </a:xfrm>
-          <a:prstGeom prst="rect">
-            <a:avLst/>
-          </a:prstGeom>
-          <a:noFill/>
-          <a:ln/>
-        </p:spPr>
-        <p:txBody>
-          <a:bodyPr wrap="square" lIns="0" tIns="0" rIns="0" bIns="0" rtlCol="0" anchor="t"/>
-          <a:lstStyle/>
-          <a:p>
-            <a:pPr marL="0" indent="0">
-              <a:buNone/>
-            </a:pPr>
-            <a:r>
-              <a:rPr lang="en-US" sz="1200" dirty="0">
-                <a:solidFill>
-                  <a:srgbClr val="475569"/>
-                </a:solidFill>
-                <a:latin typeface="Calibri" pitchFamily="34" charset="0"/>
-                <a:ea typeface="Calibri" pitchFamily="34" charset="-122"/>
-                <a:cs typeface="Calibri" pitchFamily="34" charset="-120"/>
-              </a:rPr>
-              <a:t>Bidirectional attention score full sequence better than causal LM</a:t>
-            </a:r>
-            <a:endParaRPr lang="en-US" sz="1200" dirty="0"/>
-          </a:p>
-        </p:txBody>
-      </p:sp>
-      <p:sp>
-        <p:nvSpPr>
-          <p:cNvPr id="32" name="Shape 28"/>
-          <p:cNvSpPr/>
-          <p:nvPr/>
-        </p:nvSpPr>
-        <p:spPr>
-          <a:xfrm>
-            <a:off x="4709160" y="4142232"/>
-            <a:ext cx="164592" cy="164592"/>
-          </a:xfrm>
-          <a:prstGeom prst="ellipse">
-            <a:avLst/>
-          </a:prstGeom>
-          <a:solidFill>
-            <a:srgbClr val="F5A623"/>
-          </a:solidFill>
-          <a:ln w="12700">
-            <a:solidFill>
-              <a:srgbClr val="F5A623"/>
-            </a:solidFill>
-            <a:prstDash val="solid"/>
-          </a:ln>
-        </p:spPr>
-      </p:sp>
-      <p:sp>
-        <p:nvSpPr>
-          <p:cNvPr id="33" name="Text 29"/>
-          <p:cNvSpPr/>
-          <p:nvPr/>
-        </p:nvSpPr>
-        <p:spPr>
-          <a:xfrm>
-            <a:off x="4937760" y="4014216"/>
-            <a:ext cx="3931920" cy="201168"/>
-          </a:xfrm>
-          <a:prstGeom prst="rect">
-            <a:avLst/>
-          </a:prstGeom>
-          <a:noFill/>
-          <a:ln/>
-        </p:spPr>
-        <p:txBody>
-          <a:bodyPr wrap="square" lIns="0" tIns="0" rIns="0" bIns="0" rtlCol="0" anchor="ctr"/>
-          <a:lstStyle/>
-          <a:p>
-            <a:pPr marL="0" indent="0">
-              <a:buNone/>
-            </a:pPr>
-            <a:r>
-              <a:rPr lang="en-US" sz="1200" b="1" dirty="0">
-                <a:solidFill>
-                  <a:srgbClr val="1E293B"/>
-                </a:solidFill>
-                <a:latin typeface="Calibri" pitchFamily="34" charset="0"/>
-                <a:ea typeface="Calibri" pitchFamily="34" charset="-122"/>
-                <a:cs typeface="Calibri" pitchFamily="34" charset="-120"/>
-              </a:rPr>
-              <a:t>Why LoRA only?</a:t>
-            </a:r>
-            <a:endParaRPr lang="en-US" sz="1200" dirty="0"/>
-          </a:p>
-        </p:txBody>
-      </p:sp>
-      <p:sp>
-        <p:nvSpPr>
-          <p:cNvPr id="34" name="Text 30"/>
-          <p:cNvSpPr/>
-          <p:nvPr/>
-        </p:nvSpPr>
-        <p:spPr>
-          <a:xfrm>
-            <a:off x="4937760" y="4180918"/>
-            <a:ext cx="3931920" cy="182880"/>
-          </a:xfrm>
-          <a:prstGeom prst="rect">
-            <a:avLst/>
-          </a:prstGeom>
-          <a:noFill/>
-          <a:ln/>
-        </p:spPr>
-        <p:txBody>
-          <a:bodyPr wrap="square" lIns="0" tIns="0" rIns="0" bIns="0" rtlCol="0" anchor="t"/>
-          <a:lstStyle/>
-          <a:p>
-            <a:pPr marL="0" indent="0">
-              <a:buNone/>
-            </a:pPr>
-            <a:r>
-              <a:rPr lang="en-US" sz="1200" dirty="0">
-                <a:solidFill>
-                  <a:srgbClr val="475569"/>
-                </a:solidFill>
-                <a:latin typeface="Calibri" pitchFamily="34" charset="0"/>
-                <a:ea typeface="Calibri" pitchFamily="34" charset="-122"/>
-                <a:cs typeface="Calibri" pitchFamily="34" charset="-120"/>
-              </a:rPr>
-              <a:t>Trains &lt;1 % of params; full 184 M fits T4 in fp32</a:t>
-            </a:r>
-            <a:endParaRPr lang="en-US" sz="1200" dirty="0"/>
-          </a:p>
-        </p:txBody>
-      </p:sp>
-      <p:sp>
-        <p:nvSpPr>
-          <p:cNvPr id="35" name="Shape 31"/>
-          <p:cNvSpPr/>
-          <p:nvPr/>
-        </p:nvSpPr>
-        <p:spPr>
-          <a:xfrm>
-            <a:off x="4709160" y="4507992"/>
-            <a:ext cx="164592" cy="164592"/>
-          </a:xfrm>
-          <a:prstGeom prst="ellipse">
-            <a:avLst/>
-          </a:prstGeom>
-          <a:solidFill>
-            <a:srgbClr val="F5A623"/>
-          </a:solidFill>
-          <a:ln w="12700">
-            <a:solidFill>
-              <a:srgbClr val="F5A623"/>
-            </a:solidFill>
-            <a:prstDash val="solid"/>
-          </a:ln>
-        </p:spPr>
-      </p:sp>
-      <p:sp>
-        <p:nvSpPr>
-          <p:cNvPr id="36" name="Text 32"/>
-          <p:cNvSpPr/>
-          <p:nvPr/>
-        </p:nvSpPr>
-        <p:spPr>
-          <a:xfrm>
-            <a:off x="4937760" y="4398969"/>
-            <a:ext cx="3931920" cy="201168"/>
-          </a:xfrm>
-          <a:prstGeom prst="rect">
-            <a:avLst/>
-          </a:prstGeom>
-          <a:noFill/>
-          <a:ln/>
-        </p:spPr>
-        <p:txBody>
-          <a:bodyPr wrap="square" lIns="0" tIns="0" rIns="0" bIns="0" rtlCol="0" anchor="ctr"/>
-          <a:lstStyle/>
-          <a:p>
-            <a:pPr marL="0" indent="0">
-              <a:buNone/>
-            </a:pPr>
-            <a:r>
-              <a:rPr lang="en-US" sz="1200" b="1" dirty="0">
-                <a:solidFill>
-                  <a:srgbClr val="1E293B"/>
-                </a:solidFill>
-                <a:latin typeface="Calibri" pitchFamily="34" charset="0"/>
-                <a:ea typeface="Calibri" pitchFamily="34" charset="-122"/>
-                <a:cs typeface="Calibri" pitchFamily="34" charset="-120"/>
-              </a:rPr>
-              <a:t>Why fp32?</a:t>
-            </a:r>
-            <a:endParaRPr lang="en-US" sz="1200" dirty="0"/>
-          </a:p>
-        </p:txBody>
-      </p:sp>
-      <p:sp>
-        <p:nvSpPr>
-          <p:cNvPr id="37" name="Text 33"/>
-          <p:cNvSpPr/>
-          <p:nvPr/>
-        </p:nvSpPr>
-        <p:spPr>
-          <a:xfrm>
-            <a:off x="4937760" y="4617720"/>
-            <a:ext cx="3931920" cy="182880"/>
-          </a:xfrm>
-          <a:prstGeom prst="rect">
-            <a:avLst/>
-          </a:prstGeom>
-          <a:noFill/>
-          <a:ln/>
-        </p:spPr>
-        <p:txBody>
-          <a:bodyPr wrap="square" lIns="0" tIns="0" rIns="0" bIns="0" rtlCol="0" anchor="t"/>
-          <a:lstStyle/>
-          <a:p>
-            <a:pPr marL="0" indent="0">
-              <a:buNone/>
-            </a:pPr>
-            <a:r>
-              <a:rPr lang="en-US" sz="1200" dirty="0">
-                <a:solidFill>
-                  <a:srgbClr val="475569"/>
-                </a:solidFill>
-                <a:latin typeface="Calibri" pitchFamily="34" charset="0"/>
-                <a:ea typeface="Calibri" pitchFamily="34" charset="-122"/>
-                <a:cs typeface="Calibri" pitchFamily="34" charset="-120"/>
-              </a:rPr>
-              <a:t>DeBERTa disentangled attention produces NaN in fp16</a:t>
-            </a:r>
-            <a:endParaRPr lang="en-US" sz="1200" dirty="0"/>
-          </a:p>
-        </p:txBody>
-      </p:sp>
-    </p:spTree>
-  </p:cSld>
-  <p:clrMapOvr>
-    <a:masterClrMapping/>
-  </p:clrMapOvr>
-</p:sld>
-</file>
-
-<file path=ppt/slides/slide11.xml><?xml version="1.0" encoding="utf-8"?>
 <p:sld xmlns:a="http://schemas.openxmlformats.org/drawingml/2006/main" xmlns:r="http://schemas.openxmlformats.org/officeDocument/2006/relationships" xmlns:p="http://schemas.openxmlformats.org/presentationml/2006/main">
   <p:cSld name="Slide 11">
     <p:spTree>
@@ -7870,7 +6384,7 @@
 </p:sld>
 </file>
 
-<file path=ppt/slides/slide12.xml><?xml version="1.0" encoding="utf-8"?>
+<file path=ppt/slides/slide11.xml><?xml version="1.0" encoding="utf-8"?>
 <p:sld xmlns:a="http://schemas.openxmlformats.org/drawingml/2006/main" xmlns:r="http://schemas.openxmlformats.org/officeDocument/2006/relationships" xmlns:p="http://schemas.openxmlformats.org/presentationml/2006/main">
   <p:cSld name="Slide 12">
     <p:spTree>
@@ -8963,7 +7477,7 @@
 </p:sld>
 </file>
 
-<file path=ppt/slides/slide13.xml><?xml version="1.0" encoding="utf-8"?>
+<file path=ppt/slides/slide12.xml><?xml version="1.0" encoding="utf-8"?>
 <p:sld xmlns:a="http://schemas.openxmlformats.org/drawingml/2006/main" xmlns:r="http://schemas.openxmlformats.org/officeDocument/2006/relationships" xmlns:p="http://schemas.openxmlformats.org/presentationml/2006/main">
   <p:cSld name="Slide 13">
     <p:spTree>
@@ -10053,7 +8567,7 @@
 </p:sld>
 </file>
 
-<file path=ppt/slides/slide14.xml><?xml version="1.0" encoding="utf-8"?>
+<file path=ppt/slides/slide13.xml><?xml version="1.0" encoding="utf-8"?>
 <p:sld xmlns:a="http://schemas.openxmlformats.org/drawingml/2006/main" xmlns:r="http://schemas.openxmlformats.org/officeDocument/2006/relationships" xmlns:p="http://schemas.openxmlformats.org/presentationml/2006/main">
   <p:cSld name="Slide 14">
     <p:spTree>
@@ -11528,7 +10042,7 @@
 </p:sld>
 </file>
 
-<file path=ppt/slides/slide15.xml><?xml version="1.0" encoding="utf-8"?>
+<file path=ppt/slides/slide14.xml><?xml version="1.0" encoding="utf-8"?>
 <p:sld xmlns:a="http://schemas.openxmlformats.org/drawingml/2006/main" xmlns:r="http://schemas.openxmlformats.org/officeDocument/2006/relationships" xmlns:p="http://schemas.openxmlformats.org/presentationml/2006/main">
   <p:cSld name="Slide 15">
     <p:spTree>
@@ -12794,7 +11308,7 @@
 </p:sld>
 </file>
 
-<file path=ppt/slides/slide16.xml><?xml version="1.0" encoding="utf-8"?>
+<file path=ppt/slides/slide15.xml><?xml version="1.0" encoding="utf-8"?>
 <p:sld xmlns:a="http://schemas.openxmlformats.org/drawingml/2006/main" xmlns:r="http://schemas.openxmlformats.org/officeDocument/2006/relationships" xmlns:p="http://schemas.openxmlformats.org/presentationml/2006/main">
   <p:cSld name="Slide 16">
     <p:spTree>
@@ -16113,2189 +14627,7 @@
 </p:sld>
 </file>
 
-<file path=ppt/slides/slide17.xml><?xml version="1.0" encoding="utf-8"?>
-<p:sld xmlns:a="http://schemas.openxmlformats.org/drawingml/2006/main" xmlns:r="http://schemas.openxmlformats.org/officeDocument/2006/relationships" xmlns:p="http://schemas.openxmlformats.org/presentationml/2006/main">
-  <p:cSld name="Slide 17">
-    <p:spTree>
-      <p:nvGrpSpPr>
-        <p:cNvPr id="1" name=""/>
-        <p:cNvGrpSpPr/>
-        <p:nvPr/>
-      </p:nvGrpSpPr>
-      <p:grpSpPr>
-        <a:xfrm>
-          <a:off x="0" y="0"/>
-          <a:ext cx="0" cy="0"/>
-          <a:chOff x="0" y="0"/>
-          <a:chExt cx="0" cy="0"/>
-        </a:xfrm>
-      </p:grpSpPr>
-      <p:pic>
-        <p:nvPicPr>
-          <p:cNvPr id="2" name="Image 0" descr="/home/claude/iiit_header.png"/>
-          <p:cNvPicPr>
-            <a:picLocks noChangeAspect="1"/>
-          </p:cNvPicPr>
-          <p:nvPr/>
-        </p:nvPicPr>
-        <p:blipFill>
-          <a:blip r:embed="rId3"/>
-          <a:stretch>
-            <a:fillRect/>
-          </a:stretch>
-        </p:blipFill>
-        <p:spPr>
-          <a:xfrm>
-            <a:off x="137160" y="91440"/>
-            <a:ext cx="8869680" cy="708660"/>
-          </a:xfrm>
-          <a:prstGeom prst="rect">
-            <a:avLst/>
-          </a:prstGeom>
-        </p:spPr>
-      </p:pic>
-      <p:sp>
-        <p:nvSpPr>
-          <p:cNvPr id="3" name="Shape 0"/>
-          <p:cNvSpPr/>
-          <p:nvPr/>
-        </p:nvSpPr>
-        <p:spPr>
-          <a:xfrm>
-            <a:off x="0" y="868680"/>
-            <a:ext cx="9144000" cy="4279392"/>
-          </a:xfrm>
-          <a:prstGeom prst="rect">
-            <a:avLst/>
-          </a:prstGeom>
-          <a:solidFill>
-            <a:srgbClr val="0F1E45"/>
-          </a:solidFill>
-          <a:ln w="12700">
-            <a:solidFill>
-              <a:srgbClr val="0F1E45"/>
-            </a:solidFill>
-            <a:prstDash val="solid"/>
-          </a:ln>
-        </p:spPr>
-      </p:sp>
-      <p:sp>
-        <p:nvSpPr>
-          <p:cNvPr id="4" name="Text 1"/>
-          <p:cNvSpPr/>
-          <p:nvPr/>
-        </p:nvSpPr>
-        <p:spPr>
-          <a:xfrm>
-            <a:off x="0" y="1737360"/>
-            <a:ext cx="9144000" cy="731520"/>
-          </a:xfrm>
-          <a:prstGeom prst="rect">
-            <a:avLst/>
-          </a:prstGeom>
-          <a:noFill/>
-          <a:ln/>
-        </p:spPr>
-        <p:txBody>
-          <a:bodyPr wrap="square" lIns="0" tIns="0" rIns="0" bIns="0" rtlCol="0" anchor="ctr"/>
-          <a:lstStyle/>
-          <a:p>
-            <a:pPr marL="0" indent="0" algn="ctr">
-              <a:buNone/>
-            </a:pPr>
-            <a:r>
-              <a:rPr lang="en-US" sz="4000" b="1" kern="0" spc="600" dirty="0">
-                <a:solidFill>
-                  <a:srgbClr val="FFFFFF"/>
-                </a:solidFill>
-                <a:latin typeface="Calibri" pitchFamily="34" charset="0"/>
-                <a:ea typeface="Calibri" pitchFamily="34" charset="-122"/>
-                <a:cs typeface="Calibri" pitchFamily="34" charset="-120"/>
-              </a:rPr>
-              <a:t>THANK YOU</a:t>
-            </a:r>
-            <a:endParaRPr lang="en-US" sz="4000" dirty="0"/>
-          </a:p>
-        </p:txBody>
-      </p:sp>
-      <p:sp>
-        <p:nvSpPr>
-          <p:cNvPr id="5" name="Shape 2"/>
-          <p:cNvSpPr/>
-          <p:nvPr/>
-        </p:nvSpPr>
-        <p:spPr>
-          <a:xfrm>
-            <a:off x="3200400" y="2606040"/>
-            <a:ext cx="2743200" cy="0"/>
-          </a:xfrm>
-          <a:prstGeom prst="line">
-            <a:avLst/>
-          </a:prstGeom>
-          <a:noFill/>
-          <a:ln w="25400">
-            <a:solidFill>
-              <a:srgbClr val="F5A623"/>
-            </a:solidFill>
-            <a:prstDash val="solid"/>
-          </a:ln>
-        </p:spPr>
-      </p:sp>
-      <p:sp>
-        <p:nvSpPr>
-          <p:cNvPr id="6" name="Text 3"/>
-          <p:cNvSpPr/>
-          <p:nvPr/>
-        </p:nvSpPr>
-        <p:spPr>
-          <a:xfrm>
-            <a:off x="0" y="2743200"/>
-            <a:ext cx="9144000" cy="365760"/>
-          </a:xfrm>
-          <a:prstGeom prst="rect">
-            <a:avLst/>
-          </a:prstGeom>
-          <a:noFill/>
-          <a:ln/>
-        </p:spPr>
-        <p:txBody>
-          <a:bodyPr wrap="square" lIns="0" tIns="0" rIns="0" bIns="0" rtlCol="0" anchor="ctr"/>
-          <a:lstStyle/>
-          <a:p>
-            <a:pPr marL="0" indent="0" algn="ctr">
-              <a:buNone/>
-            </a:pPr>
-            <a:r>
-              <a:rPr lang="en-US" sz="1400" i="1" dirty="0">
-                <a:solidFill>
-                  <a:srgbClr val="E5E7EB"/>
-                </a:solidFill>
-                <a:latin typeface="Calibri" pitchFamily="34" charset="0"/>
-                <a:ea typeface="Calibri" pitchFamily="34" charset="-122"/>
-                <a:cs typeface="Calibri" pitchFamily="34" charset="-120"/>
-              </a:rPr>
-              <a:t>RLHF: Reward Modeling + DPO   •   DeBERTa-v3   •   TinyLlama-1.1B</a:t>
-            </a:r>
-            <a:endParaRPr lang="en-US" sz="1400" dirty="0"/>
-          </a:p>
-        </p:txBody>
-      </p:sp>
-      <p:sp>
-        <p:nvSpPr>
-          <p:cNvPr id="7" name="Text 4"/>
-          <p:cNvSpPr/>
-          <p:nvPr/>
-        </p:nvSpPr>
-        <p:spPr>
-          <a:xfrm>
-            <a:off x="0" y="3108960"/>
-            <a:ext cx="9144000" cy="320040"/>
-          </a:xfrm>
-          <a:prstGeom prst="rect">
-            <a:avLst/>
-          </a:prstGeom>
-          <a:noFill/>
-          <a:ln/>
-        </p:spPr>
-        <p:txBody>
-          <a:bodyPr wrap="square" lIns="0" tIns="0" rIns="0" bIns="0" rtlCol="0" anchor="ctr"/>
-          <a:lstStyle/>
-          <a:p>
-            <a:pPr marL="0" indent="0" algn="ctr">
-              <a:buNone/>
-            </a:pPr>
-            <a:r>
-              <a:rPr lang="en-US" sz="1100" dirty="0">
-                <a:solidFill>
-                  <a:srgbClr val="CBD5E1"/>
-                </a:solidFill>
-                <a:latin typeface="Calibri" pitchFamily="34" charset="0"/>
-                <a:ea typeface="Calibri" pitchFamily="34" charset="-122"/>
-                <a:cs typeface="Calibri" pitchFamily="34" charset="-120"/>
-              </a:rPr>
-              <a:t>Combined HH-RLHF + LMSYS Arena   •   Per-source cross-distribution evaluation</a:t>
-            </a:r>
-            <a:endParaRPr lang="en-US" sz="1100" dirty="0"/>
-          </a:p>
-        </p:txBody>
-      </p:sp>
-      <p:sp>
-        <p:nvSpPr>
-          <p:cNvPr id="8" name="Text 5"/>
-          <p:cNvSpPr/>
-          <p:nvPr/>
-        </p:nvSpPr>
-        <p:spPr>
-          <a:xfrm>
-            <a:off x="0" y="4023360"/>
-            <a:ext cx="9144000" cy="320040"/>
-          </a:xfrm>
-          <a:prstGeom prst="rect">
-            <a:avLst/>
-          </a:prstGeom>
-          <a:noFill/>
-          <a:ln/>
-        </p:spPr>
-        <p:txBody>
-          <a:bodyPr wrap="square" lIns="0" tIns="0" rIns="0" bIns="0" rtlCol="0" anchor="ctr"/>
-          <a:lstStyle/>
-          <a:p>
-            <a:pPr marL="0" indent="0" algn="ctr">
-              <a:buNone/>
-            </a:pPr>
-            <a:r>
-              <a:rPr lang="en-US" sz="1200" dirty="0">
-                <a:solidFill>
-                  <a:srgbClr val="FFFFFF"/>
-                </a:solidFill>
-                <a:latin typeface="Calibri" pitchFamily="34" charset="0"/>
-                <a:ea typeface="Calibri" pitchFamily="34" charset="-122"/>
-                <a:cs typeface="Calibri" pitchFamily="34" charset="-120"/>
-              </a:rPr>
-              <a:t>Department of Computer Science and Engineering, IIIT Surat</a:t>
-            </a:r>
-            <a:endParaRPr lang="en-US" sz="1200" dirty="0"/>
-          </a:p>
-        </p:txBody>
-      </p:sp>
-    </p:spTree>
-  </p:cSld>
-  <p:clrMapOvr>
-    <a:masterClrMapping/>
-  </p:clrMapOvr>
-</p:sld>
-</file>
-
 <file path=ppt/slides/slide2.xml><?xml version="1.0" encoding="utf-8"?>
-<p:sld xmlns:a="http://schemas.openxmlformats.org/drawingml/2006/main" xmlns:r="http://schemas.openxmlformats.org/officeDocument/2006/relationships" xmlns:p="http://schemas.openxmlformats.org/presentationml/2006/main">
-  <p:cSld name="Slide 2">
-    <p:spTree>
-      <p:nvGrpSpPr>
-        <p:cNvPr id="1" name=""/>
-        <p:cNvGrpSpPr/>
-        <p:nvPr/>
-      </p:nvGrpSpPr>
-      <p:grpSpPr>
-        <a:xfrm>
-          <a:off x="0" y="0"/>
-          <a:ext cx="0" cy="0"/>
-          <a:chOff x="0" y="0"/>
-          <a:chExt cx="0" cy="0"/>
-        </a:xfrm>
-      </p:grpSpPr>
-      <p:pic>
-        <p:nvPicPr>
-          <p:cNvPr id="2" name="Image 0" descr="/home/claude/iiit_header.png"/>
-          <p:cNvPicPr>
-            <a:picLocks noChangeAspect="1"/>
-          </p:cNvPicPr>
-          <p:nvPr/>
-        </p:nvPicPr>
-        <p:blipFill>
-          <a:blip r:embed="rId3"/>
-          <a:stretch>
-            <a:fillRect/>
-          </a:stretch>
-        </p:blipFill>
-        <p:spPr>
-          <a:xfrm>
-            <a:off x="137160" y="45720"/>
-            <a:ext cx="8869680" cy="667512"/>
-          </a:xfrm>
-          <a:prstGeom prst="rect">
-            <a:avLst/>
-          </a:prstGeom>
-        </p:spPr>
-      </p:pic>
-      <p:sp>
-        <p:nvSpPr>
-          <p:cNvPr id="3" name="Shape 0"/>
-          <p:cNvSpPr/>
-          <p:nvPr/>
-        </p:nvSpPr>
-        <p:spPr>
-          <a:xfrm>
-            <a:off x="0" y="713232"/>
-            <a:ext cx="73152" cy="4160520"/>
-          </a:xfrm>
-          <a:prstGeom prst="rect">
-            <a:avLst/>
-          </a:prstGeom>
-          <a:solidFill>
-            <a:srgbClr val="F5A623"/>
-          </a:solidFill>
-          <a:ln w="12700">
-            <a:solidFill>
-              <a:srgbClr val="F5A623"/>
-            </a:solidFill>
-            <a:prstDash val="solid"/>
-          </a:ln>
-        </p:spPr>
-      </p:sp>
-      <p:sp>
-        <p:nvSpPr>
-          <p:cNvPr id="4" name="Shape 1"/>
-          <p:cNvSpPr/>
-          <p:nvPr/>
-        </p:nvSpPr>
-        <p:spPr>
-          <a:xfrm>
-            <a:off x="274320" y="4892040"/>
-            <a:ext cx="8595360" cy="0"/>
-          </a:xfrm>
-          <a:prstGeom prst="line">
-            <a:avLst/>
-          </a:prstGeom>
-          <a:noFill/>
-          <a:ln w="9525">
-            <a:solidFill>
-              <a:srgbClr val="CBD5E1"/>
-            </a:solidFill>
-            <a:prstDash val="solid"/>
-          </a:ln>
-        </p:spPr>
-      </p:sp>
-      <p:sp>
-        <p:nvSpPr>
-          <p:cNvPr id="5" name="Text 2"/>
-          <p:cNvSpPr/>
-          <p:nvPr/>
-        </p:nvSpPr>
-        <p:spPr>
-          <a:xfrm>
-            <a:off x="274320" y="4937760"/>
-            <a:ext cx="5486400" cy="228600"/>
-          </a:xfrm>
-          <a:prstGeom prst="rect">
-            <a:avLst/>
-          </a:prstGeom>
-          <a:noFill/>
-          <a:ln/>
-        </p:spPr>
-        <p:txBody>
-          <a:bodyPr wrap="square" lIns="0" tIns="0" rIns="0" bIns="0" rtlCol="0" anchor="t"/>
-          <a:lstStyle/>
-          <a:p>
-            <a:pPr marL="0" indent="0">
-              <a:buNone/>
-            </a:pPr>
-            <a:r>
-              <a:rPr lang="en-US" sz="900" dirty="0">
-                <a:solidFill>
-                  <a:srgbClr val="1E293B"/>
-                </a:solidFill>
-                <a:latin typeface="Calibri" pitchFamily="34" charset="0"/>
-                <a:ea typeface="Calibri" pitchFamily="34" charset="-122"/>
-                <a:cs typeface="Calibri" pitchFamily="34" charset="-120"/>
-              </a:rPr>
-              <a:t>RLHF: Reward Modeling + DPO</a:t>
-            </a:r>
-            <a:r>
-              <a:rPr lang="en-US" sz="900" dirty="0">
-                <a:solidFill>
-                  <a:srgbClr val="94A3B8"/>
-                </a:solidFill>
-                <a:latin typeface="Calibri" pitchFamily="34" charset="0"/>
-                <a:ea typeface="Calibri" pitchFamily="34" charset="-122"/>
-                <a:cs typeface="Calibri" pitchFamily="34" charset="-120"/>
-              </a:rPr>
-              <a:t>   </a:t>
-            </a:r>
-            <a:endParaRPr lang="en-US" sz="900" dirty="0"/>
-          </a:p>
-        </p:txBody>
-      </p:sp>
-      <p:sp>
-        <p:nvSpPr>
-          <p:cNvPr id="6" name="Text 3"/>
-          <p:cNvSpPr/>
-          <p:nvPr/>
-        </p:nvSpPr>
-        <p:spPr>
-          <a:xfrm>
-            <a:off x="6858000" y="4937760"/>
-            <a:ext cx="2011680" cy="228600"/>
-          </a:xfrm>
-          <a:prstGeom prst="rect">
-            <a:avLst/>
-          </a:prstGeom>
-          <a:noFill/>
-          <a:ln/>
-        </p:spPr>
-        <p:txBody>
-          <a:bodyPr wrap="square" lIns="0" tIns="0" rIns="0" bIns="0" rtlCol="0" anchor="t"/>
-          <a:lstStyle/>
-          <a:p>
-            <a:pPr marL="0" indent="0" algn="r">
-              <a:buNone/>
-            </a:pPr>
-            <a:r>
-              <a:rPr lang="en-US" sz="900" dirty="0">
-                <a:solidFill>
-                  <a:srgbClr val="475569"/>
-                </a:solidFill>
-                <a:latin typeface="Calibri" pitchFamily="34" charset="0"/>
-                <a:ea typeface="Calibri" pitchFamily="34" charset="-122"/>
-                <a:cs typeface="Calibri" pitchFamily="34" charset="-120"/>
-              </a:rPr>
-              <a:t>Slide 1 / 16</a:t>
-            </a:r>
-            <a:endParaRPr lang="en-US" sz="900" dirty="0"/>
-          </a:p>
-        </p:txBody>
-      </p:sp>
-      <p:sp>
-        <p:nvSpPr>
-          <p:cNvPr id="7" name="Text 4"/>
-          <p:cNvSpPr/>
-          <p:nvPr/>
-        </p:nvSpPr>
-        <p:spPr>
-          <a:xfrm>
-            <a:off x="274320" y="777240"/>
-            <a:ext cx="8595360" cy="365760"/>
-          </a:xfrm>
-          <a:prstGeom prst="rect">
-            <a:avLst/>
-          </a:prstGeom>
-          <a:noFill/>
-          <a:ln/>
-        </p:spPr>
-        <p:txBody>
-          <a:bodyPr wrap="square" lIns="0" tIns="0" rIns="0" bIns="0" rtlCol="0" anchor="ctr"/>
-          <a:lstStyle/>
-          <a:p>
-            <a:pPr marL="0" indent="0">
-              <a:buNone/>
-            </a:pPr>
-            <a:r>
-              <a:rPr lang="en-US" sz="2000" b="1" dirty="0">
-                <a:solidFill>
-                  <a:srgbClr val="1E293B"/>
-                </a:solidFill>
-                <a:latin typeface="Calibri" pitchFamily="34" charset="0"/>
-                <a:ea typeface="Calibri" pitchFamily="34" charset="-122"/>
-                <a:cs typeface="Calibri" pitchFamily="34" charset="-120"/>
-              </a:rPr>
-              <a:t>Outline of Presentation</a:t>
-            </a:r>
-            <a:endParaRPr lang="en-US" sz="2000" dirty="0"/>
-          </a:p>
-        </p:txBody>
-      </p:sp>
-      <p:sp>
-        <p:nvSpPr>
-          <p:cNvPr id="8" name="Shape 5"/>
-          <p:cNvSpPr/>
-          <p:nvPr/>
-        </p:nvSpPr>
-        <p:spPr>
-          <a:xfrm>
-            <a:off x="457200" y="1344168"/>
-            <a:ext cx="292608" cy="292608"/>
-          </a:xfrm>
-          <a:prstGeom prst="ellipse">
-            <a:avLst/>
-          </a:prstGeom>
-          <a:solidFill>
-            <a:srgbClr val="F5A623"/>
-          </a:solidFill>
-          <a:ln w="12700">
-            <a:solidFill>
-              <a:srgbClr val="F5A623"/>
-            </a:solidFill>
-            <a:prstDash val="solid"/>
-          </a:ln>
-        </p:spPr>
-      </p:sp>
-      <p:sp>
-        <p:nvSpPr>
-          <p:cNvPr id="9" name="Text 6"/>
-          <p:cNvSpPr/>
-          <p:nvPr/>
-        </p:nvSpPr>
-        <p:spPr>
-          <a:xfrm>
-            <a:off x="457200" y="1344168"/>
-            <a:ext cx="292608" cy="292608"/>
-          </a:xfrm>
-          <a:prstGeom prst="rect">
-            <a:avLst/>
-          </a:prstGeom>
-          <a:noFill/>
-          <a:ln/>
-        </p:spPr>
-        <p:txBody>
-          <a:bodyPr wrap="square" lIns="0" tIns="0" rIns="0" bIns="0" rtlCol="0" anchor="ctr"/>
-          <a:lstStyle/>
-          <a:p>
-            <a:pPr marL="0" indent="0" algn="ctr">
-              <a:buNone/>
-            </a:pPr>
-            <a:r>
-              <a:rPr lang="en-US" sz="1100" b="1" dirty="0">
-                <a:solidFill>
-                  <a:srgbClr val="FFFFFF"/>
-                </a:solidFill>
-                <a:latin typeface="Calibri" pitchFamily="34" charset="0"/>
-                <a:ea typeface="Calibri" pitchFamily="34" charset="-122"/>
-                <a:cs typeface="Calibri" pitchFamily="34" charset="-120"/>
-              </a:rPr>
-              <a:t>1</a:t>
-            </a:r>
-            <a:endParaRPr lang="en-US" sz="1100" dirty="0"/>
-          </a:p>
-        </p:txBody>
-      </p:sp>
-      <p:sp>
-        <p:nvSpPr>
-          <p:cNvPr id="10" name="Text 7"/>
-          <p:cNvSpPr/>
-          <p:nvPr/>
-        </p:nvSpPr>
-        <p:spPr>
-          <a:xfrm>
-            <a:off x="841248" y="1325880"/>
-            <a:ext cx="3657600" cy="256032"/>
-          </a:xfrm>
-          <a:prstGeom prst="rect">
-            <a:avLst/>
-          </a:prstGeom>
-          <a:noFill/>
-          <a:ln/>
-        </p:spPr>
-        <p:txBody>
-          <a:bodyPr wrap="square" lIns="0" tIns="0" rIns="0" bIns="0" rtlCol="0" anchor="ctr"/>
-          <a:lstStyle/>
-          <a:p>
-            <a:pPr marL="0" indent="0">
-              <a:buNone/>
-            </a:pPr>
-            <a:r>
-              <a:rPr lang="en-US" sz="1250" b="1" dirty="0">
-                <a:solidFill>
-                  <a:srgbClr val="1E293B"/>
-                </a:solidFill>
-                <a:latin typeface="Calibri" pitchFamily="34" charset="0"/>
-                <a:ea typeface="Calibri" pitchFamily="34" charset="-122"/>
-                <a:cs typeface="Calibri" pitchFamily="34" charset="-120"/>
-              </a:rPr>
-              <a:t>Introduction</a:t>
-            </a:r>
-            <a:endParaRPr lang="en-US" sz="1250" dirty="0"/>
-          </a:p>
-        </p:txBody>
-      </p:sp>
-      <p:sp>
-        <p:nvSpPr>
-          <p:cNvPr id="11" name="Text 8"/>
-          <p:cNvSpPr/>
-          <p:nvPr/>
-        </p:nvSpPr>
-        <p:spPr>
-          <a:xfrm>
-            <a:off x="841248" y="1563624"/>
-            <a:ext cx="3840480" cy="228600"/>
-          </a:xfrm>
-          <a:prstGeom prst="rect">
-            <a:avLst/>
-          </a:prstGeom>
-          <a:noFill/>
-          <a:ln/>
-        </p:spPr>
-        <p:txBody>
-          <a:bodyPr wrap="square" lIns="0" tIns="0" rIns="0" bIns="0" rtlCol="0" anchor="t"/>
-          <a:lstStyle/>
-          <a:p>
-            <a:pPr marL="0" indent="0">
-              <a:buNone/>
-            </a:pPr>
-            <a:r>
-              <a:rPr lang="en-US" sz="1000" i="1" dirty="0">
-                <a:solidFill>
-                  <a:srgbClr val="475569"/>
-                </a:solidFill>
-                <a:latin typeface="Calibri" pitchFamily="34" charset="0"/>
-                <a:ea typeface="Calibri" pitchFamily="34" charset="-122"/>
-                <a:cs typeface="Calibri" pitchFamily="34" charset="-120"/>
-              </a:rPr>
-              <a:t>—  Why alignment of language models matters</a:t>
-            </a:r>
-            <a:endParaRPr lang="en-US" sz="1000" dirty="0"/>
-          </a:p>
-        </p:txBody>
-      </p:sp>
-      <p:sp>
-        <p:nvSpPr>
-          <p:cNvPr id="12" name="Shape 9"/>
-          <p:cNvSpPr/>
-          <p:nvPr/>
-        </p:nvSpPr>
-        <p:spPr>
-          <a:xfrm>
-            <a:off x="457200" y="1837944"/>
-            <a:ext cx="292608" cy="292608"/>
-          </a:xfrm>
-          <a:prstGeom prst="ellipse">
-            <a:avLst/>
-          </a:prstGeom>
-          <a:solidFill>
-            <a:srgbClr val="F5A623"/>
-          </a:solidFill>
-          <a:ln w="12700">
-            <a:solidFill>
-              <a:srgbClr val="F5A623"/>
-            </a:solidFill>
-            <a:prstDash val="solid"/>
-          </a:ln>
-        </p:spPr>
-      </p:sp>
-      <p:sp>
-        <p:nvSpPr>
-          <p:cNvPr id="13" name="Text 10"/>
-          <p:cNvSpPr/>
-          <p:nvPr/>
-        </p:nvSpPr>
-        <p:spPr>
-          <a:xfrm>
-            <a:off x="457200" y="1837944"/>
-            <a:ext cx="292608" cy="292608"/>
-          </a:xfrm>
-          <a:prstGeom prst="rect">
-            <a:avLst/>
-          </a:prstGeom>
-          <a:noFill/>
-          <a:ln/>
-        </p:spPr>
-        <p:txBody>
-          <a:bodyPr wrap="square" lIns="0" tIns="0" rIns="0" bIns="0" rtlCol="0" anchor="ctr"/>
-          <a:lstStyle/>
-          <a:p>
-            <a:pPr marL="0" indent="0" algn="ctr">
-              <a:buNone/>
-            </a:pPr>
-            <a:r>
-              <a:rPr lang="en-US" sz="1100" b="1" dirty="0">
-                <a:solidFill>
-                  <a:srgbClr val="FFFFFF"/>
-                </a:solidFill>
-                <a:latin typeface="Calibri" pitchFamily="34" charset="0"/>
-                <a:ea typeface="Calibri" pitchFamily="34" charset="-122"/>
-                <a:cs typeface="Calibri" pitchFamily="34" charset="-120"/>
-              </a:rPr>
-              <a:t>2</a:t>
-            </a:r>
-            <a:endParaRPr lang="en-US" sz="1100" dirty="0"/>
-          </a:p>
-        </p:txBody>
-      </p:sp>
-      <p:sp>
-        <p:nvSpPr>
-          <p:cNvPr id="14" name="Text 11"/>
-          <p:cNvSpPr/>
-          <p:nvPr/>
-        </p:nvSpPr>
-        <p:spPr>
-          <a:xfrm>
-            <a:off x="841248" y="1819656"/>
-            <a:ext cx="3657600" cy="256032"/>
-          </a:xfrm>
-          <a:prstGeom prst="rect">
-            <a:avLst/>
-          </a:prstGeom>
-          <a:noFill/>
-          <a:ln/>
-        </p:spPr>
-        <p:txBody>
-          <a:bodyPr wrap="square" lIns="0" tIns="0" rIns="0" bIns="0" rtlCol="0" anchor="ctr"/>
-          <a:lstStyle/>
-          <a:p>
-            <a:pPr marL="0" indent="0">
-              <a:buNone/>
-            </a:pPr>
-            <a:r>
-              <a:rPr lang="en-US" sz="1250" b="1" dirty="0">
-                <a:solidFill>
-                  <a:srgbClr val="1E293B"/>
-                </a:solidFill>
-                <a:latin typeface="Calibri" pitchFamily="34" charset="0"/>
-                <a:ea typeface="Calibri" pitchFamily="34" charset="-122"/>
-                <a:cs typeface="Calibri" pitchFamily="34" charset="-120"/>
-              </a:rPr>
-              <a:t>Literature Survey</a:t>
-            </a:r>
-            <a:endParaRPr lang="en-US" sz="1250" dirty="0"/>
-          </a:p>
-        </p:txBody>
-      </p:sp>
-      <p:sp>
-        <p:nvSpPr>
-          <p:cNvPr id="15" name="Text 12"/>
-          <p:cNvSpPr/>
-          <p:nvPr/>
-        </p:nvSpPr>
-        <p:spPr>
-          <a:xfrm>
-            <a:off x="841248" y="2057400"/>
-            <a:ext cx="3840480" cy="228600"/>
-          </a:xfrm>
-          <a:prstGeom prst="rect">
-            <a:avLst/>
-          </a:prstGeom>
-          <a:noFill/>
-          <a:ln/>
-        </p:spPr>
-        <p:txBody>
-          <a:bodyPr wrap="square" lIns="0" tIns="0" rIns="0" bIns="0" rtlCol="0" anchor="t"/>
-          <a:lstStyle/>
-          <a:p>
-            <a:pPr marL="0" indent="0">
-              <a:buNone/>
-            </a:pPr>
-            <a:r>
-              <a:rPr lang="en-US" sz="1000" i="1" dirty="0">
-                <a:solidFill>
-                  <a:srgbClr val="475569"/>
-                </a:solidFill>
-                <a:latin typeface="Calibri" pitchFamily="34" charset="0"/>
-                <a:ea typeface="Calibri" pitchFamily="34" charset="-122"/>
-                <a:cs typeface="Calibri" pitchFamily="34" charset="-120"/>
-              </a:rPr>
-              <a:t>—  InstructGPT, DPO, LoRA, preference datasets</a:t>
-            </a:r>
-            <a:endParaRPr lang="en-US" sz="1000" dirty="0"/>
-          </a:p>
-        </p:txBody>
-      </p:sp>
-      <p:sp>
-        <p:nvSpPr>
-          <p:cNvPr id="16" name="Shape 13"/>
-          <p:cNvSpPr/>
-          <p:nvPr/>
-        </p:nvSpPr>
-        <p:spPr>
-          <a:xfrm>
-            <a:off x="457200" y="2331720"/>
-            <a:ext cx="292608" cy="292608"/>
-          </a:xfrm>
-          <a:prstGeom prst="ellipse">
-            <a:avLst/>
-          </a:prstGeom>
-          <a:solidFill>
-            <a:srgbClr val="F5A623"/>
-          </a:solidFill>
-          <a:ln w="12700">
-            <a:solidFill>
-              <a:srgbClr val="F5A623"/>
-            </a:solidFill>
-            <a:prstDash val="solid"/>
-          </a:ln>
-        </p:spPr>
-      </p:sp>
-      <p:sp>
-        <p:nvSpPr>
-          <p:cNvPr id="17" name="Text 14"/>
-          <p:cNvSpPr/>
-          <p:nvPr/>
-        </p:nvSpPr>
-        <p:spPr>
-          <a:xfrm>
-            <a:off x="457200" y="2331720"/>
-            <a:ext cx="292608" cy="292608"/>
-          </a:xfrm>
-          <a:prstGeom prst="rect">
-            <a:avLst/>
-          </a:prstGeom>
-          <a:noFill/>
-          <a:ln/>
-        </p:spPr>
-        <p:txBody>
-          <a:bodyPr wrap="square" lIns="0" tIns="0" rIns="0" bIns="0" rtlCol="0" anchor="ctr"/>
-          <a:lstStyle/>
-          <a:p>
-            <a:pPr marL="0" indent="0" algn="ctr">
-              <a:buNone/>
-            </a:pPr>
-            <a:r>
-              <a:rPr lang="en-US" sz="1100" b="1" dirty="0">
-                <a:solidFill>
-                  <a:srgbClr val="FFFFFF"/>
-                </a:solidFill>
-                <a:latin typeface="Calibri" pitchFamily="34" charset="0"/>
-                <a:ea typeface="Calibri" pitchFamily="34" charset="-122"/>
-                <a:cs typeface="Calibri" pitchFamily="34" charset="-120"/>
-              </a:rPr>
-              <a:t>3</a:t>
-            </a:r>
-            <a:endParaRPr lang="en-US" sz="1100" dirty="0"/>
-          </a:p>
-        </p:txBody>
-      </p:sp>
-      <p:sp>
-        <p:nvSpPr>
-          <p:cNvPr id="18" name="Text 15"/>
-          <p:cNvSpPr/>
-          <p:nvPr/>
-        </p:nvSpPr>
-        <p:spPr>
-          <a:xfrm>
-            <a:off x="841248" y="2313432"/>
-            <a:ext cx="3657600" cy="256032"/>
-          </a:xfrm>
-          <a:prstGeom prst="rect">
-            <a:avLst/>
-          </a:prstGeom>
-          <a:noFill/>
-          <a:ln/>
-        </p:spPr>
-        <p:txBody>
-          <a:bodyPr wrap="square" lIns="0" tIns="0" rIns="0" bIns="0" rtlCol="0" anchor="ctr"/>
-          <a:lstStyle/>
-          <a:p>
-            <a:pPr marL="0" indent="0">
-              <a:buNone/>
-            </a:pPr>
-            <a:r>
-              <a:rPr lang="en-US" sz="1250" b="1" dirty="0">
-                <a:solidFill>
-                  <a:srgbClr val="1E293B"/>
-                </a:solidFill>
-                <a:latin typeface="Calibri" pitchFamily="34" charset="0"/>
-                <a:ea typeface="Calibri" pitchFamily="34" charset="-122"/>
-                <a:cs typeface="Calibri" pitchFamily="34" charset="-120"/>
-              </a:rPr>
-              <a:t>Problem Statement</a:t>
-            </a:r>
-            <a:endParaRPr lang="en-US" sz="1250" dirty="0"/>
-          </a:p>
-        </p:txBody>
-      </p:sp>
-      <p:sp>
-        <p:nvSpPr>
-          <p:cNvPr id="19" name="Text 16"/>
-          <p:cNvSpPr/>
-          <p:nvPr/>
-        </p:nvSpPr>
-        <p:spPr>
-          <a:xfrm>
-            <a:off x="841248" y="2551176"/>
-            <a:ext cx="3840480" cy="228600"/>
-          </a:xfrm>
-          <a:prstGeom prst="rect">
-            <a:avLst/>
-          </a:prstGeom>
-          <a:noFill/>
-          <a:ln/>
-        </p:spPr>
-        <p:txBody>
-          <a:bodyPr wrap="square" lIns="0" tIns="0" rIns="0" bIns="0" rtlCol="0" anchor="t"/>
-          <a:lstStyle/>
-          <a:p>
-            <a:pPr marL="0" indent="0">
-              <a:buNone/>
-            </a:pPr>
-            <a:r>
-              <a:rPr lang="en-US" sz="1000" i="1" dirty="0">
-                <a:solidFill>
-                  <a:srgbClr val="475569"/>
-                </a:solidFill>
-                <a:latin typeface="Calibri" pitchFamily="34" charset="0"/>
-                <a:ea typeface="Calibri" pitchFamily="34" charset="-122"/>
-                <a:cs typeface="Calibri" pitchFamily="34" charset="-120"/>
-              </a:rPr>
-              <a:t>—  Single-dataset RM overfit failure mode</a:t>
-            </a:r>
-            <a:endParaRPr lang="en-US" sz="1000" dirty="0"/>
-          </a:p>
-        </p:txBody>
-      </p:sp>
-      <p:sp>
-        <p:nvSpPr>
-          <p:cNvPr id="20" name="Shape 17"/>
-          <p:cNvSpPr/>
-          <p:nvPr/>
-        </p:nvSpPr>
-        <p:spPr>
-          <a:xfrm>
-            <a:off x="457200" y="2825496"/>
-            <a:ext cx="292608" cy="292608"/>
-          </a:xfrm>
-          <a:prstGeom prst="ellipse">
-            <a:avLst/>
-          </a:prstGeom>
-          <a:solidFill>
-            <a:srgbClr val="F5A623"/>
-          </a:solidFill>
-          <a:ln w="12700">
-            <a:solidFill>
-              <a:srgbClr val="F5A623"/>
-            </a:solidFill>
-            <a:prstDash val="solid"/>
-          </a:ln>
-        </p:spPr>
-      </p:sp>
-      <p:sp>
-        <p:nvSpPr>
-          <p:cNvPr id="21" name="Text 18"/>
-          <p:cNvSpPr/>
-          <p:nvPr/>
-        </p:nvSpPr>
-        <p:spPr>
-          <a:xfrm>
-            <a:off x="457200" y="2825496"/>
-            <a:ext cx="292608" cy="292608"/>
-          </a:xfrm>
-          <a:prstGeom prst="rect">
-            <a:avLst/>
-          </a:prstGeom>
-          <a:noFill/>
-          <a:ln/>
-        </p:spPr>
-        <p:txBody>
-          <a:bodyPr wrap="square" lIns="0" tIns="0" rIns="0" bIns="0" rtlCol="0" anchor="ctr"/>
-          <a:lstStyle/>
-          <a:p>
-            <a:pPr marL="0" indent="0" algn="ctr">
-              <a:buNone/>
-            </a:pPr>
-            <a:r>
-              <a:rPr lang="en-US" sz="1100" b="1" dirty="0">
-                <a:solidFill>
-                  <a:srgbClr val="FFFFFF"/>
-                </a:solidFill>
-                <a:latin typeface="Calibri" pitchFamily="34" charset="0"/>
-                <a:ea typeface="Calibri" pitchFamily="34" charset="-122"/>
-                <a:cs typeface="Calibri" pitchFamily="34" charset="-120"/>
-              </a:rPr>
-              <a:t>4</a:t>
-            </a:r>
-            <a:endParaRPr lang="en-US" sz="1100" dirty="0"/>
-          </a:p>
-        </p:txBody>
-      </p:sp>
-      <p:sp>
-        <p:nvSpPr>
-          <p:cNvPr id="22" name="Text 19"/>
-          <p:cNvSpPr/>
-          <p:nvPr/>
-        </p:nvSpPr>
-        <p:spPr>
-          <a:xfrm>
-            <a:off x="841248" y="2807208"/>
-            <a:ext cx="3657600" cy="256032"/>
-          </a:xfrm>
-          <a:prstGeom prst="rect">
-            <a:avLst/>
-          </a:prstGeom>
-          <a:noFill/>
-          <a:ln/>
-        </p:spPr>
-        <p:txBody>
-          <a:bodyPr wrap="square" lIns="0" tIns="0" rIns="0" bIns="0" rtlCol="0" anchor="ctr"/>
-          <a:lstStyle/>
-          <a:p>
-            <a:pPr marL="0" indent="0">
-              <a:buNone/>
-            </a:pPr>
-            <a:r>
-              <a:rPr lang="en-US" sz="1250" b="1" dirty="0">
-                <a:solidFill>
-                  <a:srgbClr val="1E293B"/>
-                </a:solidFill>
-                <a:latin typeface="Calibri" pitchFamily="34" charset="0"/>
-                <a:ea typeface="Calibri" pitchFamily="34" charset="-122"/>
-                <a:cs typeface="Calibri" pitchFamily="34" charset="-120"/>
-              </a:rPr>
-              <a:t>Proposed System</a:t>
-            </a:r>
-            <a:endParaRPr lang="en-US" sz="1250" dirty="0"/>
-          </a:p>
-        </p:txBody>
-      </p:sp>
-      <p:sp>
-        <p:nvSpPr>
-          <p:cNvPr id="23" name="Text 20"/>
-          <p:cNvSpPr/>
-          <p:nvPr/>
-        </p:nvSpPr>
-        <p:spPr>
-          <a:xfrm>
-            <a:off x="841248" y="3044952"/>
-            <a:ext cx="3840480" cy="228600"/>
-          </a:xfrm>
-          <a:prstGeom prst="rect">
-            <a:avLst/>
-          </a:prstGeom>
-          <a:noFill/>
-          <a:ln/>
-        </p:spPr>
-        <p:txBody>
-          <a:bodyPr wrap="square" lIns="0" tIns="0" rIns="0" bIns="0" rtlCol="0" anchor="t"/>
-          <a:lstStyle/>
-          <a:p>
-            <a:pPr marL="0" indent="0">
-              <a:buNone/>
-            </a:pPr>
-            <a:r>
-              <a:rPr lang="en-US" sz="1000" i="1" dirty="0">
-                <a:solidFill>
-                  <a:srgbClr val="475569"/>
-                </a:solidFill>
-                <a:latin typeface="Calibri" pitchFamily="34" charset="0"/>
-                <a:ea typeface="Calibri" pitchFamily="34" charset="-122"/>
-                <a:cs typeface="Calibri" pitchFamily="34" charset="-120"/>
-              </a:rPr>
-              <a:t>—  Pipeline architecture + project flowchart</a:t>
-            </a:r>
-            <a:endParaRPr lang="en-US" sz="1000" dirty="0"/>
-          </a:p>
-        </p:txBody>
-      </p:sp>
-      <p:sp>
-        <p:nvSpPr>
-          <p:cNvPr id="24" name="Shape 21"/>
-          <p:cNvSpPr/>
-          <p:nvPr/>
-        </p:nvSpPr>
-        <p:spPr>
-          <a:xfrm>
-            <a:off x="457200" y="3319272"/>
-            <a:ext cx="292608" cy="292608"/>
-          </a:xfrm>
-          <a:prstGeom prst="ellipse">
-            <a:avLst/>
-          </a:prstGeom>
-          <a:solidFill>
-            <a:srgbClr val="F5A623"/>
-          </a:solidFill>
-          <a:ln w="12700">
-            <a:solidFill>
-              <a:srgbClr val="F5A623"/>
-            </a:solidFill>
-            <a:prstDash val="solid"/>
-          </a:ln>
-        </p:spPr>
-      </p:sp>
-      <p:sp>
-        <p:nvSpPr>
-          <p:cNvPr id="25" name="Text 22"/>
-          <p:cNvSpPr/>
-          <p:nvPr/>
-        </p:nvSpPr>
-        <p:spPr>
-          <a:xfrm>
-            <a:off x="457200" y="3319272"/>
-            <a:ext cx="292608" cy="292608"/>
-          </a:xfrm>
-          <a:prstGeom prst="rect">
-            <a:avLst/>
-          </a:prstGeom>
-          <a:noFill/>
-          <a:ln/>
-        </p:spPr>
-        <p:txBody>
-          <a:bodyPr wrap="square" lIns="0" tIns="0" rIns="0" bIns="0" rtlCol="0" anchor="ctr"/>
-          <a:lstStyle/>
-          <a:p>
-            <a:pPr marL="0" indent="0" algn="ctr">
-              <a:buNone/>
-            </a:pPr>
-            <a:r>
-              <a:rPr lang="en-US" sz="1100" b="1" dirty="0">
-                <a:solidFill>
-                  <a:srgbClr val="FFFFFF"/>
-                </a:solidFill>
-                <a:latin typeface="Calibri" pitchFamily="34" charset="0"/>
-                <a:ea typeface="Calibri" pitchFamily="34" charset="-122"/>
-                <a:cs typeface="Calibri" pitchFamily="34" charset="-120"/>
-              </a:rPr>
-              <a:t>5</a:t>
-            </a:r>
-            <a:endParaRPr lang="en-US" sz="1100" dirty="0"/>
-          </a:p>
-        </p:txBody>
-      </p:sp>
-      <p:sp>
-        <p:nvSpPr>
-          <p:cNvPr id="26" name="Text 23"/>
-          <p:cNvSpPr/>
-          <p:nvPr/>
-        </p:nvSpPr>
-        <p:spPr>
-          <a:xfrm>
-            <a:off x="841248" y="3300984"/>
-            <a:ext cx="3657600" cy="256032"/>
-          </a:xfrm>
-          <a:prstGeom prst="rect">
-            <a:avLst/>
-          </a:prstGeom>
-          <a:noFill/>
-          <a:ln/>
-        </p:spPr>
-        <p:txBody>
-          <a:bodyPr wrap="square" lIns="0" tIns="0" rIns="0" bIns="0" rtlCol="0" anchor="ctr"/>
-          <a:lstStyle/>
-          <a:p>
-            <a:pPr marL="0" indent="0">
-              <a:buNone/>
-            </a:pPr>
-            <a:r>
-              <a:rPr lang="en-US" sz="1250" b="1" dirty="0">
-                <a:solidFill>
-                  <a:srgbClr val="1E293B"/>
-                </a:solidFill>
-                <a:latin typeface="Calibri" pitchFamily="34" charset="0"/>
-                <a:ea typeface="Calibri" pitchFamily="34" charset="-122"/>
-                <a:cs typeface="Calibri" pitchFamily="34" charset="-120"/>
-              </a:rPr>
-              <a:t>Hardware &amp; Software</a:t>
-            </a:r>
-            <a:endParaRPr lang="en-US" sz="1250" dirty="0"/>
-          </a:p>
-        </p:txBody>
-      </p:sp>
-      <p:sp>
-        <p:nvSpPr>
-          <p:cNvPr id="27" name="Text 24"/>
-          <p:cNvSpPr/>
-          <p:nvPr/>
-        </p:nvSpPr>
-        <p:spPr>
-          <a:xfrm>
-            <a:off x="841248" y="3538728"/>
-            <a:ext cx="3840480" cy="228600"/>
-          </a:xfrm>
-          <a:prstGeom prst="rect">
-            <a:avLst/>
-          </a:prstGeom>
-          <a:noFill/>
-          <a:ln/>
-        </p:spPr>
-        <p:txBody>
-          <a:bodyPr wrap="square" lIns="0" tIns="0" rIns="0" bIns="0" rtlCol="0" anchor="t"/>
-          <a:lstStyle/>
-          <a:p>
-            <a:pPr marL="0" indent="0">
-              <a:buNone/>
-            </a:pPr>
-            <a:r>
-              <a:rPr lang="en-US" sz="1000" i="1" dirty="0">
-                <a:solidFill>
-                  <a:srgbClr val="475569"/>
-                </a:solidFill>
-                <a:latin typeface="Calibri" pitchFamily="34" charset="0"/>
-                <a:ea typeface="Calibri" pitchFamily="34" charset="-122"/>
-                <a:cs typeface="Calibri" pitchFamily="34" charset="-120"/>
-              </a:rPr>
-              <a:t>—  Free Kaggle T4×2, HuggingFace, TRL, PEFT</a:t>
-            </a:r>
-            <a:endParaRPr lang="en-US" sz="1000" dirty="0"/>
-          </a:p>
-        </p:txBody>
-      </p:sp>
-      <p:sp>
-        <p:nvSpPr>
-          <p:cNvPr id="28" name="Shape 25"/>
-          <p:cNvSpPr/>
-          <p:nvPr/>
-        </p:nvSpPr>
-        <p:spPr>
-          <a:xfrm>
-            <a:off x="457200" y="3813048"/>
-            <a:ext cx="292608" cy="292608"/>
-          </a:xfrm>
-          <a:prstGeom prst="ellipse">
-            <a:avLst/>
-          </a:prstGeom>
-          <a:solidFill>
-            <a:srgbClr val="F5A623"/>
-          </a:solidFill>
-          <a:ln w="12700">
-            <a:solidFill>
-              <a:srgbClr val="F5A623"/>
-            </a:solidFill>
-            <a:prstDash val="solid"/>
-          </a:ln>
-        </p:spPr>
-      </p:sp>
-      <p:sp>
-        <p:nvSpPr>
-          <p:cNvPr id="29" name="Text 26"/>
-          <p:cNvSpPr/>
-          <p:nvPr/>
-        </p:nvSpPr>
-        <p:spPr>
-          <a:xfrm>
-            <a:off x="457200" y="3813048"/>
-            <a:ext cx="292608" cy="292608"/>
-          </a:xfrm>
-          <a:prstGeom prst="rect">
-            <a:avLst/>
-          </a:prstGeom>
-          <a:noFill/>
-          <a:ln/>
-        </p:spPr>
-        <p:txBody>
-          <a:bodyPr wrap="square" lIns="0" tIns="0" rIns="0" bIns="0" rtlCol="0" anchor="ctr"/>
-          <a:lstStyle/>
-          <a:p>
-            <a:pPr marL="0" indent="0" algn="ctr">
-              <a:buNone/>
-            </a:pPr>
-            <a:r>
-              <a:rPr lang="en-US" sz="1100" b="1" dirty="0">
-                <a:solidFill>
-                  <a:srgbClr val="FFFFFF"/>
-                </a:solidFill>
-                <a:latin typeface="Calibri" pitchFamily="34" charset="0"/>
-                <a:ea typeface="Calibri" pitchFamily="34" charset="-122"/>
-                <a:cs typeface="Calibri" pitchFamily="34" charset="-120"/>
-              </a:rPr>
-              <a:t>6</a:t>
-            </a:r>
-            <a:endParaRPr lang="en-US" sz="1100" dirty="0"/>
-          </a:p>
-        </p:txBody>
-      </p:sp>
-      <p:sp>
-        <p:nvSpPr>
-          <p:cNvPr id="30" name="Text 27"/>
-          <p:cNvSpPr/>
-          <p:nvPr/>
-        </p:nvSpPr>
-        <p:spPr>
-          <a:xfrm>
-            <a:off x="841248" y="3794760"/>
-            <a:ext cx="3657600" cy="256032"/>
-          </a:xfrm>
-          <a:prstGeom prst="rect">
-            <a:avLst/>
-          </a:prstGeom>
-          <a:noFill/>
-          <a:ln/>
-        </p:spPr>
-        <p:txBody>
-          <a:bodyPr wrap="square" lIns="0" tIns="0" rIns="0" bIns="0" rtlCol="0" anchor="ctr"/>
-          <a:lstStyle/>
-          <a:p>
-            <a:pPr marL="0" indent="0">
-              <a:buNone/>
-            </a:pPr>
-            <a:r>
-              <a:rPr lang="en-US" sz="1250" b="1" dirty="0">
-                <a:solidFill>
-                  <a:srgbClr val="1E293B"/>
-                </a:solidFill>
-                <a:latin typeface="Calibri" pitchFamily="34" charset="0"/>
-                <a:ea typeface="Calibri" pitchFamily="34" charset="-122"/>
-                <a:cs typeface="Calibri" pitchFamily="34" charset="-120"/>
-              </a:rPr>
-              <a:t>Dataset Construction</a:t>
-            </a:r>
-            <a:endParaRPr lang="en-US" sz="1250" dirty="0"/>
-          </a:p>
-        </p:txBody>
-      </p:sp>
-      <p:sp>
-        <p:nvSpPr>
-          <p:cNvPr id="31" name="Text 28"/>
-          <p:cNvSpPr/>
-          <p:nvPr/>
-        </p:nvSpPr>
-        <p:spPr>
-          <a:xfrm>
-            <a:off x="841248" y="4032504"/>
-            <a:ext cx="3840480" cy="228600"/>
-          </a:xfrm>
-          <a:prstGeom prst="rect">
-            <a:avLst/>
-          </a:prstGeom>
-          <a:noFill/>
-          <a:ln/>
-        </p:spPr>
-        <p:txBody>
-          <a:bodyPr wrap="square" lIns="0" tIns="0" rIns="0" bIns="0" rtlCol="0" anchor="t"/>
-          <a:lstStyle/>
-          <a:p>
-            <a:pPr marL="0" indent="0">
-              <a:buNone/>
-            </a:pPr>
-            <a:r>
-              <a:rPr lang="en-US" sz="1000" i="1" dirty="0">
-                <a:solidFill>
-                  <a:srgbClr val="475569"/>
-                </a:solidFill>
-                <a:latin typeface="Calibri" pitchFamily="34" charset="0"/>
-                <a:ea typeface="Calibri" pitchFamily="34" charset="-122"/>
-                <a:cs typeface="Calibri" pitchFamily="34" charset="-120"/>
-              </a:rPr>
-              <a:t>—  HH-RLHF + LMSYS → 4 000 balanced pairs</a:t>
-            </a:r>
-            <a:endParaRPr lang="en-US" sz="1000" dirty="0"/>
-          </a:p>
-        </p:txBody>
-      </p:sp>
-      <p:sp>
-        <p:nvSpPr>
-          <p:cNvPr id="32" name="Shape 29"/>
-          <p:cNvSpPr/>
-          <p:nvPr/>
-        </p:nvSpPr>
-        <p:spPr>
-          <a:xfrm>
-            <a:off x="4754880" y="1344168"/>
-            <a:ext cx="292608" cy="292608"/>
-          </a:xfrm>
-          <a:prstGeom prst="ellipse">
-            <a:avLst/>
-          </a:prstGeom>
-          <a:solidFill>
-            <a:srgbClr val="0F1E45"/>
-          </a:solidFill>
-          <a:ln w="12700">
-            <a:solidFill>
-              <a:srgbClr val="0F1E45"/>
-            </a:solidFill>
-            <a:prstDash val="solid"/>
-          </a:ln>
-        </p:spPr>
-      </p:sp>
-      <p:sp>
-        <p:nvSpPr>
-          <p:cNvPr id="33" name="Text 30"/>
-          <p:cNvSpPr/>
-          <p:nvPr/>
-        </p:nvSpPr>
-        <p:spPr>
-          <a:xfrm>
-            <a:off x="4754880" y="1344168"/>
-            <a:ext cx="292608" cy="292608"/>
-          </a:xfrm>
-          <a:prstGeom prst="rect">
-            <a:avLst/>
-          </a:prstGeom>
-          <a:noFill/>
-          <a:ln/>
-        </p:spPr>
-        <p:txBody>
-          <a:bodyPr wrap="square" lIns="0" tIns="0" rIns="0" bIns="0" rtlCol="0" anchor="ctr"/>
-          <a:lstStyle/>
-          <a:p>
-            <a:pPr marL="0" indent="0" algn="ctr">
-              <a:buNone/>
-            </a:pPr>
-            <a:r>
-              <a:rPr lang="en-US" sz="1100" b="1" dirty="0">
-                <a:solidFill>
-                  <a:srgbClr val="FFFFFF"/>
-                </a:solidFill>
-                <a:latin typeface="Calibri" pitchFamily="34" charset="0"/>
-                <a:ea typeface="Calibri" pitchFamily="34" charset="-122"/>
-                <a:cs typeface="Calibri" pitchFamily="34" charset="-120"/>
-              </a:rPr>
-              <a:t>7</a:t>
-            </a:r>
-            <a:endParaRPr lang="en-US" sz="1100" dirty="0"/>
-          </a:p>
-        </p:txBody>
-      </p:sp>
-      <p:sp>
-        <p:nvSpPr>
-          <p:cNvPr id="34" name="Text 31"/>
-          <p:cNvSpPr/>
-          <p:nvPr/>
-        </p:nvSpPr>
-        <p:spPr>
-          <a:xfrm>
-            <a:off x="5138928" y="1325880"/>
-            <a:ext cx="3657600" cy="256032"/>
-          </a:xfrm>
-          <a:prstGeom prst="rect">
-            <a:avLst/>
-          </a:prstGeom>
-          <a:noFill/>
-          <a:ln/>
-        </p:spPr>
-        <p:txBody>
-          <a:bodyPr wrap="square" lIns="0" tIns="0" rIns="0" bIns="0" rtlCol="0" anchor="ctr"/>
-          <a:lstStyle/>
-          <a:p>
-            <a:pPr marL="0" indent="0">
-              <a:buNone/>
-            </a:pPr>
-            <a:r>
-              <a:rPr lang="en-US" sz="1250" b="1" dirty="0">
-                <a:solidFill>
-                  <a:srgbClr val="1E293B"/>
-                </a:solidFill>
-                <a:latin typeface="Calibri" pitchFamily="34" charset="0"/>
-                <a:ea typeface="Calibri" pitchFamily="34" charset="-122"/>
-                <a:cs typeface="Calibri" pitchFamily="34" charset="-120"/>
-              </a:rPr>
-              <a:t>Reward Model</a:t>
-            </a:r>
-            <a:endParaRPr lang="en-US" sz="1250" dirty="0"/>
-          </a:p>
-        </p:txBody>
-      </p:sp>
-      <p:sp>
-        <p:nvSpPr>
-          <p:cNvPr id="35" name="Text 32"/>
-          <p:cNvSpPr/>
-          <p:nvPr/>
-        </p:nvSpPr>
-        <p:spPr>
-          <a:xfrm>
-            <a:off x="5138928" y="1563624"/>
-            <a:ext cx="3840480" cy="228600"/>
-          </a:xfrm>
-          <a:prstGeom prst="rect">
-            <a:avLst/>
-          </a:prstGeom>
-          <a:noFill/>
-          <a:ln/>
-        </p:spPr>
-        <p:txBody>
-          <a:bodyPr wrap="square" lIns="0" tIns="0" rIns="0" bIns="0" rtlCol="0" anchor="t"/>
-          <a:lstStyle/>
-          <a:p>
-            <a:pPr marL="0" indent="0">
-              <a:buNone/>
-            </a:pPr>
-            <a:r>
-              <a:rPr lang="en-US" sz="1000" i="1" dirty="0">
-                <a:solidFill>
-                  <a:srgbClr val="475569"/>
-                </a:solidFill>
-                <a:latin typeface="Calibri" pitchFamily="34" charset="0"/>
-                <a:ea typeface="Calibri" pitchFamily="34" charset="-122"/>
-                <a:cs typeface="Calibri" pitchFamily="34" charset="-120"/>
-              </a:rPr>
-              <a:t>—  DeBERTa-v3-base + LoRA, Bradley-Terry loss</a:t>
-            </a:r>
-            <a:endParaRPr lang="en-US" sz="1000" dirty="0"/>
-          </a:p>
-        </p:txBody>
-      </p:sp>
-      <p:sp>
-        <p:nvSpPr>
-          <p:cNvPr id="36" name="Shape 33"/>
-          <p:cNvSpPr/>
-          <p:nvPr/>
-        </p:nvSpPr>
-        <p:spPr>
-          <a:xfrm>
-            <a:off x="4754880" y="1837944"/>
-            <a:ext cx="292608" cy="292608"/>
-          </a:xfrm>
-          <a:prstGeom prst="ellipse">
-            <a:avLst/>
-          </a:prstGeom>
-          <a:solidFill>
-            <a:srgbClr val="0F1E45"/>
-          </a:solidFill>
-          <a:ln w="12700">
-            <a:solidFill>
-              <a:srgbClr val="0F1E45"/>
-            </a:solidFill>
-            <a:prstDash val="solid"/>
-          </a:ln>
-        </p:spPr>
-      </p:sp>
-      <p:sp>
-        <p:nvSpPr>
-          <p:cNvPr id="37" name="Text 34"/>
-          <p:cNvSpPr/>
-          <p:nvPr/>
-        </p:nvSpPr>
-        <p:spPr>
-          <a:xfrm>
-            <a:off x="4754880" y="1837944"/>
-            <a:ext cx="292608" cy="292608"/>
-          </a:xfrm>
-          <a:prstGeom prst="rect">
-            <a:avLst/>
-          </a:prstGeom>
-          <a:noFill/>
-          <a:ln/>
-        </p:spPr>
-        <p:txBody>
-          <a:bodyPr wrap="square" lIns="0" tIns="0" rIns="0" bIns="0" rtlCol="0" anchor="ctr"/>
-          <a:lstStyle/>
-          <a:p>
-            <a:pPr marL="0" indent="0" algn="ctr">
-              <a:buNone/>
-            </a:pPr>
-            <a:r>
-              <a:rPr lang="en-US" sz="1100" b="1" dirty="0">
-                <a:solidFill>
-                  <a:srgbClr val="FFFFFF"/>
-                </a:solidFill>
-                <a:latin typeface="Calibri" pitchFamily="34" charset="0"/>
-                <a:ea typeface="Calibri" pitchFamily="34" charset="-122"/>
-                <a:cs typeface="Calibri" pitchFamily="34" charset="-120"/>
-              </a:rPr>
-              <a:t>8</a:t>
-            </a:r>
-            <a:endParaRPr lang="en-US" sz="1100" dirty="0"/>
-          </a:p>
-        </p:txBody>
-      </p:sp>
-      <p:sp>
-        <p:nvSpPr>
-          <p:cNvPr id="38" name="Text 35"/>
-          <p:cNvSpPr/>
-          <p:nvPr/>
-        </p:nvSpPr>
-        <p:spPr>
-          <a:xfrm>
-            <a:off x="5138928" y="1819656"/>
-            <a:ext cx="3657600" cy="256032"/>
-          </a:xfrm>
-          <a:prstGeom prst="rect">
-            <a:avLst/>
-          </a:prstGeom>
-          <a:noFill/>
-          <a:ln/>
-        </p:spPr>
-        <p:txBody>
-          <a:bodyPr wrap="square" lIns="0" tIns="0" rIns="0" bIns="0" rtlCol="0" anchor="ctr"/>
-          <a:lstStyle/>
-          <a:p>
-            <a:pPr marL="0" indent="0">
-              <a:buNone/>
-            </a:pPr>
-            <a:r>
-              <a:rPr lang="en-US" sz="1250" b="1" dirty="0">
-                <a:solidFill>
-                  <a:srgbClr val="1E293B"/>
-                </a:solidFill>
-                <a:latin typeface="Calibri" pitchFamily="34" charset="0"/>
-                <a:ea typeface="Calibri" pitchFamily="34" charset="-122"/>
-                <a:cs typeface="Calibri" pitchFamily="34" charset="-120"/>
-              </a:rPr>
-              <a:t>DPO Fine-Tuning</a:t>
-            </a:r>
-            <a:endParaRPr lang="en-US" sz="1250" dirty="0"/>
-          </a:p>
-        </p:txBody>
-      </p:sp>
-      <p:sp>
-        <p:nvSpPr>
-          <p:cNvPr id="39" name="Text 36"/>
-          <p:cNvSpPr/>
-          <p:nvPr/>
-        </p:nvSpPr>
-        <p:spPr>
-          <a:xfrm>
-            <a:off x="5138928" y="2057400"/>
-            <a:ext cx="3840480" cy="228600"/>
-          </a:xfrm>
-          <a:prstGeom prst="rect">
-            <a:avLst/>
-          </a:prstGeom>
-          <a:noFill/>
-          <a:ln/>
-        </p:spPr>
-        <p:txBody>
-          <a:bodyPr wrap="square" lIns="0" tIns="0" rIns="0" bIns="0" rtlCol="0" anchor="t"/>
-          <a:lstStyle/>
-          <a:p>
-            <a:pPr marL="0" indent="0">
-              <a:buNone/>
-            </a:pPr>
-            <a:r>
-              <a:rPr lang="en-US" sz="1000" i="1" dirty="0">
-                <a:solidFill>
-                  <a:srgbClr val="475569"/>
-                </a:solidFill>
-                <a:latin typeface="Calibri" pitchFamily="34" charset="0"/>
-                <a:ea typeface="Calibri" pitchFamily="34" charset="-122"/>
-                <a:cs typeface="Calibri" pitchFamily="34" charset="-120"/>
-              </a:rPr>
-              <a:t>—  TinyLlama-1.1B + 4-bit NF4 + LoRA</a:t>
-            </a:r>
-            <a:endParaRPr lang="en-US" sz="1000" dirty="0"/>
-          </a:p>
-        </p:txBody>
-      </p:sp>
-      <p:sp>
-        <p:nvSpPr>
-          <p:cNvPr id="40" name="Shape 37"/>
-          <p:cNvSpPr/>
-          <p:nvPr/>
-        </p:nvSpPr>
-        <p:spPr>
-          <a:xfrm>
-            <a:off x="4754880" y="2331720"/>
-            <a:ext cx="292608" cy="292608"/>
-          </a:xfrm>
-          <a:prstGeom prst="ellipse">
-            <a:avLst/>
-          </a:prstGeom>
-          <a:solidFill>
-            <a:srgbClr val="0F1E45"/>
-          </a:solidFill>
-          <a:ln w="12700">
-            <a:solidFill>
-              <a:srgbClr val="0F1E45"/>
-            </a:solidFill>
-            <a:prstDash val="solid"/>
-          </a:ln>
-        </p:spPr>
-      </p:sp>
-      <p:sp>
-        <p:nvSpPr>
-          <p:cNvPr id="41" name="Text 38"/>
-          <p:cNvSpPr/>
-          <p:nvPr/>
-        </p:nvSpPr>
-        <p:spPr>
-          <a:xfrm>
-            <a:off x="4754880" y="2331720"/>
-            <a:ext cx="292608" cy="292608"/>
-          </a:xfrm>
-          <a:prstGeom prst="rect">
-            <a:avLst/>
-          </a:prstGeom>
-          <a:noFill/>
-          <a:ln/>
-        </p:spPr>
-        <p:txBody>
-          <a:bodyPr wrap="square" lIns="0" tIns="0" rIns="0" bIns="0" rtlCol="0" anchor="ctr"/>
-          <a:lstStyle/>
-          <a:p>
-            <a:pPr marL="0" indent="0" algn="ctr">
-              <a:buNone/>
-            </a:pPr>
-            <a:r>
-              <a:rPr lang="en-US" sz="1100" b="1" dirty="0">
-                <a:solidFill>
-                  <a:srgbClr val="FFFFFF"/>
-                </a:solidFill>
-                <a:latin typeface="Calibri" pitchFamily="34" charset="0"/>
-                <a:ea typeface="Calibri" pitchFamily="34" charset="-122"/>
-                <a:cs typeface="Calibri" pitchFamily="34" charset="-120"/>
-              </a:rPr>
-              <a:t>9</a:t>
-            </a:r>
-            <a:endParaRPr lang="en-US" sz="1100" dirty="0"/>
-          </a:p>
-        </p:txBody>
-      </p:sp>
-      <p:sp>
-        <p:nvSpPr>
-          <p:cNvPr id="42" name="Text 39"/>
-          <p:cNvSpPr/>
-          <p:nvPr/>
-        </p:nvSpPr>
-        <p:spPr>
-          <a:xfrm>
-            <a:off x="5138928" y="2313432"/>
-            <a:ext cx="3657600" cy="256032"/>
-          </a:xfrm>
-          <a:prstGeom prst="rect">
-            <a:avLst/>
-          </a:prstGeom>
-          <a:noFill/>
-          <a:ln/>
-        </p:spPr>
-        <p:txBody>
-          <a:bodyPr wrap="square" lIns="0" tIns="0" rIns="0" bIns="0" rtlCol="0" anchor="ctr"/>
-          <a:lstStyle/>
-          <a:p>
-            <a:pPr marL="0" indent="0">
-              <a:buNone/>
-            </a:pPr>
-            <a:r>
-              <a:rPr lang="en-US" sz="1250" b="1" dirty="0">
-                <a:solidFill>
-                  <a:srgbClr val="1E293B"/>
-                </a:solidFill>
-                <a:latin typeface="Calibri" pitchFamily="34" charset="0"/>
-                <a:ea typeface="Calibri" pitchFamily="34" charset="-122"/>
-                <a:cs typeface="Calibri" pitchFamily="34" charset="-120"/>
-              </a:rPr>
-              <a:t>Implementation Status</a:t>
-            </a:r>
-            <a:endParaRPr lang="en-US" sz="1250" dirty="0"/>
-          </a:p>
-        </p:txBody>
-      </p:sp>
-      <p:sp>
-        <p:nvSpPr>
-          <p:cNvPr id="43" name="Text 40"/>
-          <p:cNvSpPr/>
-          <p:nvPr/>
-        </p:nvSpPr>
-        <p:spPr>
-          <a:xfrm>
-            <a:off x="5138928" y="2551176"/>
-            <a:ext cx="3840480" cy="228600"/>
-          </a:xfrm>
-          <a:prstGeom prst="rect">
-            <a:avLst/>
-          </a:prstGeom>
-          <a:noFill/>
-          <a:ln/>
-        </p:spPr>
-        <p:txBody>
-          <a:bodyPr wrap="square" lIns="0" tIns="0" rIns="0" bIns="0" rtlCol="0" anchor="t"/>
-          <a:lstStyle/>
-          <a:p>
-            <a:pPr marL="0" indent="0">
-              <a:buNone/>
-            </a:pPr>
-            <a:r>
-              <a:rPr lang="en-US" sz="1000" i="1" dirty="0">
-                <a:solidFill>
-                  <a:srgbClr val="475569"/>
-                </a:solidFill>
-                <a:latin typeface="Calibri" pitchFamily="34" charset="0"/>
-                <a:ea typeface="Calibri" pitchFamily="34" charset="-122"/>
-                <a:cs typeface="Calibri" pitchFamily="34" charset="-120"/>
-              </a:rPr>
-              <a:t>—  End-to-end pipeline complete</a:t>
-            </a:r>
-            <a:endParaRPr lang="en-US" sz="1000" dirty="0"/>
-          </a:p>
-        </p:txBody>
-      </p:sp>
-      <p:sp>
-        <p:nvSpPr>
-          <p:cNvPr id="44" name="Shape 41"/>
-          <p:cNvSpPr/>
-          <p:nvPr/>
-        </p:nvSpPr>
-        <p:spPr>
-          <a:xfrm>
-            <a:off x="4754880" y="2825496"/>
-            <a:ext cx="292608" cy="292608"/>
-          </a:xfrm>
-          <a:prstGeom prst="ellipse">
-            <a:avLst/>
-          </a:prstGeom>
-          <a:solidFill>
-            <a:srgbClr val="0F1E45"/>
-          </a:solidFill>
-          <a:ln w="12700">
-            <a:solidFill>
-              <a:srgbClr val="0F1E45"/>
-            </a:solidFill>
-            <a:prstDash val="solid"/>
-          </a:ln>
-        </p:spPr>
-      </p:sp>
-      <p:sp>
-        <p:nvSpPr>
-          <p:cNvPr id="45" name="Text 42"/>
-          <p:cNvSpPr/>
-          <p:nvPr/>
-        </p:nvSpPr>
-        <p:spPr>
-          <a:xfrm>
-            <a:off x="4754880" y="2825496"/>
-            <a:ext cx="292608" cy="292608"/>
-          </a:xfrm>
-          <a:prstGeom prst="rect">
-            <a:avLst/>
-          </a:prstGeom>
-          <a:noFill/>
-          <a:ln/>
-        </p:spPr>
-        <p:txBody>
-          <a:bodyPr wrap="square" lIns="0" tIns="0" rIns="0" bIns="0" rtlCol="0" anchor="ctr"/>
-          <a:lstStyle/>
-          <a:p>
-            <a:pPr marL="0" indent="0" algn="ctr">
-              <a:buNone/>
-            </a:pPr>
-            <a:r>
-              <a:rPr lang="en-US" sz="1100" b="1" dirty="0">
-                <a:solidFill>
-                  <a:srgbClr val="FFFFFF"/>
-                </a:solidFill>
-                <a:latin typeface="Calibri" pitchFamily="34" charset="0"/>
-                <a:ea typeface="Calibri" pitchFamily="34" charset="-122"/>
-                <a:cs typeface="Calibri" pitchFamily="34" charset="-120"/>
-              </a:rPr>
-              <a:t>10</a:t>
-            </a:r>
-            <a:endParaRPr lang="en-US" sz="1100" dirty="0"/>
-          </a:p>
-        </p:txBody>
-      </p:sp>
-      <p:sp>
-        <p:nvSpPr>
-          <p:cNvPr id="46" name="Text 43"/>
-          <p:cNvSpPr/>
-          <p:nvPr/>
-        </p:nvSpPr>
-        <p:spPr>
-          <a:xfrm>
-            <a:off x="5138928" y="2807208"/>
-            <a:ext cx="3657600" cy="256032"/>
-          </a:xfrm>
-          <a:prstGeom prst="rect">
-            <a:avLst/>
-          </a:prstGeom>
-          <a:noFill/>
-          <a:ln/>
-        </p:spPr>
-        <p:txBody>
-          <a:bodyPr wrap="square" lIns="0" tIns="0" rIns="0" bIns="0" rtlCol="0" anchor="ctr"/>
-          <a:lstStyle/>
-          <a:p>
-            <a:pPr marL="0" indent="0">
-              <a:buNone/>
-            </a:pPr>
-            <a:r>
-              <a:rPr lang="en-US" sz="1250" b="1" dirty="0">
-                <a:solidFill>
-                  <a:srgbClr val="1E293B"/>
-                </a:solidFill>
-                <a:latin typeface="Calibri" pitchFamily="34" charset="0"/>
-                <a:ea typeface="Calibri" pitchFamily="34" charset="-122"/>
-                <a:cs typeface="Calibri" pitchFamily="34" charset="-120"/>
-              </a:rPr>
-              <a:t>Results</a:t>
-            </a:r>
-            <a:endParaRPr lang="en-US" sz="1250" dirty="0"/>
-          </a:p>
-        </p:txBody>
-      </p:sp>
-      <p:sp>
-        <p:nvSpPr>
-          <p:cNvPr id="47" name="Text 44"/>
-          <p:cNvSpPr/>
-          <p:nvPr/>
-        </p:nvSpPr>
-        <p:spPr>
-          <a:xfrm>
-            <a:off x="5138928" y="3044952"/>
-            <a:ext cx="3840480" cy="228600"/>
-          </a:xfrm>
-          <a:prstGeom prst="rect">
-            <a:avLst/>
-          </a:prstGeom>
-          <a:noFill/>
-          <a:ln/>
-        </p:spPr>
-        <p:txBody>
-          <a:bodyPr wrap="square" lIns="0" tIns="0" rIns="0" bIns="0" rtlCol="0" anchor="t"/>
-          <a:lstStyle/>
-          <a:p>
-            <a:pPr marL="0" indent="0">
-              <a:buNone/>
-            </a:pPr>
-            <a:r>
-              <a:rPr lang="en-US" sz="1000" i="1" dirty="0">
-                <a:solidFill>
-                  <a:srgbClr val="475569"/>
-                </a:solidFill>
-                <a:latin typeface="Calibri" pitchFamily="34" charset="0"/>
-                <a:ea typeface="Calibri" pitchFamily="34" charset="-122"/>
-                <a:cs typeface="Calibri" pitchFamily="34" charset="-120"/>
-              </a:rPr>
-              <a:t>—  RM 68.2% % acc.  •  DPO 60.1 % win-rate</a:t>
-            </a:r>
-            <a:endParaRPr lang="en-US" sz="1000" dirty="0"/>
-          </a:p>
-        </p:txBody>
-      </p:sp>
-      <p:sp>
-        <p:nvSpPr>
-          <p:cNvPr id="48" name="Shape 45"/>
-          <p:cNvSpPr/>
-          <p:nvPr/>
-        </p:nvSpPr>
-        <p:spPr>
-          <a:xfrm>
-            <a:off x="4754880" y="3319272"/>
-            <a:ext cx="292608" cy="292608"/>
-          </a:xfrm>
-          <a:prstGeom prst="ellipse">
-            <a:avLst/>
-          </a:prstGeom>
-          <a:solidFill>
-            <a:srgbClr val="0F1E45"/>
-          </a:solidFill>
-          <a:ln w="12700">
-            <a:solidFill>
-              <a:srgbClr val="0F1E45"/>
-            </a:solidFill>
-            <a:prstDash val="solid"/>
-          </a:ln>
-        </p:spPr>
-      </p:sp>
-      <p:sp>
-        <p:nvSpPr>
-          <p:cNvPr id="49" name="Text 46"/>
-          <p:cNvSpPr/>
-          <p:nvPr/>
-        </p:nvSpPr>
-        <p:spPr>
-          <a:xfrm>
-            <a:off x="4754880" y="3319272"/>
-            <a:ext cx="292608" cy="292608"/>
-          </a:xfrm>
-          <a:prstGeom prst="rect">
-            <a:avLst/>
-          </a:prstGeom>
-          <a:noFill/>
-          <a:ln/>
-        </p:spPr>
-        <p:txBody>
-          <a:bodyPr wrap="square" lIns="0" tIns="0" rIns="0" bIns="0" rtlCol="0" anchor="ctr"/>
-          <a:lstStyle/>
-          <a:p>
-            <a:pPr marL="0" indent="0" algn="ctr">
-              <a:buNone/>
-            </a:pPr>
-            <a:r>
-              <a:rPr lang="en-US" sz="1100" b="1" dirty="0">
-                <a:solidFill>
-                  <a:srgbClr val="FFFFFF"/>
-                </a:solidFill>
-                <a:latin typeface="Calibri" pitchFamily="34" charset="0"/>
-                <a:ea typeface="Calibri" pitchFamily="34" charset="-122"/>
-                <a:cs typeface="Calibri" pitchFamily="34" charset="-120"/>
-              </a:rPr>
-              <a:t>11</a:t>
-            </a:r>
-            <a:endParaRPr lang="en-US" sz="1100" dirty="0"/>
-          </a:p>
-        </p:txBody>
-      </p:sp>
-      <p:sp>
-        <p:nvSpPr>
-          <p:cNvPr id="50" name="Text 47"/>
-          <p:cNvSpPr/>
-          <p:nvPr/>
-        </p:nvSpPr>
-        <p:spPr>
-          <a:xfrm>
-            <a:off x="5138928" y="3300984"/>
-            <a:ext cx="3657600" cy="256032"/>
-          </a:xfrm>
-          <a:prstGeom prst="rect">
-            <a:avLst/>
-          </a:prstGeom>
-          <a:noFill/>
-          <a:ln/>
-        </p:spPr>
-        <p:txBody>
-          <a:bodyPr wrap="square" lIns="0" tIns="0" rIns="0" bIns="0" rtlCol="0" anchor="ctr"/>
-          <a:lstStyle/>
-          <a:p>
-            <a:pPr marL="0" indent="0">
-              <a:buNone/>
-            </a:pPr>
-            <a:r>
-              <a:rPr lang="en-US" sz="1250" b="1" dirty="0">
-                <a:solidFill>
-                  <a:srgbClr val="1E293B"/>
-                </a:solidFill>
-                <a:latin typeface="Calibri" pitchFamily="34" charset="0"/>
-                <a:ea typeface="Calibri" pitchFamily="34" charset="-122"/>
-                <a:cs typeface="Calibri" pitchFamily="34" charset="-120"/>
-              </a:rPr>
-              <a:t>Advantages &amp; Applications</a:t>
-            </a:r>
-            <a:endParaRPr lang="en-US" sz="1250" dirty="0"/>
-          </a:p>
-        </p:txBody>
-      </p:sp>
-      <p:sp>
-        <p:nvSpPr>
-          <p:cNvPr id="51" name="Text 48"/>
-          <p:cNvSpPr/>
-          <p:nvPr/>
-        </p:nvSpPr>
-        <p:spPr>
-          <a:xfrm>
-            <a:off x="5138928" y="3538728"/>
-            <a:ext cx="3840480" cy="228600"/>
-          </a:xfrm>
-          <a:prstGeom prst="rect">
-            <a:avLst/>
-          </a:prstGeom>
-          <a:noFill/>
-          <a:ln/>
-        </p:spPr>
-        <p:txBody>
-          <a:bodyPr wrap="square" lIns="0" tIns="0" rIns="0" bIns="0" rtlCol="0" anchor="t"/>
-          <a:lstStyle/>
-          <a:p>
-            <a:pPr marL="0" indent="0">
-              <a:buNone/>
-            </a:pPr>
-            <a:r>
-              <a:rPr lang="en-US" sz="1000" i="1" dirty="0">
-                <a:solidFill>
-                  <a:srgbClr val="475569"/>
-                </a:solidFill>
-                <a:latin typeface="Calibri" pitchFamily="34" charset="0"/>
-                <a:ea typeface="Calibri" pitchFamily="34" charset="-122"/>
-                <a:cs typeface="Calibri" pitchFamily="34" charset="-120"/>
-              </a:rPr>
-              <a:t>—  Why this approach is useful</a:t>
-            </a:r>
-            <a:endParaRPr lang="en-US" sz="1000" dirty="0"/>
-          </a:p>
-        </p:txBody>
-      </p:sp>
-      <p:sp>
-        <p:nvSpPr>
-          <p:cNvPr id="52" name="Shape 49"/>
-          <p:cNvSpPr/>
-          <p:nvPr/>
-        </p:nvSpPr>
-        <p:spPr>
-          <a:xfrm>
-            <a:off x="4754880" y="3813048"/>
-            <a:ext cx="292608" cy="292608"/>
-          </a:xfrm>
-          <a:prstGeom prst="ellipse">
-            <a:avLst/>
-          </a:prstGeom>
-          <a:solidFill>
-            <a:srgbClr val="0F1E45"/>
-          </a:solidFill>
-          <a:ln w="12700">
-            <a:solidFill>
-              <a:srgbClr val="0F1E45"/>
-            </a:solidFill>
-            <a:prstDash val="solid"/>
-          </a:ln>
-        </p:spPr>
-      </p:sp>
-      <p:sp>
-        <p:nvSpPr>
-          <p:cNvPr id="53" name="Text 50"/>
-          <p:cNvSpPr/>
-          <p:nvPr/>
-        </p:nvSpPr>
-        <p:spPr>
-          <a:xfrm>
-            <a:off x="4754880" y="3813048"/>
-            <a:ext cx="292608" cy="292608"/>
-          </a:xfrm>
-          <a:prstGeom prst="rect">
-            <a:avLst/>
-          </a:prstGeom>
-          <a:noFill/>
-          <a:ln/>
-        </p:spPr>
-        <p:txBody>
-          <a:bodyPr wrap="square" lIns="0" tIns="0" rIns="0" bIns="0" rtlCol="0" anchor="ctr"/>
-          <a:lstStyle/>
-          <a:p>
-            <a:pPr marL="0" indent="0" algn="ctr">
-              <a:buNone/>
-            </a:pPr>
-            <a:r>
-              <a:rPr lang="en-US" sz="1100" b="1" dirty="0">
-                <a:solidFill>
-                  <a:srgbClr val="FFFFFF"/>
-                </a:solidFill>
-                <a:latin typeface="Calibri" pitchFamily="34" charset="0"/>
-                <a:ea typeface="Calibri" pitchFamily="34" charset="-122"/>
-                <a:cs typeface="Calibri" pitchFamily="34" charset="-120"/>
-              </a:rPr>
-              <a:t>12</a:t>
-            </a:r>
-            <a:endParaRPr lang="en-US" sz="1100" dirty="0"/>
-          </a:p>
-        </p:txBody>
-      </p:sp>
-      <p:sp>
-        <p:nvSpPr>
-          <p:cNvPr id="54" name="Text 51"/>
-          <p:cNvSpPr/>
-          <p:nvPr/>
-        </p:nvSpPr>
-        <p:spPr>
-          <a:xfrm>
-            <a:off x="5138928" y="3794760"/>
-            <a:ext cx="3657600" cy="256032"/>
-          </a:xfrm>
-          <a:prstGeom prst="rect">
-            <a:avLst/>
-          </a:prstGeom>
-          <a:noFill/>
-          <a:ln/>
-        </p:spPr>
-        <p:txBody>
-          <a:bodyPr wrap="square" lIns="0" tIns="0" rIns="0" bIns="0" rtlCol="0" anchor="ctr"/>
-          <a:lstStyle/>
-          <a:p>
-            <a:pPr marL="0" indent="0">
-              <a:buNone/>
-            </a:pPr>
-            <a:r>
-              <a:rPr lang="en-US" sz="1250" b="1" dirty="0">
-                <a:solidFill>
-                  <a:srgbClr val="1E293B"/>
-                </a:solidFill>
-                <a:latin typeface="Calibri" pitchFamily="34" charset="0"/>
-                <a:ea typeface="Calibri" pitchFamily="34" charset="-122"/>
-                <a:cs typeface="Calibri" pitchFamily="34" charset="-120"/>
-              </a:rPr>
-              <a:t>Future Scope</a:t>
-            </a:r>
-            <a:endParaRPr lang="en-US" sz="1250" dirty="0"/>
-          </a:p>
-        </p:txBody>
-      </p:sp>
-      <p:sp>
-        <p:nvSpPr>
-          <p:cNvPr id="55" name="Text 52"/>
-          <p:cNvSpPr/>
-          <p:nvPr/>
-        </p:nvSpPr>
-        <p:spPr>
-          <a:xfrm>
-            <a:off x="5138928" y="4032504"/>
-            <a:ext cx="3840480" cy="228600"/>
-          </a:xfrm>
-          <a:prstGeom prst="rect">
-            <a:avLst/>
-          </a:prstGeom>
-          <a:noFill/>
-          <a:ln/>
-        </p:spPr>
-        <p:txBody>
-          <a:bodyPr wrap="square" lIns="0" tIns="0" rIns="0" bIns="0" rtlCol="0" anchor="t"/>
-          <a:lstStyle/>
-          <a:p>
-            <a:pPr marL="0" indent="0">
-              <a:buNone/>
-            </a:pPr>
-            <a:r>
-              <a:rPr lang="en-US" sz="1000" i="1" dirty="0">
-                <a:solidFill>
-                  <a:srgbClr val="475569"/>
-                </a:solidFill>
-                <a:latin typeface="Calibri" pitchFamily="34" charset="0"/>
-                <a:ea typeface="Calibri" pitchFamily="34" charset="-122"/>
-                <a:cs typeface="Calibri" pitchFamily="34" charset="-120"/>
-              </a:rPr>
-              <a:t>—  SFT stage, scale-up, ensemble RMs</a:t>
-            </a:r>
-            <a:endParaRPr lang="en-US" sz="1000" dirty="0"/>
-          </a:p>
-        </p:txBody>
-      </p:sp>
-    </p:spTree>
-  </p:cSld>
-  <p:clrMapOvr>
-    <a:masterClrMapping/>
-  </p:clrMapOvr>
-</p:sld>
-</file>
-
-<file path=ppt/slides/slide3.xml><?xml version="1.0" encoding="utf-8"?>
 <p:sld xmlns:a="http://schemas.openxmlformats.org/drawingml/2006/main" xmlns:r="http://schemas.openxmlformats.org/officeDocument/2006/relationships" xmlns:p="http://schemas.openxmlformats.org/presentationml/2006/main">
   <p:cSld name="Slide 3">
     <p:spTree>
@@ -19350,7 +15682,7 @@
 </p:sld>
 </file>
 
-<file path=ppt/slides/slide4.xml><?xml version="1.0" encoding="utf-8"?>
+<file path=ppt/slides/slide3.xml><?xml version="1.0" encoding="utf-8"?>
 <p:sld xmlns:a="http://schemas.openxmlformats.org/drawingml/2006/main" xmlns:r="http://schemas.openxmlformats.org/officeDocument/2006/relationships" xmlns:p="http://schemas.openxmlformats.org/presentationml/2006/main">
   <p:cSld name="Slide 4">
     <p:spTree>
@@ -21818,7 +18150,7 @@
 </p:sld>
 </file>
 
-<file path=ppt/slides/slide5.xml><?xml version="1.0" encoding="utf-8"?>
+<file path=ppt/slides/slide4.xml><?xml version="1.0" encoding="utf-8"?>
 <p:sld xmlns:a="http://schemas.openxmlformats.org/drawingml/2006/main" xmlns:r="http://schemas.openxmlformats.org/officeDocument/2006/relationships" xmlns:p="http://schemas.openxmlformats.org/presentationml/2006/main">
   <p:cSld name="Slide 5">
     <p:spTree>
@@ -22852,7 +19184,7 @@
 </p:sld>
 </file>
 
-<file path=ppt/slides/slide6.xml><?xml version="1.0" encoding="utf-8"?>
+<file path=ppt/slides/slide5.xml><?xml version="1.0" encoding="utf-8"?>
 <p:sld xmlns:a="http://schemas.openxmlformats.org/drawingml/2006/main" xmlns:r="http://schemas.openxmlformats.org/officeDocument/2006/relationships" xmlns:p="http://schemas.openxmlformats.org/presentationml/2006/main">
   <p:cSld name="Slide 6">
     <p:spTree>
@@ -24547,7 +20879,7 @@
 </p:sld>
 </file>
 
-<file path=ppt/slides/slide7.xml><?xml version="1.0" encoding="utf-8"?>
+<file path=ppt/slides/slide6.xml><?xml version="1.0" encoding="utf-8"?>
 <p:sld xmlns:a="http://schemas.openxmlformats.org/drawingml/2006/main" xmlns:r="http://schemas.openxmlformats.org/officeDocument/2006/relationships" xmlns:p="http://schemas.openxmlformats.org/presentationml/2006/main">
   <p:cSld name="Slide 7">
     <p:spTree>
@@ -24886,7 +21218,7 @@
 </p:sld>
 </file>
 
-<file path=ppt/slides/slide8.xml><?xml version="1.0" encoding="utf-8"?>
+<file path=ppt/slides/slide7.xml><?xml version="1.0" encoding="utf-8"?>
 <p:sld xmlns:a="http://schemas.openxmlformats.org/drawingml/2006/main" xmlns:r="http://schemas.openxmlformats.org/officeDocument/2006/relationships" xmlns:p="http://schemas.openxmlformats.org/presentationml/2006/main">
   <p:cSld name="Slide 8">
     <p:spTree>
@@ -26774,7 +23106,7 @@
 </p:sld>
 </file>
 
-<file path=ppt/slides/slide9.xml><?xml version="1.0" encoding="utf-8"?>
+<file path=ppt/slides/slide8.xml><?xml version="1.0" encoding="utf-8"?>
 <p:sld xmlns:a="http://schemas.openxmlformats.org/drawingml/2006/main" xmlns:r="http://schemas.openxmlformats.org/officeDocument/2006/relationships" xmlns:p="http://schemas.openxmlformats.org/presentationml/2006/main">
   <p:cSld name="Slide 9">
     <p:spTree>
@@ -29449,6 +25781,2432 @@
           </a:graphicData>
         </a:graphic>
       </p:graphicFrame>
+    </p:spTree>
+  </p:cSld>
+  <p:clrMapOvr>
+    <a:masterClrMapping/>
+  </p:clrMapOvr>
+</p:sld>
+</file>
+
+<file path=ppt/slides/slide9.xml><?xml version="1.0" encoding="utf-8"?>
+<p:sld xmlns:a="http://schemas.openxmlformats.org/drawingml/2006/main" xmlns:r="http://schemas.openxmlformats.org/officeDocument/2006/relationships" xmlns:p="http://schemas.openxmlformats.org/presentationml/2006/main">
+  <p:cSld name="Slide 10">
+    <p:spTree>
+      <p:nvGrpSpPr>
+        <p:cNvPr id="1" name=""/>
+        <p:cNvGrpSpPr/>
+        <p:nvPr/>
+      </p:nvGrpSpPr>
+      <p:grpSpPr>
+        <a:xfrm>
+          <a:off x="0" y="0"/>
+          <a:ext cx="0" cy="0"/>
+          <a:chOff x="0" y="0"/>
+          <a:chExt cx="0" cy="0"/>
+        </a:xfrm>
+      </p:grpSpPr>
+      <p:pic>
+        <p:nvPicPr>
+          <p:cNvPr id="2" name="Image 0" descr="/home/claude/iiit_header.png"/>
+          <p:cNvPicPr>
+            <a:picLocks noChangeAspect="1"/>
+          </p:cNvPicPr>
+          <p:nvPr/>
+        </p:nvPicPr>
+        <p:blipFill>
+          <a:blip r:embed="rId3"/>
+          <a:stretch>
+            <a:fillRect/>
+          </a:stretch>
+        </p:blipFill>
+        <p:spPr>
+          <a:xfrm>
+            <a:off x="137160" y="45719"/>
+            <a:ext cx="8869680" cy="685799"/>
+          </a:xfrm>
+          <a:prstGeom prst="rect">
+            <a:avLst/>
+          </a:prstGeom>
+        </p:spPr>
+      </p:pic>
+      <p:sp>
+        <p:nvSpPr>
+          <p:cNvPr id="3" name="Shape 0"/>
+          <p:cNvSpPr/>
+          <p:nvPr/>
+        </p:nvSpPr>
+        <p:spPr>
+          <a:xfrm>
+            <a:off x="0" y="713232"/>
+            <a:ext cx="73152" cy="4160520"/>
+          </a:xfrm>
+          <a:prstGeom prst="rect">
+            <a:avLst/>
+          </a:prstGeom>
+          <a:solidFill>
+            <a:srgbClr val="F5A623"/>
+          </a:solidFill>
+          <a:ln w="12700">
+            <a:solidFill>
+              <a:srgbClr val="F5A623"/>
+            </a:solidFill>
+            <a:prstDash val="solid"/>
+          </a:ln>
+        </p:spPr>
+      </p:sp>
+      <p:sp>
+        <p:nvSpPr>
+          <p:cNvPr id="4" name="Shape 1"/>
+          <p:cNvSpPr/>
+          <p:nvPr/>
+        </p:nvSpPr>
+        <p:spPr>
+          <a:xfrm>
+            <a:off x="274320" y="4892040"/>
+            <a:ext cx="8595360" cy="0"/>
+          </a:xfrm>
+          <a:prstGeom prst="line">
+            <a:avLst/>
+          </a:prstGeom>
+          <a:noFill/>
+          <a:ln w="9525">
+            <a:solidFill>
+              <a:srgbClr val="CBD5E1"/>
+            </a:solidFill>
+            <a:prstDash val="solid"/>
+          </a:ln>
+        </p:spPr>
+      </p:sp>
+      <p:sp>
+        <p:nvSpPr>
+          <p:cNvPr id="5" name="Text 2"/>
+          <p:cNvSpPr/>
+          <p:nvPr/>
+        </p:nvSpPr>
+        <p:spPr>
+          <a:xfrm>
+            <a:off x="274320" y="4937760"/>
+            <a:ext cx="5486400" cy="228600"/>
+          </a:xfrm>
+          <a:prstGeom prst="rect">
+            <a:avLst/>
+          </a:prstGeom>
+          <a:noFill/>
+          <a:ln/>
+        </p:spPr>
+        <p:txBody>
+          <a:bodyPr wrap="square" lIns="0" tIns="0" rIns="0" bIns="0" rtlCol="0" anchor="t"/>
+          <a:lstStyle/>
+          <a:p>
+            <a:pPr marL="0" indent="0">
+              <a:buNone/>
+            </a:pPr>
+            <a:r>
+              <a:rPr lang="en-US" sz="1200" dirty="0">
+                <a:solidFill>
+                  <a:srgbClr val="1E293B"/>
+                </a:solidFill>
+                <a:latin typeface="Calibri" pitchFamily="34" charset="0"/>
+                <a:ea typeface="Calibri" pitchFamily="34" charset="-122"/>
+                <a:cs typeface="Calibri" pitchFamily="34" charset="-120"/>
+              </a:rPr>
+              <a:t>RLHF: Reward Modeling + DPO</a:t>
+            </a:r>
+            <a:r>
+              <a:rPr lang="en-US" sz="1200" dirty="0">
+                <a:solidFill>
+                  <a:srgbClr val="94A3B8"/>
+                </a:solidFill>
+                <a:latin typeface="Calibri" pitchFamily="34" charset="0"/>
+                <a:ea typeface="Calibri" pitchFamily="34" charset="-122"/>
+                <a:cs typeface="Calibri" pitchFamily="34" charset="-120"/>
+              </a:rPr>
+              <a:t>   </a:t>
+            </a:r>
+            <a:endParaRPr lang="en-US" sz="1200" dirty="0"/>
+          </a:p>
+        </p:txBody>
+      </p:sp>
+      <p:sp>
+        <p:nvSpPr>
+          <p:cNvPr id="6" name="Text 3"/>
+          <p:cNvSpPr/>
+          <p:nvPr/>
+        </p:nvSpPr>
+        <p:spPr>
+          <a:xfrm>
+            <a:off x="6858000" y="4937760"/>
+            <a:ext cx="2011680" cy="228600"/>
+          </a:xfrm>
+          <a:prstGeom prst="rect">
+            <a:avLst/>
+          </a:prstGeom>
+          <a:noFill/>
+          <a:ln/>
+        </p:spPr>
+        <p:txBody>
+          <a:bodyPr wrap="square" lIns="0" tIns="0" rIns="0" bIns="0" rtlCol="0" anchor="t"/>
+          <a:lstStyle/>
+          <a:p>
+            <a:pPr marL="0" indent="0" algn="r">
+              <a:buNone/>
+            </a:pPr>
+            <a:r>
+              <a:rPr lang="en-US" sz="1200" dirty="0">
+                <a:solidFill>
+                  <a:srgbClr val="475569"/>
+                </a:solidFill>
+                <a:latin typeface="Calibri" pitchFamily="34" charset="0"/>
+                <a:ea typeface="Calibri" pitchFamily="34" charset="-122"/>
+                <a:cs typeface="Calibri" pitchFamily="34" charset="-120"/>
+              </a:rPr>
+              <a:t>Slide 9 / 16</a:t>
+            </a:r>
+            <a:endParaRPr lang="en-US" sz="1200" dirty="0"/>
+          </a:p>
+        </p:txBody>
+      </p:sp>
+      <p:sp>
+        <p:nvSpPr>
+          <p:cNvPr id="7" name="Text 4"/>
+          <p:cNvSpPr/>
+          <p:nvPr/>
+        </p:nvSpPr>
+        <p:spPr>
+          <a:xfrm>
+            <a:off x="274320" y="777240"/>
+            <a:ext cx="8595360" cy="365760"/>
+          </a:xfrm>
+          <a:prstGeom prst="rect">
+            <a:avLst/>
+          </a:prstGeom>
+          <a:noFill/>
+          <a:ln/>
+        </p:spPr>
+        <p:txBody>
+          <a:bodyPr wrap="square" lIns="0" tIns="0" rIns="0" bIns="0" rtlCol="0" anchor="ctr"/>
+          <a:lstStyle/>
+          <a:p>
+            <a:pPr marL="0" indent="0">
+              <a:buNone/>
+            </a:pPr>
+            <a:r>
+              <a:rPr lang="en-US" sz="1400" b="1" dirty="0">
+                <a:solidFill>
+                  <a:srgbClr val="1E293B"/>
+                </a:solidFill>
+                <a:latin typeface="Calibri" pitchFamily="34" charset="0"/>
+                <a:ea typeface="Calibri" pitchFamily="34" charset="-122"/>
+                <a:cs typeface="Calibri" pitchFamily="34" charset="-120"/>
+              </a:rPr>
+              <a:t>Reward Model Architecture</a:t>
+            </a:r>
+            <a:endParaRPr lang="en-US" sz="1400" dirty="0"/>
+          </a:p>
+        </p:txBody>
+      </p:sp>
+      <p:sp>
+        <p:nvSpPr>
+          <p:cNvPr id="8" name="Text 5"/>
+          <p:cNvSpPr/>
+          <p:nvPr/>
+        </p:nvSpPr>
+        <p:spPr>
+          <a:xfrm>
+            <a:off x="274320" y="1143000"/>
+            <a:ext cx="8595360" cy="274320"/>
+          </a:xfrm>
+          <a:prstGeom prst="rect">
+            <a:avLst/>
+          </a:prstGeom>
+          <a:noFill/>
+          <a:ln/>
+        </p:spPr>
+        <p:txBody>
+          <a:bodyPr wrap="square" lIns="0" tIns="0" rIns="0" bIns="0" rtlCol="0" anchor="ctr"/>
+          <a:lstStyle/>
+          <a:p>
+            <a:pPr marL="0" indent="0">
+              <a:buNone/>
+            </a:pPr>
+            <a:r>
+              <a:rPr lang="en-US" sz="1400" i="1" dirty="0">
+                <a:solidFill>
+                  <a:srgbClr val="475569"/>
+                </a:solidFill>
+                <a:latin typeface="Calibri" pitchFamily="34" charset="0"/>
+                <a:ea typeface="Calibri" pitchFamily="34" charset="-122"/>
+                <a:cs typeface="Calibri" pitchFamily="34" charset="-120"/>
+              </a:rPr>
+              <a:t>DeBERTa-v3-base + LoRA, Bradley-Terry pairwise loss</a:t>
+            </a:r>
+            <a:endParaRPr lang="en-US" sz="1400" dirty="0"/>
+          </a:p>
+        </p:txBody>
+      </p:sp>
+      <p:sp>
+        <p:nvSpPr>
+          <p:cNvPr id="9" name="Shape 6"/>
+          <p:cNvSpPr/>
+          <p:nvPr/>
+        </p:nvSpPr>
+        <p:spPr>
+          <a:xfrm>
+            <a:off x="388620" y="1554480"/>
+            <a:ext cx="1600200" cy="640080"/>
+          </a:xfrm>
+          <a:prstGeom prst="rect">
+            <a:avLst/>
+          </a:prstGeom>
+          <a:solidFill>
+            <a:srgbClr val="1E40AF"/>
+          </a:solidFill>
+          <a:ln w="12700">
+            <a:solidFill>
+              <a:srgbClr val="1E40AF"/>
+            </a:solidFill>
+            <a:prstDash val="solid"/>
+          </a:ln>
+        </p:spPr>
+      </p:sp>
+      <p:sp>
+        <p:nvSpPr>
+          <p:cNvPr id="10" name="Text 7"/>
+          <p:cNvSpPr/>
+          <p:nvPr/>
+        </p:nvSpPr>
+        <p:spPr>
+          <a:xfrm>
+            <a:off x="388620" y="1600200"/>
+            <a:ext cx="1600200" cy="274320"/>
+          </a:xfrm>
+          <a:prstGeom prst="rect">
+            <a:avLst/>
+          </a:prstGeom>
+          <a:noFill/>
+          <a:ln/>
+        </p:spPr>
+        <p:txBody>
+          <a:bodyPr wrap="square" lIns="0" tIns="0" rIns="0" bIns="0" rtlCol="0" anchor="ctr"/>
+          <a:lstStyle/>
+          <a:p>
+            <a:pPr marL="0" indent="0" algn="ctr">
+              <a:buNone/>
+            </a:pPr>
+            <a:r>
+              <a:rPr lang="en-US" sz="1200" b="1" dirty="0">
+                <a:solidFill>
+                  <a:srgbClr val="FFFFFF"/>
+                </a:solidFill>
+                <a:latin typeface="Calibri" pitchFamily="34" charset="0"/>
+                <a:ea typeface="Calibri" pitchFamily="34" charset="-122"/>
+                <a:cs typeface="Calibri" pitchFamily="34" charset="-120"/>
+              </a:rPr>
+              <a:t>Input Pair</a:t>
+            </a:r>
+            <a:endParaRPr lang="en-US" sz="1200" dirty="0"/>
+          </a:p>
+        </p:txBody>
+      </p:sp>
+      <p:sp>
+        <p:nvSpPr>
+          <p:cNvPr id="11" name="Text 8"/>
+          <p:cNvSpPr/>
+          <p:nvPr/>
+        </p:nvSpPr>
+        <p:spPr>
+          <a:xfrm>
+            <a:off x="388620" y="1856232"/>
+            <a:ext cx="1600200" cy="292608"/>
+          </a:xfrm>
+          <a:prstGeom prst="rect">
+            <a:avLst/>
+          </a:prstGeom>
+          <a:noFill/>
+          <a:ln/>
+        </p:spPr>
+        <p:txBody>
+          <a:bodyPr wrap="square" lIns="0" tIns="0" rIns="0" bIns="0" rtlCol="0" anchor="t"/>
+          <a:lstStyle/>
+          <a:p>
+            <a:pPr marL="0" indent="0" algn="ctr">
+              <a:buNone/>
+            </a:pPr>
+            <a:r>
+              <a:rPr lang="en-US" sz="1200" dirty="0">
+                <a:solidFill>
+                  <a:srgbClr val="FFFFFF"/>
+                </a:solidFill>
+                <a:latin typeface="Calibri" pitchFamily="34" charset="0"/>
+                <a:ea typeface="Calibri" pitchFamily="34" charset="-122"/>
+                <a:cs typeface="Calibri" pitchFamily="34" charset="-120"/>
+              </a:rPr>
+              <a:t>(prompt, response)</a:t>
+            </a:r>
+            <a:endParaRPr lang="en-US" sz="1200" dirty="0"/>
+          </a:p>
+        </p:txBody>
+      </p:sp>
+      <p:sp>
+        <p:nvSpPr>
+          <p:cNvPr id="12" name="Shape 9"/>
+          <p:cNvSpPr/>
+          <p:nvPr/>
+        </p:nvSpPr>
+        <p:spPr>
+          <a:xfrm>
+            <a:off x="2080260" y="1554480"/>
+            <a:ext cx="1600200" cy="640080"/>
+          </a:xfrm>
+          <a:prstGeom prst="rect">
+            <a:avLst/>
+          </a:prstGeom>
+          <a:solidFill>
+            <a:srgbClr val="0D9488"/>
+          </a:solidFill>
+          <a:ln w="12700">
+            <a:solidFill>
+              <a:srgbClr val="0D9488"/>
+            </a:solidFill>
+            <a:prstDash val="solid"/>
+          </a:ln>
+        </p:spPr>
+      </p:sp>
+      <p:sp>
+        <p:nvSpPr>
+          <p:cNvPr id="13" name="Text 10"/>
+          <p:cNvSpPr/>
+          <p:nvPr/>
+        </p:nvSpPr>
+        <p:spPr>
+          <a:xfrm>
+            <a:off x="2080260" y="1600200"/>
+            <a:ext cx="1600200" cy="274320"/>
+          </a:xfrm>
+          <a:prstGeom prst="rect">
+            <a:avLst/>
+          </a:prstGeom>
+          <a:noFill/>
+          <a:ln/>
+        </p:spPr>
+        <p:txBody>
+          <a:bodyPr wrap="square" lIns="0" tIns="0" rIns="0" bIns="0" rtlCol="0" anchor="ctr"/>
+          <a:lstStyle/>
+          <a:p>
+            <a:pPr marL="0" indent="0" algn="ctr">
+              <a:buNone/>
+            </a:pPr>
+            <a:r>
+              <a:rPr lang="en-US" sz="1200" b="1" dirty="0">
+                <a:solidFill>
+                  <a:srgbClr val="FFFFFF"/>
+                </a:solidFill>
+                <a:latin typeface="Calibri" pitchFamily="34" charset="0"/>
+                <a:ea typeface="Calibri" pitchFamily="34" charset="-122"/>
+                <a:cs typeface="Calibri" pitchFamily="34" charset="-120"/>
+              </a:rPr>
+              <a:t>DeBERTa-v3</a:t>
+            </a:r>
+            <a:endParaRPr lang="en-US" sz="1200" dirty="0"/>
+          </a:p>
+        </p:txBody>
+      </p:sp>
+      <p:sp>
+        <p:nvSpPr>
+          <p:cNvPr id="14" name="Text 11"/>
+          <p:cNvSpPr/>
+          <p:nvPr/>
+        </p:nvSpPr>
+        <p:spPr>
+          <a:xfrm>
+            <a:off x="2080260" y="1856232"/>
+            <a:ext cx="1600200" cy="292608"/>
+          </a:xfrm>
+          <a:prstGeom prst="rect">
+            <a:avLst/>
+          </a:prstGeom>
+          <a:noFill/>
+          <a:ln/>
+        </p:spPr>
+        <p:txBody>
+          <a:bodyPr wrap="square" lIns="0" tIns="0" rIns="0" bIns="0" rtlCol="0" anchor="t"/>
+          <a:lstStyle/>
+          <a:p>
+            <a:pPr marL="0" indent="0" algn="ctr">
+              <a:buNone/>
+            </a:pPr>
+            <a:r>
+              <a:rPr lang="en-US" sz="1200" dirty="0">
+                <a:solidFill>
+                  <a:srgbClr val="FFFFFF"/>
+                </a:solidFill>
+                <a:latin typeface="Calibri" pitchFamily="34" charset="0"/>
+                <a:ea typeface="Calibri" pitchFamily="34" charset="-122"/>
+                <a:cs typeface="Calibri" pitchFamily="34" charset="-120"/>
+              </a:rPr>
+              <a:t>184 M (fp32)</a:t>
+            </a:r>
+            <a:endParaRPr lang="en-US" sz="1200" dirty="0"/>
+          </a:p>
+        </p:txBody>
+      </p:sp>
+      <p:sp>
+        <p:nvSpPr>
+          <p:cNvPr id="15" name="Shape 12"/>
+          <p:cNvSpPr/>
+          <p:nvPr/>
+        </p:nvSpPr>
+        <p:spPr>
+          <a:xfrm>
+            <a:off x="3771900" y="1554480"/>
+            <a:ext cx="1600200" cy="640080"/>
+          </a:xfrm>
+          <a:prstGeom prst="rect">
+            <a:avLst/>
+          </a:prstGeom>
+          <a:solidFill>
+            <a:srgbClr val="10B981"/>
+          </a:solidFill>
+          <a:ln w="12700">
+            <a:solidFill>
+              <a:srgbClr val="10B981"/>
+            </a:solidFill>
+            <a:prstDash val="solid"/>
+          </a:ln>
+        </p:spPr>
+      </p:sp>
+      <p:sp>
+        <p:nvSpPr>
+          <p:cNvPr id="16" name="Text 13"/>
+          <p:cNvSpPr/>
+          <p:nvPr/>
+        </p:nvSpPr>
+        <p:spPr>
+          <a:xfrm>
+            <a:off x="3771900" y="1600200"/>
+            <a:ext cx="1600200" cy="274320"/>
+          </a:xfrm>
+          <a:prstGeom prst="rect">
+            <a:avLst/>
+          </a:prstGeom>
+          <a:noFill/>
+          <a:ln/>
+        </p:spPr>
+        <p:txBody>
+          <a:bodyPr wrap="square" lIns="0" tIns="0" rIns="0" bIns="0" rtlCol="0" anchor="ctr"/>
+          <a:lstStyle/>
+          <a:p>
+            <a:pPr marL="0" indent="0" algn="ctr">
+              <a:buNone/>
+            </a:pPr>
+            <a:r>
+              <a:rPr lang="en-US" sz="1200" b="1" dirty="0">
+                <a:solidFill>
+                  <a:srgbClr val="FFFFFF"/>
+                </a:solidFill>
+                <a:latin typeface="Calibri" pitchFamily="34" charset="0"/>
+                <a:ea typeface="Calibri" pitchFamily="34" charset="-122"/>
+                <a:cs typeface="Calibri" pitchFamily="34" charset="-120"/>
+              </a:rPr>
+              <a:t>LoRA q,k,v_proj</a:t>
+            </a:r>
+            <a:endParaRPr lang="en-US" sz="1200" dirty="0"/>
+          </a:p>
+        </p:txBody>
+      </p:sp>
+      <p:sp>
+        <p:nvSpPr>
+          <p:cNvPr id="17" name="Text 14"/>
+          <p:cNvSpPr/>
+          <p:nvPr/>
+        </p:nvSpPr>
+        <p:spPr>
+          <a:xfrm>
+            <a:off x="3771900" y="1856232"/>
+            <a:ext cx="1600200" cy="292608"/>
+          </a:xfrm>
+          <a:prstGeom prst="rect">
+            <a:avLst/>
+          </a:prstGeom>
+          <a:noFill/>
+          <a:ln/>
+        </p:spPr>
+        <p:txBody>
+          <a:bodyPr wrap="square" lIns="0" tIns="0" rIns="0" bIns="0" rtlCol="0" anchor="t"/>
+          <a:lstStyle/>
+          <a:p>
+            <a:pPr marL="0" indent="0" algn="ctr">
+              <a:buNone/>
+            </a:pPr>
+            <a:r>
+              <a:rPr lang="en-US" sz="1200" dirty="0">
+                <a:solidFill>
+                  <a:srgbClr val="FFFFFF"/>
+                </a:solidFill>
+                <a:latin typeface="Calibri" pitchFamily="34" charset="0"/>
+                <a:ea typeface="Calibri" pitchFamily="34" charset="-122"/>
+                <a:cs typeface="Calibri" pitchFamily="34" charset="-120"/>
+              </a:rPr>
+              <a:t>r = 32, α = 64</a:t>
+            </a:r>
+            <a:endParaRPr lang="en-US" sz="1200" dirty="0"/>
+          </a:p>
+        </p:txBody>
+      </p:sp>
+      <p:sp>
+        <p:nvSpPr>
+          <p:cNvPr id="18" name="Shape 15"/>
+          <p:cNvSpPr/>
+          <p:nvPr/>
+        </p:nvSpPr>
+        <p:spPr>
+          <a:xfrm>
+            <a:off x="5463540" y="1554480"/>
+            <a:ext cx="1600200" cy="640080"/>
+          </a:xfrm>
+          <a:prstGeom prst="rect">
+            <a:avLst/>
+          </a:prstGeom>
+          <a:solidFill>
+            <a:srgbClr val="0891B2"/>
+          </a:solidFill>
+          <a:ln w="12700">
+            <a:solidFill>
+              <a:srgbClr val="0891B2"/>
+            </a:solidFill>
+            <a:prstDash val="solid"/>
+          </a:ln>
+        </p:spPr>
+      </p:sp>
+      <p:sp>
+        <p:nvSpPr>
+          <p:cNvPr id="19" name="Text 16"/>
+          <p:cNvSpPr/>
+          <p:nvPr/>
+        </p:nvSpPr>
+        <p:spPr>
+          <a:xfrm>
+            <a:off x="5463540" y="1600200"/>
+            <a:ext cx="1600200" cy="274320"/>
+          </a:xfrm>
+          <a:prstGeom prst="rect">
+            <a:avLst/>
+          </a:prstGeom>
+          <a:noFill/>
+          <a:ln/>
+        </p:spPr>
+        <p:txBody>
+          <a:bodyPr wrap="square" lIns="0" tIns="0" rIns="0" bIns="0" rtlCol="0" anchor="ctr"/>
+          <a:lstStyle/>
+          <a:p>
+            <a:pPr marL="0" indent="0" algn="ctr">
+              <a:buNone/>
+            </a:pPr>
+            <a:r>
+              <a:rPr lang="en-US" sz="1200" b="1" dirty="0">
+                <a:solidFill>
+                  <a:srgbClr val="FFFFFF"/>
+                </a:solidFill>
+                <a:latin typeface="Calibri" pitchFamily="34" charset="0"/>
+                <a:ea typeface="Calibri" pitchFamily="34" charset="-122"/>
+                <a:cs typeface="Calibri" pitchFamily="34" charset="-120"/>
+              </a:rPr>
+              <a:t>Pooler</a:t>
+            </a:r>
+            <a:endParaRPr lang="en-US" sz="1200" dirty="0"/>
+          </a:p>
+        </p:txBody>
+      </p:sp>
+      <p:sp>
+        <p:nvSpPr>
+          <p:cNvPr id="20" name="Text 17"/>
+          <p:cNvSpPr/>
+          <p:nvPr/>
+        </p:nvSpPr>
+        <p:spPr>
+          <a:xfrm>
+            <a:off x="5463540" y="1856232"/>
+            <a:ext cx="1600200" cy="292608"/>
+          </a:xfrm>
+          <a:prstGeom prst="rect">
+            <a:avLst/>
+          </a:prstGeom>
+          <a:noFill/>
+          <a:ln/>
+        </p:spPr>
+        <p:txBody>
+          <a:bodyPr wrap="square" lIns="0" tIns="0" rIns="0" bIns="0" rtlCol="0" anchor="t"/>
+          <a:lstStyle/>
+          <a:p>
+            <a:pPr marL="0" indent="0" algn="ctr">
+              <a:buNone/>
+            </a:pPr>
+            <a:r>
+              <a:rPr lang="en-US" sz="1200" dirty="0">
+                <a:solidFill>
+                  <a:srgbClr val="FFFFFF"/>
+                </a:solidFill>
+                <a:latin typeface="Calibri" pitchFamily="34" charset="0"/>
+                <a:ea typeface="Calibri" pitchFamily="34" charset="-122"/>
+                <a:cs typeface="Calibri" pitchFamily="34" charset="-120"/>
+              </a:rPr>
+              <a:t>+ classifier head</a:t>
+            </a:r>
+            <a:endParaRPr lang="en-US" sz="1200" dirty="0"/>
+          </a:p>
+        </p:txBody>
+      </p:sp>
+      <p:sp>
+        <p:nvSpPr>
+          <p:cNvPr id="21" name="Shape 18"/>
+          <p:cNvSpPr/>
+          <p:nvPr/>
+        </p:nvSpPr>
+        <p:spPr>
+          <a:xfrm>
+            <a:off x="7155180" y="1554480"/>
+            <a:ext cx="1600200" cy="640080"/>
+          </a:xfrm>
+          <a:prstGeom prst="rect">
+            <a:avLst/>
+          </a:prstGeom>
+          <a:solidFill>
+            <a:srgbClr val="0F1E45"/>
+          </a:solidFill>
+          <a:ln w="12700">
+            <a:solidFill>
+              <a:srgbClr val="0F1E45"/>
+            </a:solidFill>
+            <a:prstDash val="solid"/>
+          </a:ln>
+        </p:spPr>
+      </p:sp>
+      <p:sp>
+        <p:nvSpPr>
+          <p:cNvPr id="22" name="Text 19"/>
+          <p:cNvSpPr/>
+          <p:nvPr/>
+        </p:nvSpPr>
+        <p:spPr>
+          <a:xfrm>
+            <a:off x="7155180" y="1600200"/>
+            <a:ext cx="1600200" cy="274320"/>
+          </a:xfrm>
+          <a:prstGeom prst="rect">
+            <a:avLst/>
+          </a:prstGeom>
+          <a:noFill/>
+          <a:ln/>
+        </p:spPr>
+        <p:txBody>
+          <a:bodyPr wrap="square" lIns="0" tIns="0" rIns="0" bIns="0" rtlCol="0" anchor="ctr"/>
+          <a:lstStyle/>
+          <a:p>
+            <a:pPr marL="0" indent="0" algn="ctr">
+              <a:buNone/>
+            </a:pPr>
+            <a:r>
+              <a:rPr lang="en-US" sz="1200" b="1" dirty="0">
+                <a:solidFill>
+                  <a:srgbClr val="FFFFFF"/>
+                </a:solidFill>
+                <a:latin typeface="Calibri" pitchFamily="34" charset="0"/>
+                <a:ea typeface="Calibri" pitchFamily="34" charset="-122"/>
+                <a:cs typeface="Calibri" pitchFamily="34" charset="-120"/>
+              </a:rPr>
+              <a:t>Reward</a:t>
+            </a:r>
+            <a:endParaRPr lang="en-US" sz="1200" dirty="0"/>
+          </a:p>
+        </p:txBody>
+      </p:sp>
+      <p:sp>
+        <p:nvSpPr>
+          <p:cNvPr id="23" name="Text 20"/>
+          <p:cNvSpPr/>
+          <p:nvPr/>
+        </p:nvSpPr>
+        <p:spPr>
+          <a:xfrm>
+            <a:off x="7155180" y="1856232"/>
+            <a:ext cx="1600200" cy="292608"/>
+          </a:xfrm>
+          <a:prstGeom prst="rect">
+            <a:avLst/>
+          </a:prstGeom>
+          <a:noFill/>
+          <a:ln/>
+        </p:spPr>
+        <p:txBody>
+          <a:bodyPr wrap="square" lIns="0" tIns="0" rIns="0" bIns="0" rtlCol="0" anchor="t"/>
+          <a:lstStyle/>
+          <a:p>
+            <a:pPr marL="0" indent="0" algn="ctr">
+              <a:buNone/>
+            </a:pPr>
+            <a:r>
+              <a:rPr lang="en-US" sz="1200" dirty="0">
+                <a:solidFill>
+                  <a:srgbClr val="FFFFFF"/>
+                </a:solidFill>
+                <a:latin typeface="Calibri" pitchFamily="34" charset="0"/>
+                <a:ea typeface="Calibri" pitchFamily="34" charset="-122"/>
+                <a:cs typeface="Calibri" pitchFamily="34" charset="-120"/>
+              </a:rPr>
+              <a:t>scalar score r(x,y)</a:t>
+            </a:r>
+            <a:endParaRPr lang="en-US" sz="1200" dirty="0"/>
+          </a:p>
+        </p:txBody>
+      </p:sp>
+      <p:graphicFrame>
+        <p:nvGraphicFramePr>
+          <p:cNvPr id="24" name="Table 0"/>
+          <p:cNvGraphicFramePr>
+            <a:graphicFrameLocks noGrp="1"/>
+          </p:cNvGraphicFramePr>
+          <p:nvPr>
+            <p:extLst>
+              <p:ext uri="{D42A27DB-BD31-4B8C-83A1-F6EECF244321}">
+                <p14:modId xmlns:p14="http://schemas.microsoft.com/office/powerpoint/2010/main" val="2866451839"/>
+              </p:ext>
+            </p:extLst>
+          </p:nvPr>
+        </p:nvGraphicFramePr>
+        <p:xfrm>
+          <a:off x="274320" y="2331720"/>
+          <a:ext cx="4206240" cy="2340864"/>
+        </p:xfrm>
+        <a:graphic>
+          <a:graphicData uri="http://schemas.openxmlformats.org/drawingml/2006/table">
+            <a:tbl>
+              <a:tblPr/>
+              <a:tblGrid>
+                <a:gridCol w="1371600">
+                  <a:extLst>
+                    <a:ext uri="{9D8B030D-6E8A-4147-A177-3AD203B41FA5}">
+                      <a16:colId xmlns:a16="http://schemas.microsoft.com/office/drawing/2014/main" val="20000"/>
+                    </a:ext>
+                  </a:extLst>
+                </a:gridCol>
+                <a:gridCol w="2834640">
+                  <a:extLst>
+                    <a:ext uri="{9D8B030D-6E8A-4147-A177-3AD203B41FA5}">
+                      <a16:colId xmlns:a16="http://schemas.microsoft.com/office/drawing/2014/main" val="20001"/>
+                    </a:ext>
+                  </a:extLst>
+                </a:gridCol>
+              </a:tblGrid>
+              <a:tr h="292608">
+                <a:tc gridSpan="2">
+                  <a:txBody>
+                    <a:bodyPr/>
+                    <a:lstStyle/>
+                    <a:p>
+                      <a:pPr marL="0" indent="0" algn="ctr">
+                        <a:buNone/>
+                      </a:pPr>
+                      <a:r>
+                        <a:rPr lang="en-US" sz="1200" b="1" dirty="0">
+                          <a:solidFill>
+                            <a:srgbClr val="FFFFFF"/>
+                          </a:solidFill>
+                          <a:latin typeface="Calibri" pitchFamily="34" charset="0"/>
+                          <a:ea typeface="Calibri" pitchFamily="34" charset="-122"/>
+                          <a:cs typeface="Calibri" pitchFamily="34" charset="-120"/>
+                        </a:rPr>
+                        <a:t>Training Configuration</a:t>
+                      </a:r>
+                      <a:endParaRPr lang="en-US" sz="1200" dirty="0">
+                        <a:latin typeface="Calibri" charset="0"/>
+                        <a:ea typeface="Calibri" charset="0"/>
+                        <a:cs typeface="Calibri" charset="0"/>
+                      </a:endParaRPr>
+                    </a:p>
+                  </a:txBody>
+                  <a:tcPr anchor="ctr">
+                    <a:lnL w="6350" cap="flat" cmpd="sng" algn="ctr">
+                      <a:solidFill>
+                        <a:srgbClr val="CBD5E1"/>
+                      </a:solidFill>
+                      <a:prstDash val="solid"/>
+                      <a:round/>
+                      <a:headEnd type="none" w="med" len="med"/>
+                      <a:tailEnd type="none" w="med" len="med"/>
+                    </a:lnL>
+                    <a:lnR w="6350" cap="flat" cmpd="sng" algn="ctr">
+                      <a:solidFill>
+                        <a:srgbClr val="CBD5E1"/>
+                      </a:solidFill>
+                      <a:prstDash val="solid"/>
+                      <a:round/>
+                      <a:headEnd type="none" w="med" len="med"/>
+                      <a:tailEnd type="none" w="med" len="med"/>
+                    </a:lnR>
+                    <a:lnT w="6350" cap="flat" cmpd="sng" algn="ctr">
+                      <a:solidFill>
+                        <a:srgbClr val="CBD5E1"/>
+                      </a:solidFill>
+                      <a:prstDash val="solid"/>
+                      <a:round/>
+                      <a:headEnd type="none" w="med" len="med"/>
+                      <a:tailEnd type="none" w="med" len="med"/>
+                    </a:lnT>
+                    <a:lnB w="6350" cap="flat" cmpd="sng" algn="ctr">
+                      <a:solidFill>
+                        <a:srgbClr val="CBD5E1"/>
+                      </a:solidFill>
+                      <a:prstDash val="solid"/>
+                      <a:round/>
+                      <a:headEnd type="none" w="med" len="med"/>
+                      <a:tailEnd type="none" w="med" len="med"/>
+                    </a:lnB>
+                    <a:solidFill>
+                      <a:srgbClr val="0F1E45"/>
+                    </a:solidFill>
+                  </a:tcPr>
+                </a:tc>
+                <a:tc hMerge="1">
+                  <a:txBody>
+                    <a:bodyPr/>
+                    <a:lstStyle/>
+                    <a:p>
+                      <a:endParaRPr lang="en-US"/>
+                    </a:p>
+                  </a:txBody>
+                  <a:tcPr/>
+                </a:tc>
+                <a:extLst>
+                  <a:ext uri="{0D108BD9-81ED-4DB2-BD59-A6C34878D82A}">
+                    <a16:rowId xmlns:a16="http://schemas.microsoft.com/office/drawing/2014/main" val="10000"/>
+                  </a:ext>
+                </a:extLst>
+              </a:tr>
+              <a:tr h="292608">
+                <a:tc>
+                  <a:txBody>
+                    <a:bodyPr/>
+                    <a:lstStyle/>
+                    <a:p>
+                      <a:pPr marL="0" indent="0">
+                        <a:buNone/>
+                      </a:pPr>
+                      <a:r>
+                        <a:rPr lang="en-US" sz="1200" b="1" dirty="0">
+                          <a:solidFill>
+                            <a:srgbClr val="1E293B"/>
+                          </a:solidFill>
+                          <a:latin typeface="Calibri" pitchFamily="34" charset="0"/>
+                          <a:ea typeface="Calibri" pitchFamily="34" charset="-122"/>
+                          <a:cs typeface="Calibri" pitchFamily="34" charset="-120"/>
+                        </a:rPr>
+                        <a:t>Base model</a:t>
+                      </a:r>
+                      <a:endParaRPr lang="en-US" sz="1200" dirty="0">
+                        <a:latin typeface="Calibri" charset="0"/>
+                        <a:ea typeface="Calibri" charset="0"/>
+                        <a:cs typeface="Calibri" charset="0"/>
+                      </a:endParaRPr>
+                    </a:p>
+                  </a:txBody>
+                  <a:tcPr anchor="ctr">
+                    <a:lnL w="6350" cap="flat" cmpd="sng" algn="ctr">
+                      <a:solidFill>
+                        <a:srgbClr val="CBD5E1"/>
+                      </a:solidFill>
+                      <a:prstDash val="solid"/>
+                      <a:round/>
+                      <a:headEnd type="none" w="med" len="med"/>
+                      <a:tailEnd type="none" w="med" len="med"/>
+                    </a:lnL>
+                    <a:lnR w="6350" cap="flat" cmpd="sng" algn="ctr">
+                      <a:solidFill>
+                        <a:srgbClr val="CBD5E1"/>
+                      </a:solidFill>
+                      <a:prstDash val="solid"/>
+                      <a:round/>
+                      <a:headEnd type="none" w="med" len="med"/>
+                      <a:tailEnd type="none" w="med" len="med"/>
+                    </a:lnR>
+                    <a:lnT w="6350" cap="flat" cmpd="sng" algn="ctr">
+                      <a:solidFill>
+                        <a:srgbClr val="CBD5E1"/>
+                      </a:solidFill>
+                      <a:prstDash val="solid"/>
+                      <a:round/>
+                      <a:headEnd type="none" w="med" len="med"/>
+                      <a:tailEnd type="none" w="med" len="med"/>
+                    </a:lnT>
+                    <a:lnB w="6350" cap="flat" cmpd="sng" algn="ctr">
+                      <a:solidFill>
+                        <a:srgbClr val="CBD5E1"/>
+                      </a:solidFill>
+                      <a:prstDash val="solid"/>
+                      <a:round/>
+                      <a:headEnd type="none" w="med" len="med"/>
+                      <a:tailEnd type="none" w="med" len="med"/>
+                    </a:lnB>
+                  </a:tcPr>
+                </a:tc>
+                <a:tc>
+                  <a:txBody>
+                    <a:bodyPr/>
+                    <a:lstStyle/>
+                    <a:p>
+                      <a:pPr marL="0" indent="0">
+                        <a:buNone/>
+                      </a:pPr>
+                      <a:r>
+                        <a:rPr lang="en-US" sz="1200" dirty="0">
+                          <a:solidFill>
+                            <a:srgbClr val="1E293B"/>
+                          </a:solidFill>
+                          <a:latin typeface="Calibri" pitchFamily="34" charset="0"/>
+                          <a:ea typeface="Calibri" pitchFamily="34" charset="-122"/>
+                          <a:cs typeface="Calibri" pitchFamily="34" charset="-120"/>
+                        </a:rPr>
+                        <a:t>microsoft/deberta-v3-base (184 M)</a:t>
+                      </a:r>
+                      <a:endParaRPr lang="en-US" sz="1200" dirty="0">
+                        <a:latin typeface="Calibri" charset="0"/>
+                        <a:ea typeface="Calibri" charset="0"/>
+                        <a:cs typeface="Calibri" charset="0"/>
+                      </a:endParaRPr>
+                    </a:p>
+                  </a:txBody>
+                  <a:tcPr anchor="ctr">
+                    <a:lnL w="6350" cap="flat" cmpd="sng" algn="ctr">
+                      <a:solidFill>
+                        <a:srgbClr val="CBD5E1"/>
+                      </a:solidFill>
+                      <a:prstDash val="solid"/>
+                      <a:round/>
+                      <a:headEnd type="none" w="med" len="med"/>
+                      <a:tailEnd type="none" w="med" len="med"/>
+                    </a:lnL>
+                    <a:lnR w="6350" cap="flat" cmpd="sng" algn="ctr">
+                      <a:solidFill>
+                        <a:srgbClr val="CBD5E1"/>
+                      </a:solidFill>
+                      <a:prstDash val="solid"/>
+                      <a:round/>
+                      <a:headEnd type="none" w="med" len="med"/>
+                      <a:tailEnd type="none" w="med" len="med"/>
+                    </a:lnR>
+                    <a:lnT w="6350" cap="flat" cmpd="sng" algn="ctr">
+                      <a:solidFill>
+                        <a:srgbClr val="CBD5E1"/>
+                      </a:solidFill>
+                      <a:prstDash val="solid"/>
+                      <a:round/>
+                      <a:headEnd type="none" w="med" len="med"/>
+                      <a:tailEnd type="none" w="med" len="med"/>
+                    </a:lnT>
+                    <a:lnB w="6350" cap="flat" cmpd="sng" algn="ctr">
+                      <a:solidFill>
+                        <a:srgbClr val="CBD5E1"/>
+                      </a:solidFill>
+                      <a:prstDash val="solid"/>
+                      <a:round/>
+                      <a:headEnd type="none" w="med" len="med"/>
+                      <a:tailEnd type="none" w="med" len="med"/>
+                    </a:lnB>
+                  </a:tcPr>
+                </a:tc>
+                <a:extLst>
+                  <a:ext uri="{0D108BD9-81ED-4DB2-BD59-A6C34878D82A}">
+                    <a16:rowId xmlns:a16="http://schemas.microsoft.com/office/drawing/2014/main" val="10001"/>
+                  </a:ext>
+                </a:extLst>
+              </a:tr>
+              <a:tr h="292608">
+                <a:tc>
+                  <a:txBody>
+                    <a:bodyPr/>
+                    <a:lstStyle/>
+                    <a:p>
+                      <a:pPr marL="0" indent="0">
+                        <a:buNone/>
+                      </a:pPr>
+                      <a:r>
+                        <a:rPr lang="en-US" sz="1200" b="1" dirty="0">
+                          <a:solidFill>
+                            <a:srgbClr val="1E293B"/>
+                          </a:solidFill>
+                          <a:latin typeface="Calibri" pitchFamily="34" charset="0"/>
+                          <a:ea typeface="Calibri" pitchFamily="34" charset="-122"/>
+                          <a:cs typeface="Calibri" pitchFamily="34" charset="-120"/>
+                        </a:rPr>
+                        <a:t>LoRA rank / α</a:t>
+                      </a:r>
+                      <a:endParaRPr lang="en-US" sz="1200" dirty="0">
+                        <a:latin typeface="Calibri" charset="0"/>
+                        <a:ea typeface="Calibri" charset="0"/>
+                        <a:cs typeface="Calibri" charset="0"/>
+                      </a:endParaRPr>
+                    </a:p>
+                  </a:txBody>
+                  <a:tcPr anchor="ctr">
+                    <a:lnL w="6350" cap="flat" cmpd="sng" algn="ctr">
+                      <a:solidFill>
+                        <a:srgbClr val="CBD5E1"/>
+                      </a:solidFill>
+                      <a:prstDash val="solid"/>
+                      <a:round/>
+                      <a:headEnd type="none" w="med" len="med"/>
+                      <a:tailEnd type="none" w="med" len="med"/>
+                    </a:lnL>
+                    <a:lnR w="6350" cap="flat" cmpd="sng" algn="ctr">
+                      <a:solidFill>
+                        <a:srgbClr val="CBD5E1"/>
+                      </a:solidFill>
+                      <a:prstDash val="solid"/>
+                      <a:round/>
+                      <a:headEnd type="none" w="med" len="med"/>
+                      <a:tailEnd type="none" w="med" len="med"/>
+                    </a:lnR>
+                    <a:lnT w="6350" cap="flat" cmpd="sng" algn="ctr">
+                      <a:solidFill>
+                        <a:srgbClr val="CBD5E1"/>
+                      </a:solidFill>
+                      <a:prstDash val="solid"/>
+                      <a:round/>
+                      <a:headEnd type="none" w="med" len="med"/>
+                      <a:tailEnd type="none" w="med" len="med"/>
+                    </a:lnT>
+                    <a:lnB w="6350" cap="flat" cmpd="sng" algn="ctr">
+                      <a:solidFill>
+                        <a:srgbClr val="CBD5E1"/>
+                      </a:solidFill>
+                      <a:prstDash val="solid"/>
+                      <a:round/>
+                      <a:headEnd type="none" w="med" len="med"/>
+                      <a:tailEnd type="none" w="med" len="med"/>
+                    </a:lnB>
+                  </a:tcPr>
+                </a:tc>
+                <a:tc>
+                  <a:txBody>
+                    <a:bodyPr/>
+                    <a:lstStyle/>
+                    <a:p>
+                      <a:pPr marL="0" indent="0">
+                        <a:buNone/>
+                      </a:pPr>
+                      <a:r>
+                        <a:rPr lang="en-US" sz="1200" dirty="0">
+                          <a:solidFill>
+                            <a:srgbClr val="1E293B"/>
+                          </a:solidFill>
+                          <a:latin typeface="Calibri" pitchFamily="34" charset="0"/>
+                          <a:ea typeface="Calibri" pitchFamily="34" charset="-122"/>
+                          <a:cs typeface="Calibri" pitchFamily="34" charset="-120"/>
+                        </a:rPr>
+                        <a:t>r = 32, α = 64 (q/k/v_proj)</a:t>
+                      </a:r>
+                      <a:endParaRPr lang="en-US" sz="1200" dirty="0">
+                        <a:latin typeface="Calibri" charset="0"/>
+                        <a:ea typeface="Calibri" charset="0"/>
+                        <a:cs typeface="Calibri" charset="0"/>
+                      </a:endParaRPr>
+                    </a:p>
+                  </a:txBody>
+                  <a:tcPr anchor="ctr">
+                    <a:lnL w="6350" cap="flat" cmpd="sng" algn="ctr">
+                      <a:solidFill>
+                        <a:srgbClr val="CBD5E1"/>
+                      </a:solidFill>
+                      <a:prstDash val="solid"/>
+                      <a:round/>
+                      <a:headEnd type="none" w="med" len="med"/>
+                      <a:tailEnd type="none" w="med" len="med"/>
+                    </a:lnL>
+                    <a:lnR w="6350" cap="flat" cmpd="sng" algn="ctr">
+                      <a:solidFill>
+                        <a:srgbClr val="CBD5E1"/>
+                      </a:solidFill>
+                      <a:prstDash val="solid"/>
+                      <a:round/>
+                      <a:headEnd type="none" w="med" len="med"/>
+                      <a:tailEnd type="none" w="med" len="med"/>
+                    </a:lnR>
+                    <a:lnT w="6350" cap="flat" cmpd="sng" algn="ctr">
+                      <a:solidFill>
+                        <a:srgbClr val="CBD5E1"/>
+                      </a:solidFill>
+                      <a:prstDash val="solid"/>
+                      <a:round/>
+                      <a:headEnd type="none" w="med" len="med"/>
+                      <a:tailEnd type="none" w="med" len="med"/>
+                    </a:lnT>
+                    <a:lnB w="6350" cap="flat" cmpd="sng" algn="ctr">
+                      <a:solidFill>
+                        <a:srgbClr val="CBD5E1"/>
+                      </a:solidFill>
+                      <a:prstDash val="solid"/>
+                      <a:round/>
+                      <a:headEnd type="none" w="med" len="med"/>
+                      <a:tailEnd type="none" w="med" len="med"/>
+                    </a:lnB>
+                  </a:tcPr>
+                </a:tc>
+                <a:extLst>
+                  <a:ext uri="{0D108BD9-81ED-4DB2-BD59-A6C34878D82A}">
+                    <a16:rowId xmlns:a16="http://schemas.microsoft.com/office/drawing/2014/main" val="10002"/>
+                  </a:ext>
+                </a:extLst>
+              </a:tr>
+              <a:tr h="292608">
+                <a:tc>
+                  <a:txBody>
+                    <a:bodyPr/>
+                    <a:lstStyle/>
+                    <a:p>
+                      <a:pPr marL="0" indent="0">
+                        <a:buNone/>
+                      </a:pPr>
+                      <a:r>
+                        <a:rPr lang="en-US" sz="1200" b="1" dirty="0">
+                          <a:solidFill>
+                            <a:srgbClr val="1E293B"/>
+                          </a:solidFill>
+                          <a:latin typeface="Calibri" pitchFamily="34" charset="0"/>
+                          <a:ea typeface="Calibri" pitchFamily="34" charset="-122"/>
+                          <a:cs typeface="Calibri" pitchFamily="34" charset="-120"/>
+                        </a:rPr>
+                        <a:t>Precision</a:t>
+                      </a:r>
+                      <a:endParaRPr lang="en-US" sz="1200" dirty="0">
+                        <a:latin typeface="Calibri" charset="0"/>
+                        <a:ea typeface="Calibri" charset="0"/>
+                        <a:cs typeface="Calibri" charset="0"/>
+                      </a:endParaRPr>
+                    </a:p>
+                  </a:txBody>
+                  <a:tcPr anchor="ctr">
+                    <a:lnL w="6350" cap="flat" cmpd="sng" algn="ctr">
+                      <a:solidFill>
+                        <a:srgbClr val="CBD5E1"/>
+                      </a:solidFill>
+                      <a:prstDash val="solid"/>
+                      <a:round/>
+                      <a:headEnd type="none" w="med" len="med"/>
+                      <a:tailEnd type="none" w="med" len="med"/>
+                    </a:lnL>
+                    <a:lnR w="6350" cap="flat" cmpd="sng" algn="ctr">
+                      <a:solidFill>
+                        <a:srgbClr val="CBD5E1"/>
+                      </a:solidFill>
+                      <a:prstDash val="solid"/>
+                      <a:round/>
+                      <a:headEnd type="none" w="med" len="med"/>
+                      <a:tailEnd type="none" w="med" len="med"/>
+                    </a:lnR>
+                    <a:lnT w="6350" cap="flat" cmpd="sng" algn="ctr">
+                      <a:solidFill>
+                        <a:srgbClr val="CBD5E1"/>
+                      </a:solidFill>
+                      <a:prstDash val="solid"/>
+                      <a:round/>
+                      <a:headEnd type="none" w="med" len="med"/>
+                      <a:tailEnd type="none" w="med" len="med"/>
+                    </a:lnT>
+                    <a:lnB w="6350" cap="flat" cmpd="sng" algn="ctr">
+                      <a:solidFill>
+                        <a:srgbClr val="CBD5E1"/>
+                      </a:solidFill>
+                      <a:prstDash val="solid"/>
+                      <a:round/>
+                      <a:headEnd type="none" w="med" len="med"/>
+                      <a:tailEnd type="none" w="med" len="med"/>
+                    </a:lnB>
+                  </a:tcPr>
+                </a:tc>
+                <a:tc>
+                  <a:txBody>
+                    <a:bodyPr/>
+                    <a:lstStyle/>
+                    <a:p>
+                      <a:pPr marL="0" indent="0">
+                        <a:buNone/>
+                      </a:pPr>
+                      <a:r>
+                        <a:rPr lang="en-US" sz="1200" dirty="0">
+                          <a:solidFill>
+                            <a:srgbClr val="1E293B"/>
+                          </a:solidFill>
+                          <a:latin typeface="Calibri" pitchFamily="34" charset="0"/>
+                          <a:ea typeface="Calibri" pitchFamily="34" charset="-122"/>
+                          <a:cs typeface="Calibri" pitchFamily="34" charset="-120"/>
+                        </a:rPr>
+                        <a:t>fp32  (DeBERTa fp16 → NaN)</a:t>
+                      </a:r>
+                      <a:endParaRPr lang="en-US" sz="1200" dirty="0">
+                        <a:latin typeface="Calibri" charset="0"/>
+                        <a:ea typeface="Calibri" charset="0"/>
+                        <a:cs typeface="Calibri" charset="0"/>
+                      </a:endParaRPr>
+                    </a:p>
+                  </a:txBody>
+                  <a:tcPr anchor="ctr">
+                    <a:lnL w="6350" cap="flat" cmpd="sng" algn="ctr">
+                      <a:solidFill>
+                        <a:srgbClr val="CBD5E1"/>
+                      </a:solidFill>
+                      <a:prstDash val="solid"/>
+                      <a:round/>
+                      <a:headEnd type="none" w="med" len="med"/>
+                      <a:tailEnd type="none" w="med" len="med"/>
+                    </a:lnL>
+                    <a:lnR w="6350" cap="flat" cmpd="sng" algn="ctr">
+                      <a:solidFill>
+                        <a:srgbClr val="CBD5E1"/>
+                      </a:solidFill>
+                      <a:prstDash val="solid"/>
+                      <a:round/>
+                      <a:headEnd type="none" w="med" len="med"/>
+                      <a:tailEnd type="none" w="med" len="med"/>
+                    </a:lnR>
+                    <a:lnT w="6350" cap="flat" cmpd="sng" algn="ctr">
+                      <a:solidFill>
+                        <a:srgbClr val="CBD5E1"/>
+                      </a:solidFill>
+                      <a:prstDash val="solid"/>
+                      <a:round/>
+                      <a:headEnd type="none" w="med" len="med"/>
+                      <a:tailEnd type="none" w="med" len="med"/>
+                    </a:lnT>
+                    <a:lnB w="6350" cap="flat" cmpd="sng" algn="ctr">
+                      <a:solidFill>
+                        <a:srgbClr val="CBD5E1"/>
+                      </a:solidFill>
+                      <a:prstDash val="solid"/>
+                      <a:round/>
+                      <a:headEnd type="none" w="med" len="med"/>
+                      <a:tailEnd type="none" w="med" len="med"/>
+                    </a:lnB>
+                  </a:tcPr>
+                </a:tc>
+                <a:extLst>
+                  <a:ext uri="{0D108BD9-81ED-4DB2-BD59-A6C34878D82A}">
+                    <a16:rowId xmlns:a16="http://schemas.microsoft.com/office/drawing/2014/main" val="10003"/>
+                  </a:ext>
+                </a:extLst>
+              </a:tr>
+              <a:tr h="292608">
+                <a:tc>
+                  <a:txBody>
+                    <a:bodyPr/>
+                    <a:lstStyle/>
+                    <a:p>
+                      <a:pPr marL="0" indent="0">
+                        <a:buNone/>
+                      </a:pPr>
+                      <a:r>
+                        <a:rPr lang="en-US" sz="1200" b="1" dirty="0">
+                          <a:solidFill>
+                            <a:srgbClr val="1E293B"/>
+                          </a:solidFill>
+                          <a:latin typeface="Calibri" pitchFamily="34" charset="0"/>
+                          <a:ea typeface="Calibri" pitchFamily="34" charset="-122"/>
+                          <a:cs typeface="Calibri" pitchFamily="34" charset="-120"/>
+                        </a:rPr>
+                        <a:t>Loss</a:t>
+                      </a:r>
+                      <a:endParaRPr lang="en-US" sz="1200" dirty="0">
+                        <a:latin typeface="Calibri" charset="0"/>
+                        <a:ea typeface="Calibri" charset="0"/>
+                        <a:cs typeface="Calibri" charset="0"/>
+                      </a:endParaRPr>
+                    </a:p>
+                  </a:txBody>
+                  <a:tcPr anchor="ctr">
+                    <a:lnL w="6350" cap="flat" cmpd="sng" algn="ctr">
+                      <a:solidFill>
+                        <a:srgbClr val="CBD5E1"/>
+                      </a:solidFill>
+                      <a:prstDash val="solid"/>
+                      <a:round/>
+                      <a:headEnd type="none" w="med" len="med"/>
+                      <a:tailEnd type="none" w="med" len="med"/>
+                    </a:lnL>
+                    <a:lnR w="6350" cap="flat" cmpd="sng" algn="ctr">
+                      <a:solidFill>
+                        <a:srgbClr val="CBD5E1"/>
+                      </a:solidFill>
+                      <a:prstDash val="solid"/>
+                      <a:round/>
+                      <a:headEnd type="none" w="med" len="med"/>
+                      <a:tailEnd type="none" w="med" len="med"/>
+                    </a:lnR>
+                    <a:lnT w="6350" cap="flat" cmpd="sng" algn="ctr">
+                      <a:solidFill>
+                        <a:srgbClr val="CBD5E1"/>
+                      </a:solidFill>
+                      <a:prstDash val="solid"/>
+                      <a:round/>
+                      <a:headEnd type="none" w="med" len="med"/>
+                      <a:tailEnd type="none" w="med" len="med"/>
+                    </a:lnT>
+                    <a:lnB w="6350" cap="flat" cmpd="sng" algn="ctr">
+                      <a:solidFill>
+                        <a:srgbClr val="CBD5E1"/>
+                      </a:solidFill>
+                      <a:prstDash val="solid"/>
+                      <a:round/>
+                      <a:headEnd type="none" w="med" len="med"/>
+                      <a:tailEnd type="none" w="med" len="med"/>
+                    </a:lnB>
+                  </a:tcPr>
+                </a:tc>
+                <a:tc>
+                  <a:txBody>
+                    <a:bodyPr/>
+                    <a:lstStyle/>
+                    <a:p>
+                      <a:pPr marL="0" indent="0">
+                        <a:buNone/>
+                      </a:pPr>
+                      <a:r>
+                        <a:rPr lang="en-US" sz="1200" dirty="0">
+                          <a:solidFill>
+                            <a:srgbClr val="1E293B"/>
+                          </a:solidFill>
+                          <a:latin typeface="Calibri" pitchFamily="34" charset="0"/>
+                          <a:ea typeface="Calibri" pitchFamily="34" charset="-122"/>
+                          <a:cs typeface="Calibri" pitchFamily="34" charset="-120"/>
+                        </a:rPr>
+                        <a:t>Bradley-Terry pairwise</a:t>
+                      </a:r>
+                      <a:endParaRPr lang="en-US" sz="1200" dirty="0">
+                        <a:latin typeface="Calibri" charset="0"/>
+                        <a:ea typeface="Calibri" charset="0"/>
+                        <a:cs typeface="Calibri" charset="0"/>
+                      </a:endParaRPr>
+                    </a:p>
+                  </a:txBody>
+                  <a:tcPr anchor="ctr">
+                    <a:lnL w="6350" cap="flat" cmpd="sng" algn="ctr">
+                      <a:solidFill>
+                        <a:srgbClr val="CBD5E1"/>
+                      </a:solidFill>
+                      <a:prstDash val="solid"/>
+                      <a:round/>
+                      <a:headEnd type="none" w="med" len="med"/>
+                      <a:tailEnd type="none" w="med" len="med"/>
+                    </a:lnL>
+                    <a:lnR w="6350" cap="flat" cmpd="sng" algn="ctr">
+                      <a:solidFill>
+                        <a:srgbClr val="CBD5E1"/>
+                      </a:solidFill>
+                      <a:prstDash val="solid"/>
+                      <a:round/>
+                      <a:headEnd type="none" w="med" len="med"/>
+                      <a:tailEnd type="none" w="med" len="med"/>
+                    </a:lnR>
+                    <a:lnT w="6350" cap="flat" cmpd="sng" algn="ctr">
+                      <a:solidFill>
+                        <a:srgbClr val="CBD5E1"/>
+                      </a:solidFill>
+                      <a:prstDash val="solid"/>
+                      <a:round/>
+                      <a:headEnd type="none" w="med" len="med"/>
+                      <a:tailEnd type="none" w="med" len="med"/>
+                    </a:lnT>
+                    <a:lnB w="6350" cap="flat" cmpd="sng" algn="ctr">
+                      <a:solidFill>
+                        <a:srgbClr val="CBD5E1"/>
+                      </a:solidFill>
+                      <a:prstDash val="solid"/>
+                      <a:round/>
+                      <a:headEnd type="none" w="med" len="med"/>
+                      <a:tailEnd type="none" w="med" len="med"/>
+                    </a:lnB>
+                  </a:tcPr>
+                </a:tc>
+                <a:extLst>
+                  <a:ext uri="{0D108BD9-81ED-4DB2-BD59-A6C34878D82A}">
+                    <a16:rowId xmlns:a16="http://schemas.microsoft.com/office/drawing/2014/main" val="10004"/>
+                  </a:ext>
+                </a:extLst>
+              </a:tr>
+              <a:tr h="292608">
+                <a:tc>
+                  <a:txBody>
+                    <a:bodyPr/>
+                    <a:lstStyle/>
+                    <a:p>
+                      <a:pPr marL="0" indent="0">
+                        <a:buNone/>
+                      </a:pPr>
+                      <a:r>
+                        <a:rPr lang="en-US" sz="1200" b="1" dirty="0">
+                          <a:solidFill>
+                            <a:srgbClr val="1E293B"/>
+                          </a:solidFill>
+                          <a:latin typeface="Calibri" pitchFamily="34" charset="0"/>
+                          <a:ea typeface="Calibri" pitchFamily="34" charset="-122"/>
+                          <a:cs typeface="Calibri" pitchFamily="34" charset="-120"/>
+                        </a:rPr>
+                        <a:t>Learning rate</a:t>
+                      </a:r>
+                      <a:endParaRPr lang="en-US" sz="1200" dirty="0">
+                        <a:latin typeface="Calibri" charset="0"/>
+                        <a:ea typeface="Calibri" charset="0"/>
+                        <a:cs typeface="Calibri" charset="0"/>
+                      </a:endParaRPr>
+                    </a:p>
+                  </a:txBody>
+                  <a:tcPr anchor="ctr">
+                    <a:lnL w="6350" cap="flat" cmpd="sng" algn="ctr">
+                      <a:solidFill>
+                        <a:srgbClr val="CBD5E1"/>
+                      </a:solidFill>
+                      <a:prstDash val="solid"/>
+                      <a:round/>
+                      <a:headEnd type="none" w="med" len="med"/>
+                      <a:tailEnd type="none" w="med" len="med"/>
+                    </a:lnL>
+                    <a:lnR w="6350" cap="flat" cmpd="sng" algn="ctr">
+                      <a:solidFill>
+                        <a:srgbClr val="CBD5E1"/>
+                      </a:solidFill>
+                      <a:prstDash val="solid"/>
+                      <a:round/>
+                      <a:headEnd type="none" w="med" len="med"/>
+                      <a:tailEnd type="none" w="med" len="med"/>
+                    </a:lnR>
+                    <a:lnT w="6350" cap="flat" cmpd="sng" algn="ctr">
+                      <a:solidFill>
+                        <a:srgbClr val="CBD5E1"/>
+                      </a:solidFill>
+                      <a:prstDash val="solid"/>
+                      <a:round/>
+                      <a:headEnd type="none" w="med" len="med"/>
+                      <a:tailEnd type="none" w="med" len="med"/>
+                    </a:lnT>
+                    <a:lnB w="6350" cap="flat" cmpd="sng" algn="ctr">
+                      <a:solidFill>
+                        <a:srgbClr val="CBD5E1"/>
+                      </a:solidFill>
+                      <a:prstDash val="solid"/>
+                      <a:round/>
+                      <a:headEnd type="none" w="med" len="med"/>
+                      <a:tailEnd type="none" w="med" len="med"/>
+                    </a:lnB>
+                  </a:tcPr>
+                </a:tc>
+                <a:tc>
+                  <a:txBody>
+                    <a:bodyPr/>
+                    <a:lstStyle/>
+                    <a:p>
+                      <a:pPr marL="0" indent="0">
+                        <a:buNone/>
+                      </a:pPr>
+                      <a:r>
+                        <a:rPr lang="en-US" sz="1200" dirty="0">
+                          <a:solidFill>
+                            <a:srgbClr val="1E293B"/>
+                          </a:solidFill>
+                          <a:latin typeface="Calibri" pitchFamily="34" charset="0"/>
+                          <a:ea typeface="Calibri" pitchFamily="34" charset="-122"/>
+                          <a:cs typeface="Calibri" pitchFamily="34" charset="-120"/>
+                        </a:rPr>
+                        <a:t>2 × 10⁻⁵  (cosine warmup)</a:t>
+                      </a:r>
+                      <a:endParaRPr lang="en-US" sz="1200" dirty="0">
+                        <a:latin typeface="Calibri" charset="0"/>
+                        <a:ea typeface="Calibri" charset="0"/>
+                        <a:cs typeface="Calibri" charset="0"/>
+                      </a:endParaRPr>
+                    </a:p>
+                  </a:txBody>
+                  <a:tcPr anchor="ctr">
+                    <a:lnL w="6350" cap="flat" cmpd="sng" algn="ctr">
+                      <a:solidFill>
+                        <a:srgbClr val="CBD5E1"/>
+                      </a:solidFill>
+                      <a:prstDash val="solid"/>
+                      <a:round/>
+                      <a:headEnd type="none" w="med" len="med"/>
+                      <a:tailEnd type="none" w="med" len="med"/>
+                    </a:lnL>
+                    <a:lnR w="6350" cap="flat" cmpd="sng" algn="ctr">
+                      <a:solidFill>
+                        <a:srgbClr val="CBD5E1"/>
+                      </a:solidFill>
+                      <a:prstDash val="solid"/>
+                      <a:round/>
+                      <a:headEnd type="none" w="med" len="med"/>
+                      <a:tailEnd type="none" w="med" len="med"/>
+                    </a:lnR>
+                    <a:lnT w="6350" cap="flat" cmpd="sng" algn="ctr">
+                      <a:solidFill>
+                        <a:srgbClr val="CBD5E1"/>
+                      </a:solidFill>
+                      <a:prstDash val="solid"/>
+                      <a:round/>
+                      <a:headEnd type="none" w="med" len="med"/>
+                      <a:tailEnd type="none" w="med" len="med"/>
+                    </a:lnT>
+                    <a:lnB w="6350" cap="flat" cmpd="sng" algn="ctr">
+                      <a:solidFill>
+                        <a:srgbClr val="CBD5E1"/>
+                      </a:solidFill>
+                      <a:prstDash val="solid"/>
+                      <a:round/>
+                      <a:headEnd type="none" w="med" len="med"/>
+                      <a:tailEnd type="none" w="med" len="med"/>
+                    </a:lnB>
+                  </a:tcPr>
+                </a:tc>
+                <a:extLst>
+                  <a:ext uri="{0D108BD9-81ED-4DB2-BD59-A6C34878D82A}">
+                    <a16:rowId xmlns:a16="http://schemas.microsoft.com/office/drawing/2014/main" val="10005"/>
+                  </a:ext>
+                </a:extLst>
+              </a:tr>
+              <a:tr h="292608">
+                <a:tc>
+                  <a:txBody>
+                    <a:bodyPr/>
+                    <a:lstStyle/>
+                    <a:p>
+                      <a:pPr marL="0" indent="0">
+                        <a:buNone/>
+                      </a:pPr>
+                      <a:r>
+                        <a:rPr lang="en-US" sz="1200" b="1" dirty="0">
+                          <a:solidFill>
+                            <a:srgbClr val="1E293B"/>
+                          </a:solidFill>
+                          <a:latin typeface="Calibri" pitchFamily="34" charset="0"/>
+                          <a:ea typeface="Calibri" pitchFamily="34" charset="-122"/>
+                          <a:cs typeface="Calibri" pitchFamily="34" charset="-120"/>
+                        </a:rPr>
+                        <a:t>Batch / Epochs</a:t>
+                      </a:r>
+                      <a:endParaRPr lang="en-US" sz="1200" dirty="0">
+                        <a:latin typeface="Calibri" charset="0"/>
+                        <a:ea typeface="Calibri" charset="0"/>
+                        <a:cs typeface="Calibri" charset="0"/>
+                      </a:endParaRPr>
+                    </a:p>
+                  </a:txBody>
+                  <a:tcPr anchor="ctr">
+                    <a:lnL w="6350" cap="flat" cmpd="sng" algn="ctr">
+                      <a:solidFill>
+                        <a:srgbClr val="CBD5E1"/>
+                      </a:solidFill>
+                      <a:prstDash val="solid"/>
+                      <a:round/>
+                      <a:headEnd type="none" w="med" len="med"/>
+                      <a:tailEnd type="none" w="med" len="med"/>
+                    </a:lnL>
+                    <a:lnR w="6350" cap="flat" cmpd="sng" algn="ctr">
+                      <a:solidFill>
+                        <a:srgbClr val="CBD5E1"/>
+                      </a:solidFill>
+                      <a:prstDash val="solid"/>
+                      <a:round/>
+                      <a:headEnd type="none" w="med" len="med"/>
+                      <a:tailEnd type="none" w="med" len="med"/>
+                    </a:lnR>
+                    <a:lnT w="6350" cap="flat" cmpd="sng" algn="ctr">
+                      <a:solidFill>
+                        <a:srgbClr val="CBD5E1"/>
+                      </a:solidFill>
+                      <a:prstDash val="solid"/>
+                      <a:round/>
+                      <a:headEnd type="none" w="med" len="med"/>
+                      <a:tailEnd type="none" w="med" len="med"/>
+                    </a:lnT>
+                    <a:lnB w="6350" cap="flat" cmpd="sng" algn="ctr">
+                      <a:solidFill>
+                        <a:srgbClr val="CBD5E1"/>
+                      </a:solidFill>
+                      <a:prstDash val="solid"/>
+                      <a:round/>
+                      <a:headEnd type="none" w="med" len="med"/>
+                      <a:tailEnd type="none" w="med" len="med"/>
+                    </a:lnB>
+                  </a:tcPr>
+                </a:tc>
+                <a:tc>
+                  <a:txBody>
+                    <a:bodyPr/>
+                    <a:lstStyle/>
+                    <a:p>
+                      <a:pPr marL="0" indent="0">
+                        <a:buNone/>
+                      </a:pPr>
+                      <a:r>
+                        <a:rPr lang="en-US" sz="1200" dirty="0">
+                          <a:solidFill>
+                            <a:srgbClr val="1E293B"/>
+                          </a:solidFill>
+                          <a:latin typeface="Calibri" pitchFamily="34" charset="0"/>
+                          <a:ea typeface="Calibri" pitchFamily="34" charset="-122"/>
+                          <a:cs typeface="Calibri" pitchFamily="34" charset="-120"/>
+                        </a:rPr>
+                        <a:t>8  ×  2 epochs</a:t>
+                      </a:r>
+                      <a:endParaRPr lang="en-US" sz="1200" dirty="0">
+                        <a:latin typeface="Calibri" charset="0"/>
+                        <a:ea typeface="Calibri" charset="0"/>
+                        <a:cs typeface="Calibri" charset="0"/>
+                      </a:endParaRPr>
+                    </a:p>
+                  </a:txBody>
+                  <a:tcPr anchor="ctr">
+                    <a:lnL w="6350" cap="flat" cmpd="sng" algn="ctr">
+                      <a:solidFill>
+                        <a:srgbClr val="CBD5E1"/>
+                      </a:solidFill>
+                      <a:prstDash val="solid"/>
+                      <a:round/>
+                      <a:headEnd type="none" w="med" len="med"/>
+                      <a:tailEnd type="none" w="med" len="med"/>
+                    </a:lnL>
+                    <a:lnR w="6350" cap="flat" cmpd="sng" algn="ctr">
+                      <a:solidFill>
+                        <a:srgbClr val="CBD5E1"/>
+                      </a:solidFill>
+                      <a:prstDash val="solid"/>
+                      <a:round/>
+                      <a:headEnd type="none" w="med" len="med"/>
+                      <a:tailEnd type="none" w="med" len="med"/>
+                    </a:lnR>
+                    <a:lnT w="6350" cap="flat" cmpd="sng" algn="ctr">
+                      <a:solidFill>
+                        <a:srgbClr val="CBD5E1"/>
+                      </a:solidFill>
+                      <a:prstDash val="solid"/>
+                      <a:round/>
+                      <a:headEnd type="none" w="med" len="med"/>
+                      <a:tailEnd type="none" w="med" len="med"/>
+                    </a:lnT>
+                    <a:lnB w="6350" cap="flat" cmpd="sng" algn="ctr">
+                      <a:solidFill>
+                        <a:srgbClr val="CBD5E1"/>
+                      </a:solidFill>
+                      <a:prstDash val="solid"/>
+                      <a:round/>
+                      <a:headEnd type="none" w="med" len="med"/>
+                      <a:tailEnd type="none" w="med" len="med"/>
+                    </a:lnB>
+                  </a:tcPr>
+                </a:tc>
+                <a:extLst>
+                  <a:ext uri="{0D108BD9-81ED-4DB2-BD59-A6C34878D82A}">
+                    <a16:rowId xmlns:a16="http://schemas.microsoft.com/office/drawing/2014/main" val="10006"/>
+                  </a:ext>
+                </a:extLst>
+              </a:tr>
+              <a:tr h="292608">
+                <a:tc>
+                  <a:txBody>
+                    <a:bodyPr/>
+                    <a:lstStyle/>
+                    <a:p>
+                      <a:pPr marL="0" indent="0">
+                        <a:buNone/>
+                      </a:pPr>
+                      <a:r>
+                        <a:rPr lang="en-US" sz="1200" b="1" dirty="0">
+                          <a:solidFill>
+                            <a:srgbClr val="1E293B"/>
+                          </a:solidFill>
+                          <a:latin typeface="Calibri" pitchFamily="34" charset="0"/>
+                          <a:ea typeface="Calibri" pitchFamily="34" charset="-122"/>
+                          <a:cs typeface="Calibri" pitchFamily="34" charset="-120"/>
+                        </a:rPr>
+                        <a:t>Trainable</a:t>
+                      </a:r>
+                      <a:endParaRPr lang="en-US" sz="1200" dirty="0">
+                        <a:latin typeface="Calibri" charset="0"/>
+                        <a:ea typeface="Calibri" charset="0"/>
+                        <a:cs typeface="Calibri" charset="0"/>
+                      </a:endParaRPr>
+                    </a:p>
+                  </a:txBody>
+                  <a:tcPr anchor="ctr">
+                    <a:lnL w="6350" cap="flat" cmpd="sng" algn="ctr">
+                      <a:solidFill>
+                        <a:srgbClr val="CBD5E1"/>
+                      </a:solidFill>
+                      <a:prstDash val="solid"/>
+                      <a:round/>
+                      <a:headEnd type="none" w="med" len="med"/>
+                      <a:tailEnd type="none" w="med" len="med"/>
+                    </a:lnL>
+                    <a:lnR w="6350" cap="flat" cmpd="sng" algn="ctr">
+                      <a:solidFill>
+                        <a:srgbClr val="CBD5E1"/>
+                      </a:solidFill>
+                      <a:prstDash val="solid"/>
+                      <a:round/>
+                      <a:headEnd type="none" w="med" len="med"/>
+                      <a:tailEnd type="none" w="med" len="med"/>
+                    </a:lnR>
+                    <a:lnT w="6350" cap="flat" cmpd="sng" algn="ctr">
+                      <a:solidFill>
+                        <a:srgbClr val="CBD5E1"/>
+                      </a:solidFill>
+                      <a:prstDash val="solid"/>
+                      <a:round/>
+                      <a:headEnd type="none" w="med" len="med"/>
+                      <a:tailEnd type="none" w="med" len="med"/>
+                    </a:lnT>
+                    <a:lnB w="6350" cap="flat" cmpd="sng" algn="ctr">
+                      <a:solidFill>
+                        <a:srgbClr val="CBD5E1"/>
+                      </a:solidFill>
+                      <a:prstDash val="solid"/>
+                      <a:round/>
+                      <a:headEnd type="none" w="med" len="med"/>
+                      <a:tailEnd type="none" w="med" len="med"/>
+                    </a:lnB>
+                  </a:tcPr>
+                </a:tc>
+                <a:tc>
+                  <a:txBody>
+                    <a:bodyPr/>
+                    <a:lstStyle/>
+                    <a:p>
+                      <a:pPr marL="0" indent="0">
+                        <a:buNone/>
+                      </a:pPr>
+                      <a:r>
+                        <a:rPr lang="en-US" sz="1200" dirty="0">
+                          <a:solidFill>
+                            <a:srgbClr val="1E293B"/>
+                          </a:solidFill>
+                          <a:latin typeface="Calibri" pitchFamily="34" charset="0"/>
+                          <a:ea typeface="Calibri" pitchFamily="34" charset="-122"/>
+                          <a:cs typeface="Calibri" pitchFamily="34" charset="-120"/>
+                        </a:rPr>
+                        <a:t>~1.8 M / 184 M (≈ 1 %)</a:t>
+                      </a:r>
+                      <a:endParaRPr lang="en-US" sz="1200" dirty="0">
+                        <a:latin typeface="Calibri" charset="0"/>
+                        <a:ea typeface="Calibri" charset="0"/>
+                        <a:cs typeface="Calibri" charset="0"/>
+                      </a:endParaRPr>
+                    </a:p>
+                  </a:txBody>
+                  <a:tcPr anchor="ctr">
+                    <a:lnL w="6350" cap="flat" cmpd="sng" algn="ctr">
+                      <a:solidFill>
+                        <a:srgbClr val="CBD5E1"/>
+                      </a:solidFill>
+                      <a:prstDash val="solid"/>
+                      <a:round/>
+                      <a:headEnd type="none" w="med" len="med"/>
+                      <a:tailEnd type="none" w="med" len="med"/>
+                    </a:lnL>
+                    <a:lnR w="6350" cap="flat" cmpd="sng" algn="ctr">
+                      <a:solidFill>
+                        <a:srgbClr val="CBD5E1"/>
+                      </a:solidFill>
+                      <a:prstDash val="solid"/>
+                      <a:round/>
+                      <a:headEnd type="none" w="med" len="med"/>
+                      <a:tailEnd type="none" w="med" len="med"/>
+                    </a:lnR>
+                    <a:lnT w="6350" cap="flat" cmpd="sng" algn="ctr">
+                      <a:solidFill>
+                        <a:srgbClr val="CBD5E1"/>
+                      </a:solidFill>
+                      <a:prstDash val="solid"/>
+                      <a:round/>
+                      <a:headEnd type="none" w="med" len="med"/>
+                      <a:tailEnd type="none" w="med" len="med"/>
+                    </a:lnT>
+                    <a:lnB w="6350" cap="flat" cmpd="sng" algn="ctr">
+                      <a:solidFill>
+                        <a:srgbClr val="CBD5E1"/>
+                      </a:solidFill>
+                      <a:prstDash val="solid"/>
+                      <a:round/>
+                      <a:headEnd type="none" w="med" len="med"/>
+                      <a:tailEnd type="none" w="med" len="med"/>
+                    </a:lnB>
+                  </a:tcPr>
+                </a:tc>
+                <a:extLst>
+                  <a:ext uri="{0D108BD9-81ED-4DB2-BD59-A6C34878D82A}">
+                    <a16:rowId xmlns:a16="http://schemas.microsoft.com/office/drawing/2014/main" val="10007"/>
+                  </a:ext>
+                </a:extLst>
+              </a:tr>
+            </a:tbl>
+          </a:graphicData>
+        </a:graphic>
+      </p:graphicFrame>
+      <p:sp>
+        <p:nvSpPr>
+          <p:cNvPr id="25" name="Text 21"/>
+          <p:cNvSpPr/>
+          <p:nvPr/>
+        </p:nvSpPr>
+        <p:spPr>
+          <a:xfrm>
+            <a:off x="4663440" y="2331720"/>
+            <a:ext cx="4206240" cy="274320"/>
+          </a:xfrm>
+          <a:prstGeom prst="rect">
+            <a:avLst/>
+          </a:prstGeom>
+          <a:noFill/>
+          <a:ln/>
+        </p:spPr>
+        <p:txBody>
+          <a:bodyPr wrap="square" lIns="0" tIns="0" rIns="0" bIns="0" rtlCol="0" anchor="ctr"/>
+          <a:lstStyle/>
+          <a:p>
+            <a:pPr marL="0" indent="0">
+              <a:buNone/>
+            </a:pPr>
+            <a:r>
+              <a:rPr lang="en-US" sz="1200" b="1" dirty="0">
+                <a:solidFill>
+                  <a:srgbClr val="1E293B"/>
+                </a:solidFill>
+                <a:latin typeface="Calibri" pitchFamily="34" charset="0"/>
+                <a:ea typeface="Calibri" pitchFamily="34" charset="-122"/>
+                <a:cs typeface="Calibri" pitchFamily="34" charset="-120"/>
+              </a:rPr>
+              <a:t>Bradley-Terry Loss</a:t>
+            </a:r>
+            <a:endParaRPr lang="en-US" sz="1200" dirty="0"/>
+          </a:p>
+        </p:txBody>
+      </p:sp>
+      <p:sp>
+        <p:nvSpPr>
+          <p:cNvPr id="26" name="Shape 22"/>
+          <p:cNvSpPr/>
+          <p:nvPr/>
+        </p:nvSpPr>
+        <p:spPr>
+          <a:xfrm>
+            <a:off x="4663440" y="2633472"/>
+            <a:ext cx="4206240" cy="548640"/>
+          </a:xfrm>
+          <a:prstGeom prst="rect">
+            <a:avLst/>
+          </a:prstGeom>
+          <a:solidFill>
+            <a:srgbClr val="F1F5F9"/>
+          </a:solidFill>
+          <a:ln w="9525">
+            <a:solidFill>
+              <a:srgbClr val="E2E8F0"/>
+            </a:solidFill>
+            <a:prstDash val="solid"/>
+          </a:ln>
+        </p:spPr>
+      </p:sp>
+      <p:sp>
+        <p:nvSpPr>
+          <p:cNvPr id="27" name="Text 23"/>
+          <p:cNvSpPr/>
+          <p:nvPr/>
+        </p:nvSpPr>
+        <p:spPr>
+          <a:xfrm>
+            <a:off x="4709160" y="2624328"/>
+            <a:ext cx="4069080" cy="548640"/>
+          </a:xfrm>
+          <a:prstGeom prst="rect">
+            <a:avLst/>
+          </a:prstGeom>
+          <a:noFill/>
+          <a:ln/>
+        </p:spPr>
+        <p:txBody>
+          <a:bodyPr wrap="square" lIns="0" tIns="0" rIns="0" bIns="0" rtlCol="0" anchor="ctr"/>
+          <a:lstStyle/>
+          <a:p>
+            <a:pPr marL="0" indent="0" algn="ctr">
+              <a:buNone/>
+            </a:pPr>
+            <a:r>
+              <a:rPr lang="en-US" sz="1200" b="1" i="1" dirty="0">
+                <a:solidFill>
+                  <a:srgbClr val="1E293B"/>
+                </a:solidFill>
+                <a:latin typeface="Cambria" pitchFamily="34" charset="0"/>
+                <a:ea typeface="Cambria" pitchFamily="34" charset="-122"/>
+                <a:cs typeface="Cambria" pitchFamily="34" charset="-120"/>
+              </a:rPr>
+              <a:t>L</a:t>
+            </a:r>
+            <a:r>
+              <a:rPr lang="en-US" sz="1200" b="1" baseline="-40000" dirty="0">
+                <a:solidFill>
+                  <a:srgbClr val="1E293B"/>
+                </a:solidFill>
+                <a:latin typeface="Cambria" pitchFamily="34" charset="0"/>
+                <a:ea typeface="Cambria" pitchFamily="34" charset="-122"/>
+                <a:cs typeface="Cambria" pitchFamily="34" charset="-120"/>
+              </a:rPr>
+              <a:t>RM</a:t>
+            </a:r>
+            <a:r>
+              <a:rPr lang="en-US" sz="1200" dirty="0">
+                <a:solidFill>
+                  <a:srgbClr val="1E293B"/>
+                </a:solidFill>
+                <a:latin typeface="Cambria" pitchFamily="34" charset="0"/>
+                <a:ea typeface="Cambria" pitchFamily="34" charset="-122"/>
+                <a:cs typeface="Cambria" pitchFamily="34" charset="-120"/>
+              </a:rPr>
+              <a:t>  =  −E [ log σ ( r</a:t>
+            </a:r>
+            <a:r>
+              <a:rPr lang="en-US" sz="1200" i="1" baseline="-40000" dirty="0">
+                <a:solidFill>
+                  <a:srgbClr val="1E293B"/>
+                </a:solidFill>
+                <a:latin typeface="Cambria" pitchFamily="34" charset="0"/>
+                <a:ea typeface="Cambria" pitchFamily="34" charset="-122"/>
+                <a:cs typeface="Cambria" pitchFamily="34" charset="-120"/>
+              </a:rPr>
+              <a:t>θ</a:t>
+            </a:r>
+            <a:r>
+              <a:rPr lang="en-US" sz="1200" dirty="0">
+                <a:solidFill>
+                  <a:srgbClr val="1E293B"/>
+                </a:solidFill>
+                <a:latin typeface="Cambria" pitchFamily="34" charset="0"/>
+                <a:ea typeface="Cambria" pitchFamily="34" charset="-122"/>
+                <a:cs typeface="Cambria" pitchFamily="34" charset="-120"/>
+              </a:rPr>
+              <a:t>(x, y</a:t>
+            </a:r>
+            <a:r>
+              <a:rPr lang="en-US" sz="1200" i="1" baseline="-40000" dirty="0">
+                <a:solidFill>
+                  <a:srgbClr val="1E293B"/>
+                </a:solidFill>
+                <a:latin typeface="Cambria" pitchFamily="34" charset="0"/>
+                <a:ea typeface="Cambria" pitchFamily="34" charset="-122"/>
+                <a:cs typeface="Cambria" pitchFamily="34" charset="-120"/>
+              </a:rPr>
+              <a:t>c</a:t>
+            </a:r>
+            <a:r>
+              <a:rPr lang="en-US" sz="1200" dirty="0">
+                <a:solidFill>
+                  <a:srgbClr val="1E293B"/>
+                </a:solidFill>
+                <a:latin typeface="Cambria" pitchFamily="34" charset="0"/>
+                <a:ea typeface="Cambria" pitchFamily="34" charset="-122"/>
+                <a:cs typeface="Cambria" pitchFamily="34" charset="-120"/>
+              </a:rPr>
+              <a:t>) − r</a:t>
+            </a:r>
+            <a:r>
+              <a:rPr lang="en-US" sz="1200" i="1" baseline="-40000" dirty="0">
+                <a:solidFill>
+                  <a:srgbClr val="1E293B"/>
+                </a:solidFill>
+                <a:latin typeface="Cambria" pitchFamily="34" charset="0"/>
+                <a:ea typeface="Cambria" pitchFamily="34" charset="-122"/>
+                <a:cs typeface="Cambria" pitchFamily="34" charset="-120"/>
+              </a:rPr>
+              <a:t>θ</a:t>
+            </a:r>
+            <a:r>
+              <a:rPr lang="en-US" sz="1200" dirty="0">
+                <a:solidFill>
+                  <a:srgbClr val="1E293B"/>
+                </a:solidFill>
+                <a:latin typeface="Cambria" pitchFamily="34" charset="0"/>
+                <a:ea typeface="Cambria" pitchFamily="34" charset="-122"/>
+                <a:cs typeface="Cambria" pitchFamily="34" charset="-120"/>
+              </a:rPr>
+              <a:t>(x, y</a:t>
+            </a:r>
+            <a:r>
+              <a:rPr lang="en-US" sz="1200" i="1" baseline="-40000" dirty="0">
+                <a:solidFill>
+                  <a:srgbClr val="1E293B"/>
+                </a:solidFill>
+                <a:latin typeface="Cambria" pitchFamily="34" charset="0"/>
+                <a:ea typeface="Cambria" pitchFamily="34" charset="-122"/>
+                <a:cs typeface="Cambria" pitchFamily="34" charset="-120"/>
+              </a:rPr>
+              <a:t>r</a:t>
+            </a:r>
+            <a:r>
+              <a:rPr lang="en-US" sz="1200" dirty="0">
+                <a:solidFill>
+                  <a:srgbClr val="1E293B"/>
+                </a:solidFill>
+                <a:latin typeface="Cambria" pitchFamily="34" charset="0"/>
+                <a:ea typeface="Cambria" pitchFamily="34" charset="-122"/>
+                <a:cs typeface="Cambria" pitchFamily="34" charset="-120"/>
+              </a:rPr>
+              <a:t>) ) ]</a:t>
+            </a:r>
+            <a:endParaRPr lang="en-US" sz="1200" dirty="0"/>
+          </a:p>
+        </p:txBody>
+      </p:sp>
+      <p:sp>
+        <p:nvSpPr>
+          <p:cNvPr id="28" name="Text 24"/>
+          <p:cNvSpPr/>
+          <p:nvPr/>
+        </p:nvSpPr>
+        <p:spPr>
+          <a:xfrm>
+            <a:off x="4663440" y="3218688"/>
+            <a:ext cx="4206240" cy="283464"/>
+          </a:xfrm>
+          <a:prstGeom prst="rect">
+            <a:avLst/>
+          </a:prstGeom>
+          <a:noFill/>
+          <a:ln/>
+        </p:spPr>
+        <p:txBody>
+          <a:bodyPr wrap="square" lIns="0" tIns="0" rIns="0" bIns="0" rtlCol="0" anchor="ctr"/>
+          <a:lstStyle/>
+          <a:p>
+            <a:pPr marL="0" indent="0">
+              <a:buNone/>
+            </a:pPr>
+            <a:r>
+              <a:rPr lang="en-US" sz="1200" b="1" dirty="0">
+                <a:solidFill>
+                  <a:srgbClr val="1E293B"/>
+                </a:solidFill>
+                <a:latin typeface="Calibri" pitchFamily="34" charset="0"/>
+                <a:ea typeface="Calibri" pitchFamily="34" charset="-122"/>
+                <a:cs typeface="Calibri" pitchFamily="34" charset="-120"/>
+              </a:rPr>
+              <a:t>Design Rationale</a:t>
+            </a:r>
+            <a:endParaRPr lang="en-US" sz="1200" dirty="0"/>
+          </a:p>
+        </p:txBody>
+      </p:sp>
+      <p:sp>
+        <p:nvSpPr>
+          <p:cNvPr id="29" name="Shape 25"/>
+          <p:cNvSpPr/>
+          <p:nvPr/>
+        </p:nvSpPr>
+        <p:spPr>
+          <a:xfrm>
+            <a:off x="4709160" y="3776472"/>
+            <a:ext cx="164592" cy="164592"/>
+          </a:xfrm>
+          <a:prstGeom prst="ellipse">
+            <a:avLst/>
+          </a:prstGeom>
+          <a:solidFill>
+            <a:srgbClr val="F5A623"/>
+          </a:solidFill>
+          <a:ln w="12700">
+            <a:solidFill>
+              <a:srgbClr val="F5A623"/>
+            </a:solidFill>
+            <a:prstDash val="solid"/>
+          </a:ln>
+        </p:spPr>
+      </p:sp>
+      <p:sp>
+        <p:nvSpPr>
+          <p:cNvPr id="30" name="Text 26"/>
+          <p:cNvSpPr/>
+          <p:nvPr/>
+        </p:nvSpPr>
+        <p:spPr>
+          <a:xfrm>
+            <a:off x="4892040" y="3520440"/>
+            <a:ext cx="3931920" cy="201168"/>
+          </a:xfrm>
+          <a:prstGeom prst="rect">
+            <a:avLst/>
+          </a:prstGeom>
+          <a:noFill/>
+          <a:ln/>
+        </p:spPr>
+        <p:txBody>
+          <a:bodyPr wrap="square" lIns="0" tIns="0" rIns="0" bIns="0" rtlCol="0" anchor="ctr"/>
+          <a:lstStyle/>
+          <a:p>
+            <a:pPr marL="0" indent="0">
+              <a:buNone/>
+            </a:pPr>
+            <a:r>
+              <a:rPr lang="en-US" sz="1200" b="1" dirty="0">
+                <a:solidFill>
+                  <a:srgbClr val="1E293B"/>
+                </a:solidFill>
+                <a:latin typeface="Calibri" pitchFamily="34" charset="0"/>
+                <a:ea typeface="Calibri" pitchFamily="34" charset="-122"/>
+                <a:cs typeface="Calibri" pitchFamily="34" charset="-120"/>
+              </a:rPr>
+              <a:t>Why DeBERTa?</a:t>
+            </a:r>
+            <a:endParaRPr lang="en-US" sz="1200" dirty="0"/>
+          </a:p>
+        </p:txBody>
+      </p:sp>
+      <p:sp>
+        <p:nvSpPr>
+          <p:cNvPr id="31" name="Text 27"/>
+          <p:cNvSpPr/>
+          <p:nvPr/>
+        </p:nvSpPr>
+        <p:spPr>
+          <a:xfrm>
+            <a:off x="4937760" y="3730752"/>
+            <a:ext cx="4069080" cy="164592"/>
+          </a:xfrm>
+          <a:prstGeom prst="rect">
+            <a:avLst/>
+          </a:prstGeom>
+          <a:noFill/>
+          <a:ln/>
+        </p:spPr>
+        <p:txBody>
+          <a:bodyPr wrap="square" lIns="0" tIns="0" rIns="0" bIns="0" rtlCol="0" anchor="t"/>
+          <a:lstStyle/>
+          <a:p>
+            <a:pPr marL="0" indent="0">
+              <a:buNone/>
+            </a:pPr>
+            <a:r>
+              <a:rPr lang="en-US" sz="1200" dirty="0">
+                <a:solidFill>
+                  <a:srgbClr val="475569"/>
+                </a:solidFill>
+                <a:latin typeface="Calibri" pitchFamily="34" charset="0"/>
+                <a:ea typeface="Calibri" pitchFamily="34" charset="-122"/>
+                <a:cs typeface="Calibri" pitchFamily="34" charset="-120"/>
+              </a:rPr>
+              <a:t>Bidirectional attention score full sequence better than causal LM</a:t>
+            </a:r>
+            <a:endParaRPr lang="en-US" sz="1200" dirty="0"/>
+          </a:p>
+        </p:txBody>
+      </p:sp>
+      <p:sp>
+        <p:nvSpPr>
+          <p:cNvPr id="32" name="Shape 28"/>
+          <p:cNvSpPr/>
+          <p:nvPr/>
+        </p:nvSpPr>
+        <p:spPr>
+          <a:xfrm>
+            <a:off x="4709160" y="4142232"/>
+            <a:ext cx="164592" cy="164592"/>
+          </a:xfrm>
+          <a:prstGeom prst="ellipse">
+            <a:avLst/>
+          </a:prstGeom>
+          <a:solidFill>
+            <a:srgbClr val="F5A623"/>
+          </a:solidFill>
+          <a:ln w="12700">
+            <a:solidFill>
+              <a:srgbClr val="F5A623"/>
+            </a:solidFill>
+            <a:prstDash val="solid"/>
+          </a:ln>
+        </p:spPr>
+      </p:sp>
+      <p:sp>
+        <p:nvSpPr>
+          <p:cNvPr id="33" name="Text 29"/>
+          <p:cNvSpPr/>
+          <p:nvPr/>
+        </p:nvSpPr>
+        <p:spPr>
+          <a:xfrm>
+            <a:off x="4937760" y="4014216"/>
+            <a:ext cx="3931920" cy="201168"/>
+          </a:xfrm>
+          <a:prstGeom prst="rect">
+            <a:avLst/>
+          </a:prstGeom>
+          <a:noFill/>
+          <a:ln/>
+        </p:spPr>
+        <p:txBody>
+          <a:bodyPr wrap="square" lIns="0" tIns="0" rIns="0" bIns="0" rtlCol="0" anchor="ctr"/>
+          <a:lstStyle/>
+          <a:p>
+            <a:pPr marL="0" indent="0">
+              <a:buNone/>
+            </a:pPr>
+            <a:r>
+              <a:rPr lang="en-US" sz="1200" b="1" dirty="0">
+                <a:solidFill>
+                  <a:srgbClr val="1E293B"/>
+                </a:solidFill>
+                <a:latin typeface="Calibri" pitchFamily="34" charset="0"/>
+                <a:ea typeface="Calibri" pitchFamily="34" charset="-122"/>
+                <a:cs typeface="Calibri" pitchFamily="34" charset="-120"/>
+              </a:rPr>
+              <a:t>Why LoRA only?</a:t>
+            </a:r>
+            <a:endParaRPr lang="en-US" sz="1200" dirty="0"/>
+          </a:p>
+        </p:txBody>
+      </p:sp>
+      <p:sp>
+        <p:nvSpPr>
+          <p:cNvPr id="34" name="Text 30"/>
+          <p:cNvSpPr/>
+          <p:nvPr/>
+        </p:nvSpPr>
+        <p:spPr>
+          <a:xfrm>
+            <a:off x="4937760" y="4180918"/>
+            <a:ext cx="3931920" cy="182880"/>
+          </a:xfrm>
+          <a:prstGeom prst="rect">
+            <a:avLst/>
+          </a:prstGeom>
+          <a:noFill/>
+          <a:ln/>
+        </p:spPr>
+        <p:txBody>
+          <a:bodyPr wrap="square" lIns="0" tIns="0" rIns="0" bIns="0" rtlCol="0" anchor="t"/>
+          <a:lstStyle/>
+          <a:p>
+            <a:pPr marL="0" indent="0">
+              <a:buNone/>
+            </a:pPr>
+            <a:r>
+              <a:rPr lang="en-US" sz="1200" dirty="0">
+                <a:solidFill>
+                  <a:srgbClr val="475569"/>
+                </a:solidFill>
+                <a:latin typeface="Calibri" pitchFamily="34" charset="0"/>
+                <a:ea typeface="Calibri" pitchFamily="34" charset="-122"/>
+                <a:cs typeface="Calibri" pitchFamily="34" charset="-120"/>
+              </a:rPr>
+              <a:t>Trains &lt;1 % of params; full 184 M fits T4 in fp32</a:t>
+            </a:r>
+            <a:endParaRPr lang="en-US" sz="1200" dirty="0"/>
+          </a:p>
+        </p:txBody>
+      </p:sp>
+      <p:sp>
+        <p:nvSpPr>
+          <p:cNvPr id="35" name="Shape 31"/>
+          <p:cNvSpPr/>
+          <p:nvPr/>
+        </p:nvSpPr>
+        <p:spPr>
+          <a:xfrm>
+            <a:off x="4709160" y="4507992"/>
+            <a:ext cx="164592" cy="164592"/>
+          </a:xfrm>
+          <a:prstGeom prst="ellipse">
+            <a:avLst/>
+          </a:prstGeom>
+          <a:solidFill>
+            <a:srgbClr val="F5A623"/>
+          </a:solidFill>
+          <a:ln w="12700">
+            <a:solidFill>
+              <a:srgbClr val="F5A623"/>
+            </a:solidFill>
+            <a:prstDash val="solid"/>
+          </a:ln>
+        </p:spPr>
+      </p:sp>
+      <p:sp>
+        <p:nvSpPr>
+          <p:cNvPr id="36" name="Text 32"/>
+          <p:cNvSpPr/>
+          <p:nvPr/>
+        </p:nvSpPr>
+        <p:spPr>
+          <a:xfrm>
+            <a:off x="4937760" y="4398969"/>
+            <a:ext cx="3931920" cy="201168"/>
+          </a:xfrm>
+          <a:prstGeom prst="rect">
+            <a:avLst/>
+          </a:prstGeom>
+          <a:noFill/>
+          <a:ln/>
+        </p:spPr>
+        <p:txBody>
+          <a:bodyPr wrap="square" lIns="0" tIns="0" rIns="0" bIns="0" rtlCol="0" anchor="ctr"/>
+          <a:lstStyle/>
+          <a:p>
+            <a:pPr marL="0" indent="0">
+              <a:buNone/>
+            </a:pPr>
+            <a:r>
+              <a:rPr lang="en-US" sz="1200" b="1" dirty="0">
+                <a:solidFill>
+                  <a:srgbClr val="1E293B"/>
+                </a:solidFill>
+                <a:latin typeface="Calibri" pitchFamily="34" charset="0"/>
+                <a:ea typeface="Calibri" pitchFamily="34" charset="-122"/>
+                <a:cs typeface="Calibri" pitchFamily="34" charset="-120"/>
+              </a:rPr>
+              <a:t>Why fp32?</a:t>
+            </a:r>
+            <a:endParaRPr lang="en-US" sz="1200" dirty="0"/>
+          </a:p>
+        </p:txBody>
+      </p:sp>
+      <p:sp>
+        <p:nvSpPr>
+          <p:cNvPr id="37" name="Text 33"/>
+          <p:cNvSpPr/>
+          <p:nvPr/>
+        </p:nvSpPr>
+        <p:spPr>
+          <a:xfrm>
+            <a:off x="4937760" y="4617720"/>
+            <a:ext cx="3931920" cy="182880"/>
+          </a:xfrm>
+          <a:prstGeom prst="rect">
+            <a:avLst/>
+          </a:prstGeom>
+          <a:noFill/>
+          <a:ln/>
+        </p:spPr>
+        <p:txBody>
+          <a:bodyPr wrap="square" lIns="0" tIns="0" rIns="0" bIns="0" rtlCol="0" anchor="t"/>
+          <a:lstStyle/>
+          <a:p>
+            <a:pPr marL="0" indent="0">
+              <a:buNone/>
+            </a:pPr>
+            <a:r>
+              <a:rPr lang="en-US" sz="1200" dirty="0">
+                <a:solidFill>
+                  <a:srgbClr val="475569"/>
+                </a:solidFill>
+                <a:latin typeface="Calibri" pitchFamily="34" charset="0"/>
+                <a:ea typeface="Calibri" pitchFamily="34" charset="-122"/>
+                <a:cs typeface="Calibri" pitchFamily="34" charset="-120"/>
+              </a:rPr>
+              <a:t>DeBERTa disentangled attention produces NaN in fp16</a:t>
+            </a:r>
+            <a:endParaRPr lang="en-US" sz="1200" dirty="0"/>
+          </a:p>
+        </p:txBody>
+      </p:sp>
     </p:spTree>
   </p:cSld>
   <p:clrMapOvr>
